--- a/Athanase_Endowment_Pitch_22pp.pptx
+++ b/Athanase_Endowment_Pitch_22pp.pptx
@@ -14,6 +14,7 @@
     <p:sldId id="267" r:id="rId8"/>
     <p:sldId id="284" r:id="rId9"/>
     <p:sldId id="271" r:id="rId10"/>
+    <p:sldId id="341" r:id="rId11"/>
     <p:sldId id="278" r:id="rId12"/>
     <p:sldId id="339" r:id="rId13"/>
     <p:sldId id="279" r:id="rId14"/>
@@ -4889,7 +4890,7 @@
 </file>
 
 <file path=ppt/slides/slide10.xml><?xml version="1.0" encoding="utf-8"?>
-<p:sld xmlns:a="http://schemas.openxmlformats.org/drawingml/2006/main" xmlns:r="http://schemas.openxmlformats.org/officeDocument/2006/relationships" xmlns:p="http://schemas.openxmlformats.org/presentationml/2006/main">
+<p:sld xmlns:a="http://schemas.openxmlformats.org/drawingml/2006/main" xmlns:p="http://schemas.openxmlformats.org/presentationml/2006/main" xmlns:r="http://schemas.openxmlformats.org/officeDocument/2006/relationships">
   <p:cSld>
     <p:spTree>
       <p:nvGrpSpPr>
@@ -4897,14 +4898,7 @@
         <p:cNvGrpSpPr/>
         <p:nvPr/>
       </p:nvGrpSpPr>
-      <p:grpSpPr>
-        <a:xfrm>
-          <a:off x="0" y="0"/>
-          <a:ext cx="0" cy="0"/>
-          <a:chOff x="0" y="0"/>
-          <a:chExt cx="0" cy="0"/>
-        </a:xfrm>
-      </p:grpSpPr>
+      <p:grpSpPr/>
       <p:sp>
         <p:nvSpPr>
           <p:cNvPr id="2" name="Rectangle 1"/>
@@ -5098,7 +5092,7 @@
                 </a:solidFill>
                 <a:latin typeface="Times New Roman"/>
               </a:rPr>
-              <a:t>An integrated team, 20 years together</a:t>
+              <a:t>The people behind the track record</a:t>
             </a:r>
           </a:p>
         </p:txBody>
@@ -5140,7 +5134,7 @@
                 </a:solidFill>
                 <a:latin typeface="Arial"/>
               </a:rPr>
-              <a:t>In a world of specialists, a rare unit that has the operating experience to control the outcome.</a:t>
+              <a:t>An integrated investment team — and an independent operations, finance and control function that safeguards investor capital.</a:t>
             </a:r>
           </a:p>
         </p:txBody>
@@ -5182,27 +5176,69 @@
                 </a:solidFill>
                 <a:latin typeface="Arial"/>
               </a:rPr>
-              <a:t>Strictly confidential          9</a:t>
-            </a:r>
-          </a:p>
-        </p:txBody>
-      </p:sp>
-      <p:sp>
-        <p:nvSpPr>
-          <p:cNvPr id="9" name="Rectangle 8"/>
+              <a:t>Strictly confidential          11</a:t>
+            </a:r>
+          </a:p>
+        </p:txBody>
+      </p:sp>
+      <p:sp>
+        <p:nvSpPr>
+          <p:cNvPr id="9" name="TextBox 8"/>
+          <p:cNvSpPr txBox="1"/>
+          <p:nvPr/>
+        </p:nvSpPr>
+        <p:spPr>
+          <a:xfrm>
+            <a:off x="438922" y="2126284"/>
+            <a:ext cx="5852306" cy="292608"/>
+          </a:xfrm>
+          <a:prstGeom prst="rect">
+            <a:avLst/>
+          </a:prstGeom>
+          <a:noFill/>
+        </p:spPr>
+        <p:txBody>
+          <a:bodyPr wrap="square" lIns="0" tIns="0" rIns="0" bIns="0" anchor="t">
+            <a:spAutoFit/>
+          </a:bodyPr>
+          <a:lstStyle/>
+          <a:p>
+            <a:pPr algn="l">
+              <a:lnSpc>
+                <a:spcPct val="110000"/>
+              </a:lnSpc>
+              <a:spcAft>
+                <a:spcPts val="0"/>
+              </a:spcAft>
+            </a:pPr>
+            <a:r>
+              <a:rPr sz="880" b="1" i="0">
+                <a:solidFill>
+                  <a:srgbClr val="314359"/>
+                </a:solidFill>
+                <a:latin typeface="Arial"/>
+              </a:rPr>
+              <a:t>INVESTMENT TEAM</a:t>
+            </a:r>
+          </a:p>
+        </p:txBody>
+      </p:sp>
+      <p:sp>
+        <p:nvSpPr>
+          <p:cNvPr id="10" name="Rectangle 9"/>
           <p:cNvSpPr/>
           <p:nvPr/>
         </p:nvSpPr>
         <p:spPr>
           <a:xfrm>
-            <a:off x="1170461" y="2701747"/>
-            <a:ext cx="7242229" cy="21674"/>
+            <a:off x="438922" y="2438400"/>
+            <a:ext cx="1704484" cy="1463040"/>
           </a:xfrm>
           <a:prstGeom prst="rect">
             <a:avLst/>
           </a:prstGeom>
           <a:solidFill>
-            <a:srgbClr val="556A83"/>
+            <a:srgbClr val="F6F7F9"/>
           </a:solidFill>
           <a:ln>
             <a:noFill/>
@@ -5234,67 +5270,23 @@
       </p:sp>
       <p:sp>
         <p:nvSpPr>
-          <p:cNvPr id="10" name="TextBox 9"/>
-          <p:cNvSpPr txBox="1"/>
-          <p:nvPr/>
-        </p:nvSpPr>
-        <p:spPr>
-          <a:xfrm>
-            <a:off x="438922" y="2292096"/>
-            <a:ext cx="1463076" cy="341376"/>
-          </a:xfrm>
-          <a:prstGeom prst="rect">
-            <a:avLst/>
-          </a:prstGeom>
-          <a:noFill/>
-        </p:spPr>
-        <p:txBody>
-          <a:bodyPr wrap="square" lIns="0" tIns="0" rIns="0" bIns="0" anchor="t">
-            <a:spAutoFit/>
-          </a:bodyPr>
-          <a:lstStyle/>
-          <a:p>
-            <a:pPr algn="ctr">
-              <a:lnSpc>
-                <a:spcPct val="110000"/>
-              </a:lnSpc>
-              <a:spcAft>
-                <a:spcPts val="0"/>
-              </a:spcAft>
-            </a:pPr>
-            <a:r>
-              <a:rPr sz="1200" b="1" i="0">
-                <a:solidFill>
-                  <a:srgbClr val="314359"/>
-                </a:solidFill>
-                <a:latin typeface="Times New Roman"/>
-              </a:rPr>
-              <a:t>1992</a:t>
-            </a:r>
-          </a:p>
-        </p:txBody>
-      </p:sp>
-      <p:sp>
-        <p:nvSpPr>
-          <p:cNvPr id="11" name="Oval 10"/>
+          <p:cNvPr id="11" name="Rectangle 10"/>
           <p:cNvSpPr/>
           <p:nvPr/>
         </p:nvSpPr>
         <p:spPr>
           <a:xfrm>
-            <a:off x="1104622" y="2633472"/>
-            <a:ext cx="131676" cy="175564"/>
-          </a:xfrm>
-          <a:prstGeom prst="ellipse">
+            <a:off x="438922" y="2438400"/>
+            <a:ext cx="43892" cy="1463040"/>
+          </a:xfrm>
+          <a:prstGeom prst="rect">
             <a:avLst/>
           </a:prstGeom>
           <a:solidFill>
             <a:srgbClr val="152130"/>
           </a:solidFill>
-          <a:ln w="19050">
-            <a:solidFill>
-              <a:srgbClr val="FFFFFF"/>
-            </a:solidFill>
+          <a:ln>
+            <a:noFill/>
           </a:ln>
           <a:effectLst/>
         </p:spPr>
@@ -5329,8 +5321,8 @@
         </p:nvSpPr>
         <p:spPr>
           <a:xfrm>
-            <a:off x="365769" y="2857804"/>
-            <a:ext cx="1609384" cy="292608"/>
+            <a:off x="585230" y="2565196"/>
+            <a:ext cx="1470391" cy="292608"/>
           </a:xfrm>
           <a:prstGeom prst="rect">
             <a:avLst/>
@@ -5343,7 +5335,7 @@
           </a:bodyPr>
           <a:lstStyle/>
           <a:p>
-            <a:pPr algn="ctr">
+            <a:pPr algn="l">
               <a:lnSpc>
                 <a:spcPct val="110000"/>
               </a:lnSpc>
@@ -5352,13 +5344,13 @@
               </a:spcAft>
             </a:pPr>
             <a:r>
-              <a:rPr sz="960" b="0" i="0">
+              <a:rPr sz="1000" b="1" i="0">
                 <a:solidFill>
                   <a:srgbClr val="314359"/>
                 </a:solidFill>
-                <a:latin typeface="Arial"/>
-              </a:rPr>
-              <a:t>Öresund</a:t>
+                <a:latin typeface="Times New Roman"/>
+              </a:rPr>
+              <a:t>Stefan Charette</a:t>
             </a:r>
           </a:p>
         </p:txBody>
@@ -5371,8 +5363,8 @@
         </p:nvSpPr>
         <p:spPr>
           <a:xfrm>
-            <a:off x="2852999" y="2292096"/>
-            <a:ext cx="1463076" cy="341376"/>
+            <a:off x="585230" y="2848051"/>
+            <a:ext cx="1470391" cy="234086"/>
           </a:xfrm>
           <a:prstGeom prst="rect">
             <a:avLst/>
@@ -5385,7 +5377,7 @@
           </a:bodyPr>
           <a:lstStyle/>
           <a:p>
-            <a:pPr algn="ctr">
+            <a:pPr algn="l">
               <a:lnSpc>
                 <a:spcPct val="110000"/>
               </a:lnSpc>
@@ -5394,38 +5386,78 @@
               </a:spcAft>
             </a:pPr>
             <a:r>
-              <a:rPr sz="1200" b="1" i="0">
+              <a:rPr sz="680" b="1" i="0">
                 <a:solidFill>
                   <a:srgbClr val="314359"/>
                 </a:solidFill>
-                <a:latin typeface="Times New Roman"/>
-              </a:rPr>
-              <a:t>1996</a:t>
-            </a:r>
-          </a:p>
-        </p:txBody>
-      </p:sp>
-      <p:sp>
-        <p:nvSpPr>
-          <p:cNvPr id="14" name="Oval 13"/>
+                <a:latin typeface="Arial"/>
+              </a:rPr>
+              <a:t>CIO &amp; PARTNER</a:t>
+            </a:r>
+          </a:p>
+        </p:txBody>
+      </p:sp>
+      <p:sp>
+        <p:nvSpPr>
+          <p:cNvPr id="14" name="TextBox 13"/>
+          <p:cNvSpPr txBox="1"/>
+          <p:nvPr/>
+        </p:nvSpPr>
+        <p:spPr>
+          <a:xfrm>
+            <a:off x="585230" y="3101644"/>
+            <a:ext cx="1455761" cy="682752"/>
+          </a:xfrm>
+          <a:prstGeom prst="rect">
+            <a:avLst/>
+          </a:prstGeom>
+          <a:noFill/>
+        </p:spPr>
+        <p:txBody>
+          <a:bodyPr wrap="square" lIns="0" tIns="0" rIns="0" bIns="0" anchor="t">
+            <a:spAutoFit/>
+          </a:bodyPr>
+          <a:lstStyle/>
+          <a:p>
+            <a:pPr algn="l">
+              <a:lnSpc>
+                <a:spcPct val="110000"/>
+              </a:lnSpc>
+              <a:spcAft>
+                <a:spcPts val="0"/>
+              </a:spcAft>
+            </a:pPr>
+            <a:r>
+              <a:rPr sz="720" b="0" i="0">
+                <a:solidFill>
+                  <a:srgbClr val="0E1620"/>
+                </a:solidFill>
+                <a:latin typeface="Arial"/>
+              </a:rPr>
+              <a:t>CEO/CIO of Custos, Investment AB Öresund and Creades; CEO of Brokk; investment banker at Lehman Brothers and Salomon Smith Barney.</a:t>
+            </a:r>
+          </a:p>
+        </p:txBody>
+      </p:sp>
+      <p:sp>
+        <p:nvSpPr>
+          <p:cNvPr id="15" name="Rectangle 14"/>
           <p:cNvSpPr/>
           <p:nvPr/>
         </p:nvSpPr>
         <p:spPr>
           <a:xfrm>
-            <a:off x="3518699" y="2633472"/>
-            <a:ext cx="131676" cy="175564"/>
-          </a:xfrm>
-          <a:prstGeom prst="ellipse">
+            <a:off x="2231191" y="2438400"/>
+            <a:ext cx="1704484" cy="1463040"/>
+          </a:xfrm>
+          <a:prstGeom prst="rect">
             <a:avLst/>
           </a:prstGeom>
           <a:solidFill>
-            <a:srgbClr val="152130"/>
+            <a:srgbClr val="F6F7F9"/>
           </a:solidFill>
-          <a:ln w="19050">
-            <a:solidFill>
-              <a:srgbClr val="FFFFFF"/>
-            </a:solidFill>
+          <a:ln>
+            <a:noFill/>
           </a:ln>
           <a:effectLst/>
         </p:spPr>
@@ -5454,109 +5486,23 @@
       </p:sp>
       <p:sp>
         <p:nvSpPr>
-          <p:cNvPr id="15" name="TextBox 14"/>
-          <p:cNvSpPr txBox="1"/>
-          <p:nvPr/>
-        </p:nvSpPr>
-        <p:spPr>
-          <a:xfrm>
-            <a:off x="2779845" y="2857804"/>
-            <a:ext cx="1609384" cy="292608"/>
-          </a:xfrm>
-          <a:prstGeom prst="rect">
-            <a:avLst/>
-          </a:prstGeom>
-          <a:noFill/>
-        </p:spPr>
-        <p:txBody>
-          <a:bodyPr wrap="square" lIns="0" tIns="0" rIns="0" bIns="0" anchor="t">
-            <a:spAutoFit/>
-          </a:bodyPr>
-          <a:lstStyle/>
-          <a:p>
-            <a:pPr algn="ctr">
-              <a:lnSpc>
-                <a:spcPct val="110000"/>
-              </a:lnSpc>
-              <a:spcAft>
-                <a:spcPts val="0"/>
-              </a:spcAft>
-            </a:pPr>
-            <a:r>
-              <a:rPr sz="960" b="0" i="0">
-                <a:solidFill>
-                  <a:srgbClr val="314359"/>
-                </a:solidFill>
-                <a:latin typeface="Arial"/>
-              </a:rPr>
-              <a:t>Custos</a:t>
-            </a:r>
-          </a:p>
-        </p:txBody>
-      </p:sp>
-      <p:sp>
-        <p:nvSpPr>
-          <p:cNvPr id="16" name="TextBox 15"/>
-          <p:cNvSpPr txBox="1"/>
-          <p:nvPr/>
-        </p:nvSpPr>
-        <p:spPr>
-          <a:xfrm>
-            <a:off x="5267075" y="2292096"/>
-            <a:ext cx="1463076" cy="341376"/>
-          </a:xfrm>
-          <a:prstGeom prst="rect">
-            <a:avLst/>
-          </a:prstGeom>
-          <a:noFill/>
-        </p:spPr>
-        <p:txBody>
-          <a:bodyPr wrap="square" lIns="0" tIns="0" rIns="0" bIns="0" anchor="t">
-            <a:spAutoFit/>
-          </a:bodyPr>
-          <a:lstStyle/>
-          <a:p>
-            <a:pPr algn="ctr">
-              <a:lnSpc>
-                <a:spcPct val="110000"/>
-              </a:lnSpc>
-              <a:spcAft>
-                <a:spcPts val="0"/>
-              </a:spcAft>
-            </a:pPr>
-            <a:r>
-              <a:rPr sz="1200" b="1" i="0">
-                <a:solidFill>
-                  <a:srgbClr val="314359"/>
-                </a:solidFill>
-                <a:latin typeface="Times New Roman"/>
-              </a:rPr>
-              <a:t>2006</a:t>
-            </a:r>
-          </a:p>
-        </p:txBody>
-      </p:sp>
-      <p:sp>
-        <p:nvSpPr>
-          <p:cNvPr id="17" name="Oval 16"/>
+          <p:cNvPr id="16" name="Rectangle 15"/>
           <p:cNvSpPr/>
           <p:nvPr/>
         </p:nvSpPr>
         <p:spPr>
           <a:xfrm>
-            <a:off x="5932775" y="2633472"/>
-            <a:ext cx="131676" cy="175564"/>
-          </a:xfrm>
-          <a:prstGeom prst="ellipse">
+            <a:off x="2231191" y="2438400"/>
+            <a:ext cx="43892" cy="1463040"/>
+          </a:xfrm>
+          <a:prstGeom prst="rect">
             <a:avLst/>
           </a:prstGeom>
           <a:solidFill>
             <a:srgbClr val="152130"/>
           </a:solidFill>
-          <a:ln w="19050">
-            <a:solidFill>
-              <a:srgbClr val="FFFFFF"/>
-            </a:solidFill>
+          <a:ln>
+            <a:noFill/>
           </a:ln>
           <a:effectLst/>
         </p:spPr>
@@ -5585,14 +5531,56 @@
       </p:sp>
       <p:sp>
         <p:nvSpPr>
+          <p:cNvPr id="17" name="TextBox 16"/>
+          <p:cNvSpPr txBox="1"/>
+          <p:nvPr/>
+        </p:nvSpPr>
+        <p:spPr>
+          <a:xfrm>
+            <a:off x="2377499" y="2565196"/>
+            <a:ext cx="1470391" cy="292608"/>
+          </a:xfrm>
+          <a:prstGeom prst="rect">
+            <a:avLst/>
+          </a:prstGeom>
+          <a:noFill/>
+        </p:spPr>
+        <p:txBody>
+          <a:bodyPr wrap="square" lIns="0" tIns="0" rIns="0" bIns="0" anchor="t">
+            <a:spAutoFit/>
+          </a:bodyPr>
+          <a:lstStyle/>
+          <a:p>
+            <a:pPr algn="l">
+              <a:lnSpc>
+                <a:spcPct val="110000"/>
+              </a:lnSpc>
+              <a:spcAft>
+                <a:spcPts val="0"/>
+              </a:spcAft>
+            </a:pPr>
+            <a:r>
+              <a:rPr sz="1000" b="1" i="0">
+                <a:solidFill>
+                  <a:srgbClr val="314359"/>
+                </a:solidFill>
+                <a:latin typeface="Times New Roman"/>
+              </a:rPr>
+              <a:t>Kenth Eriksson</a:t>
+            </a:r>
+          </a:p>
+        </p:txBody>
+      </p:sp>
+      <p:sp>
+        <p:nvSpPr>
           <p:cNvPr id="18" name="TextBox 17"/>
           <p:cNvSpPr txBox="1"/>
           <p:nvPr/>
         </p:nvSpPr>
         <p:spPr>
           <a:xfrm>
-            <a:off x="5193921" y="2857804"/>
-            <a:ext cx="1609384" cy="292608"/>
+            <a:off x="2377499" y="2848051"/>
+            <a:ext cx="1470391" cy="234086"/>
           </a:xfrm>
           <a:prstGeom prst="rect">
             <a:avLst/>
@@ -5605,7 +5593,7 @@
           </a:bodyPr>
           <a:lstStyle/>
           <a:p>
-            <a:pPr algn="ctr">
+            <a:pPr algn="l">
               <a:lnSpc>
                 <a:spcPct val="110000"/>
               </a:lnSpc>
@@ -5614,13 +5602,13 @@
               </a:spcAft>
             </a:pPr>
             <a:r>
-              <a:rPr sz="960" b="0" i="0">
+              <a:rPr sz="680" b="1" i="0">
                 <a:solidFill>
                   <a:srgbClr val="314359"/>
                 </a:solidFill>
                 <a:latin typeface="Arial"/>
               </a:rPr>
-              <a:t>Creades</a:t>
+              <a:t>SENIOR PM &amp; PARTNER</a:t>
             </a:r>
           </a:p>
         </p:txBody>
@@ -5633,8 +5621,8 @@
         </p:nvSpPr>
         <p:spPr>
           <a:xfrm>
-            <a:off x="7681152" y="2292096"/>
-            <a:ext cx="1463076" cy="341376"/>
+            <a:off x="2377499" y="3101644"/>
+            <a:ext cx="1455761" cy="682752"/>
           </a:xfrm>
           <a:prstGeom prst="rect">
             <a:avLst/>
@@ -5647,7 +5635,7 @@
           </a:bodyPr>
           <a:lstStyle/>
           <a:p>
-            <a:pPr algn="ctr">
+            <a:pPr algn="l">
               <a:lnSpc>
                 <a:spcPct val="110000"/>
               </a:lnSpc>
@@ -5656,38 +5644,36 @@
               </a:spcAft>
             </a:pPr>
             <a:r>
-              <a:rPr sz="1200" b="1" i="0">
-                <a:solidFill>
-                  <a:srgbClr val="314359"/>
-                </a:solidFill>
-                <a:latin typeface="Times New Roman"/>
-              </a:rPr>
-              <a:t>2015</a:t>
-            </a:r>
-          </a:p>
-        </p:txBody>
-      </p:sp>
-      <p:sp>
-        <p:nvSpPr>
-          <p:cNvPr id="20" name="Oval 19"/>
+              <a:rPr sz="720" b="0" i="0">
+                <a:solidFill>
+                  <a:srgbClr val="0E1620"/>
+                </a:solidFill>
+                <a:latin typeface="Arial"/>
+              </a:rPr>
+              <a:t>Ex-CEO of Tradimus; Senior VP, Electrolux; tech owner-operator.</a:t>
+            </a:r>
+          </a:p>
+        </p:txBody>
+      </p:sp>
+      <p:sp>
+        <p:nvSpPr>
+          <p:cNvPr id="20" name="Rectangle 19"/>
           <p:cNvSpPr/>
           <p:nvPr/>
         </p:nvSpPr>
         <p:spPr>
           <a:xfrm>
-            <a:off x="8346852" y="2633472"/>
-            <a:ext cx="131676" cy="175564"/>
-          </a:xfrm>
-          <a:prstGeom prst="ellipse">
+            <a:off x="4023460" y="2438400"/>
+            <a:ext cx="1704484" cy="1463040"/>
+          </a:xfrm>
+          <a:prstGeom prst="rect">
             <a:avLst/>
           </a:prstGeom>
           <a:solidFill>
-            <a:srgbClr val="152130"/>
+            <a:srgbClr val="F6F7F9"/>
           </a:solidFill>
-          <a:ln w="19050">
-            <a:solidFill>
-              <a:srgbClr val="FFFFFF"/>
-            </a:solidFill>
+          <a:ln>
+            <a:noFill/>
           </a:ln>
           <a:effectLst/>
         </p:spPr>
@@ -5716,14 +5702,59 @@
       </p:sp>
       <p:sp>
         <p:nvSpPr>
-          <p:cNvPr id="21" name="TextBox 20"/>
-          <p:cNvSpPr txBox="1"/>
-          <p:nvPr/>
-        </p:nvSpPr>
-        <p:spPr>
-          <a:xfrm>
-            <a:off x="7607998" y="2857804"/>
-            <a:ext cx="1609384" cy="292608"/>
+          <p:cNvPr id="21" name="Rectangle 20"/>
+          <p:cNvSpPr/>
+          <p:nvPr/>
+        </p:nvSpPr>
+        <p:spPr>
+          <a:xfrm>
+            <a:off x="4023460" y="2438400"/>
+            <a:ext cx="43892" cy="1463040"/>
+          </a:xfrm>
+          <a:prstGeom prst="rect">
+            <a:avLst/>
+          </a:prstGeom>
+          <a:solidFill>
+            <a:srgbClr val="152130"/>
+          </a:solidFill>
+          <a:ln>
+            <a:noFill/>
+          </a:ln>
+          <a:effectLst/>
+        </p:spPr>
+        <p:style>
+          <a:lnRef idx="1">
+            <a:schemeClr val="accent1"/>
+          </a:lnRef>
+          <a:fillRef idx="3">
+            <a:schemeClr val="accent1"/>
+          </a:fillRef>
+          <a:effectRef idx="2">
+            <a:schemeClr val="accent1"/>
+          </a:effectRef>
+          <a:fontRef idx="minor">
+            <a:schemeClr val="lt1"/>
+          </a:fontRef>
+        </p:style>
+        <p:txBody>
+          <a:bodyPr rtlCol="0" anchor="ctr"/>
+          <a:lstStyle/>
+          <a:p>
+            <a:pPr algn="ctr"/>
+            <a:endParaRPr/>
+          </a:p>
+        </p:txBody>
+      </p:sp>
+      <p:sp>
+        <p:nvSpPr>
+          <p:cNvPr id="22" name="TextBox 21"/>
+          <p:cNvSpPr txBox="1"/>
+          <p:nvPr/>
+        </p:nvSpPr>
+        <p:spPr>
+          <a:xfrm>
+            <a:off x="4169768" y="2565196"/>
+            <a:ext cx="1470391" cy="292608"/>
           </a:xfrm>
           <a:prstGeom prst="rect">
             <a:avLst/>
@@ -5736,7 +5767,7 @@
           </a:bodyPr>
           <a:lstStyle/>
           <a:p>
-            <a:pPr algn="ctr">
+            <a:pPr algn="l">
               <a:lnSpc>
                 <a:spcPct val="110000"/>
               </a:lnSpc>
@@ -5745,27 +5776,27 @@
               </a:spcAft>
             </a:pPr>
             <a:r>
-              <a:rPr sz="960" b="0" i="0">
+              <a:rPr sz="1000" b="1" i="0">
                 <a:solidFill>
                   <a:srgbClr val="314359"/>
                 </a:solidFill>
-                <a:latin typeface="Arial"/>
-              </a:rPr>
-              <a:t>Athanase</a:t>
-            </a:r>
-          </a:p>
-        </p:txBody>
-      </p:sp>
-      <p:sp>
-        <p:nvSpPr>
-          <p:cNvPr id="22" name="TextBox 21"/>
-          <p:cNvSpPr txBox="1"/>
-          <p:nvPr/>
-        </p:nvSpPr>
-        <p:spPr>
-          <a:xfrm>
-            <a:off x="548653" y="3511296"/>
-            <a:ext cx="8705305" cy="4584192"/>
+                <a:latin typeface="Times New Roman"/>
+              </a:rPr>
+              <a:t>Sven Thorén</a:t>
+            </a:r>
+          </a:p>
+        </p:txBody>
+      </p:sp>
+      <p:sp>
+        <p:nvSpPr>
+          <p:cNvPr id="23" name="TextBox 22"/>
+          <p:cNvSpPr txBox="1"/>
+          <p:nvPr/>
+        </p:nvSpPr>
+        <p:spPr>
+          <a:xfrm>
+            <a:off x="4169768" y="2848051"/>
+            <a:ext cx="1470391" cy="234086"/>
           </a:xfrm>
           <a:prstGeom prst="rect">
             <a:avLst/>
@@ -5778,143 +5809,1489 @@
           </a:bodyPr>
           <a:lstStyle/>
           <a:p>
-            <a:pPr marL="169422" indent="-169422">
-              <a:lnSpc>
-                <a:spcPct val="112000"/>
-              </a:lnSpc>
-              <a:spcAft>
-                <a:spcPts val="1000"/>
-              </a:spcAft>
-            </a:pPr>
-            <a:r>
-              <a:rPr sz="1160" b="1">
+            <a:pPr algn="l">
+              <a:lnSpc>
+                <a:spcPct val="110000"/>
+              </a:lnSpc>
+              <a:spcAft>
+                <a:spcPts val="0"/>
+              </a:spcAft>
+            </a:pPr>
+            <a:r>
+              <a:rPr sz="680" b="1" i="0">
                 <a:solidFill>
                   <a:srgbClr val="314359"/>
                 </a:solidFill>
                 <a:latin typeface="Arial"/>
               </a:rPr>
-              <a:t>›  38 companies managed,</a:t>
-            </a:r>
-            <a:r>
-              <a:rPr sz="1160">
+              <a:t>PM &amp; PARTNER</a:t>
+            </a:r>
+          </a:p>
+        </p:txBody>
+      </p:sp>
+      <p:sp>
+        <p:nvSpPr>
+          <p:cNvPr id="24" name="TextBox 23"/>
+          <p:cNvSpPr txBox="1"/>
+          <p:nvPr/>
+        </p:nvSpPr>
+        <p:spPr>
+          <a:xfrm>
+            <a:off x="4169768" y="3101644"/>
+            <a:ext cx="1455761" cy="682752"/>
+          </a:xfrm>
+          <a:prstGeom prst="rect">
+            <a:avLst/>
+          </a:prstGeom>
+          <a:noFill/>
+        </p:spPr>
+        <p:txBody>
+          <a:bodyPr wrap="square" lIns="0" tIns="0" rIns="0" bIns="0" anchor="t">
+            <a:spAutoFit/>
+          </a:bodyPr>
+          <a:lstStyle/>
+          <a:p>
+            <a:pPr algn="l">
+              <a:lnSpc>
+                <a:spcPct val="110000"/>
+              </a:lnSpc>
+              <a:spcAft>
+                <a:spcPts val="0"/>
+              </a:spcAft>
+            </a:pPr>
+            <a:r>
+              <a:rPr sz="720" b="0" i="0">
                 <a:solidFill>
                   <a:srgbClr val="0E1620"/>
                 </a:solidFill>
                 <a:latin typeface="Arial"/>
               </a:rPr>
-              <a:t>  with a proven ability to tell a “strong core” from a “prestige trap”.</a:t>
-            </a:r>
-          </a:p>
-          <a:p>
-            <a:pPr marL="169422" indent="-169422">
-              <a:lnSpc>
-                <a:spcPct val="112000"/>
-              </a:lnSpc>
-              <a:spcAft>
-                <a:spcPts val="1000"/>
-              </a:spcAft>
-            </a:pPr>
-            <a:r>
-              <a:rPr sz="1160" b="1">
+              <a:t>Ex-PM at Adrigo, Catella, Pan Capital and Nordea.</a:t>
+            </a:r>
+          </a:p>
+        </p:txBody>
+      </p:sp>
+      <p:sp>
+        <p:nvSpPr>
+          <p:cNvPr id="25" name="Rectangle 24"/>
+          <p:cNvSpPr/>
+          <p:nvPr/>
+        </p:nvSpPr>
+        <p:spPr>
+          <a:xfrm>
+            <a:off x="5815729" y="2438400"/>
+            <a:ext cx="1704484" cy="1463040"/>
+          </a:xfrm>
+          <a:prstGeom prst="rect">
+            <a:avLst/>
+          </a:prstGeom>
+          <a:solidFill>
+            <a:srgbClr val="F6F7F9"/>
+          </a:solidFill>
+          <a:ln>
+            <a:noFill/>
+          </a:ln>
+          <a:effectLst/>
+        </p:spPr>
+        <p:style>
+          <a:lnRef idx="1">
+            <a:schemeClr val="accent1"/>
+          </a:lnRef>
+          <a:fillRef idx="3">
+            <a:schemeClr val="accent1"/>
+          </a:fillRef>
+          <a:effectRef idx="2">
+            <a:schemeClr val="accent1"/>
+          </a:effectRef>
+          <a:fontRef idx="minor">
+            <a:schemeClr val="lt1"/>
+          </a:fontRef>
+        </p:style>
+        <p:txBody>
+          <a:bodyPr rtlCol="0" anchor="ctr"/>
+          <a:lstStyle/>
+          <a:p>
+            <a:pPr algn="ctr"/>
+            <a:endParaRPr/>
+          </a:p>
+        </p:txBody>
+      </p:sp>
+      <p:sp>
+        <p:nvSpPr>
+          <p:cNvPr id="26" name="Rectangle 25"/>
+          <p:cNvSpPr/>
+          <p:nvPr/>
+        </p:nvSpPr>
+        <p:spPr>
+          <a:xfrm>
+            <a:off x="5815729" y="2438400"/>
+            <a:ext cx="43892" cy="1463040"/>
+          </a:xfrm>
+          <a:prstGeom prst="rect">
+            <a:avLst/>
+          </a:prstGeom>
+          <a:solidFill>
+            <a:srgbClr val="152130"/>
+          </a:solidFill>
+          <a:ln>
+            <a:noFill/>
+          </a:ln>
+          <a:effectLst/>
+        </p:spPr>
+        <p:style>
+          <a:lnRef idx="1">
+            <a:schemeClr val="accent1"/>
+          </a:lnRef>
+          <a:fillRef idx="3">
+            <a:schemeClr val="accent1"/>
+          </a:fillRef>
+          <a:effectRef idx="2">
+            <a:schemeClr val="accent1"/>
+          </a:effectRef>
+          <a:fontRef idx="minor">
+            <a:schemeClr val="lt1"/>
+          </a:fontRef>
+        </p:style>
+        <p:txBody>
+          <a:bodyPr rtlCol="0" anchor="ctr"/>
+          <a:lstStyle/>
+          <a:p>
+            <a:pPr algn="ctr"/>
+            <a:endParaRPr/>
+          </a:p>
+        </p:txBody>
+      </p:sp>
+      <p:sp>
+        <p:nvSpPr>
+          <p:cNvPr id="27" name="TextBox 26"/>
+          <p:cNvSpPr txBox="1"/>
+          <p:nvPr/>
+        </p:nvSpPr>
+        <p:spPr>
+          <a:xfrm>
+            <a:off x="5962037" y="2565196"/>
+            <a:ext cx="1470391" cy="292608"/>
+          </a:xfrm>
+          <a:prstGeom prst="rect">
+            <a:avLst/>
+          </a:prstGeom>
+          <a:noFill/>
+        </p:spPr>
+        <p:txBody>
+          <a:bodyPr wrap="square" lIns="0" tIns="0" rIns="0" bIns="0" anchor="t">
+            <a:spAutoFit/>
+          </a:bodyPr>
+          <a:lstStyle/>
+          <a:p>
+            <a:pPr algn="l">
+              <a:lnSpc>
+                <a:spcPct val="110000"/>
+              </a:lnSpc>
+              <a:spcAft>
+                <a:spcPts val="0"/>
+              </a:spcAft>
+            </a:pPr>
+            <a:r>
+              <a:rPr sz="1000" b="1" i="0">
                 <a:solidFill>
                   <a:srgbClr val="314359"/>
                 </a:solidFill>
-                <a:latin typeface="Arial"/>
-              </a:rPr>
-              <a:t>›  30+ public board seats</a:t>
-            </a:r>
-            <a:r>
-              <a:rPr sz="1160">
+                <a:latin typeface="Times New Roman"/>
+              </a:rPr>
+              <a:t>Anders Elsell</a:t>
+            </a:r>
+          </a:p>
+        </p:txBody>
+      </p:sp>
+      <p:sp>
+        <p:nvSpPr>
+          <p:cNvPr id="28" name="TextBox 27"/>
+          <p:cNvSpPr txBox="1"/>
+          <p:nvPr/>
+        </p:nvSpPr>
+        <p:spPr>
+          <a:xfrm>
+            <a:off x="5962037" y="2848051"/>
+            <a:ext cx="1470391" cy="234086"/>
+          </a:xfrm>
+          <a:prstGeom prst="rect">
+            <a:avLst/>
+          </a:prstGeom>
+          <a:noFill/>
+        </p:spPr>
+        <p:txBody>
+          <a:bodyPr wrap="square" lIns="0" tIns="0" rIns="0" bIns="0" anchor="t">
+            <a:spAutoFit/>
+          </a:bodyPr>
+          <a:lstStyle/>
+          <a:p>
+            <a:pPr algn="l">
+              <a:lnSpc>
+                <a:spcPct val="110000"/>
+              </a:lnSpc>
+              <a:spcAft>
+                <a:spcPts val="0"/>
+              </a:spcAft>
+            </a:pPr>
+            <a:r>
+              <a:rPr sz="680" b="1" i="0">
+                <a:solidFill>
+                  <a:srgbClr val="314359"/>
+                </a:solidFill>
+                <a:latin typeface="Arial"/>
+              </a:rPr>
+              <a:t>SENIOR PM</a:t>
+            </a:r>
+          </a:p>
+        </p:txBody>
+      </p:sp>
+      <p:sp>
+        <p:nvSpPr>
+          <p:cNvPr id="29" name="TextBox 28"/>
+          <p:cNvSpPr txBox="1"/>
+          <p:nvPr/>
+        </p:nvSpPr>
+        <p:spPr>
+          <a:xfrm>
+            <a:off x="5962037" y="3101644"/>
+            <a:ext cx="1455761" cy="682752"/>
+          </a:xfrm>
+          <a:prstGeom prst="rect">
+            <a:avLst/>
+          </a:prstGeom>
+          <a:noFill/>
+        </p:spPr>
+        <p:txBody>
+          <a:bodyPr wrap="square" lIns="0" tIns="0" rIns="0" bIns="0" anchor="t">
+            <a:spAutoFit/>
+          </a:bodyPr>
+          <a:lstStyle/>
+          <a:p>
+            <a:pPr algn="l">
+              <a:lnSpc>
+                <a:spcPct val="110000"/>
+              </a:lnSpc>
+              <a:spcAft>
+                <a:spcPts val="0"/>
+              </a:spcAft>
+            </a:pPr>
+            <a:r>
+              <a:rPr sz="720" b="0" i="0">
                 <a:solidFill>
                   <a:srgbClr val="0E1620"/>
                 </a:solidFill>
                 <a:latin typeface="Arial"/>
               </a:rPr>
-              <a:t>  — real experience mandating pivots and protecting shareholder interests, not writing engagement letters.</a:t>
-            </a:r>
-          </a:p>
-          <a:p>
-            <a:pPr marL="169422" indent="-169422">
-              <a:lnSpc>
-                <a:spcPct val="112000"/>
-              </a:lnSpc>
-              <a:spcAft>
-                <a:spcPts val="1000"/>
-              </a:spcAft>
-            </a:pPr>
-            <a:r>
-              <a:rPr sz="1160" b="1">
+              <a:t>On the team since 1996; ex-CEO/CIO of HQ Fonder; Carnegie.</a:t>
+            </a:r>
+          </a:p>
+        </p:txBody>
+      </p:sp>
+      <p:sp>
+        <p:nvSpPr>
+          <p:cNvPr id="30" name="Rectangle 29"/>
+          <p:cNvSpPr/>
+          <p:nvPr/>
+        </p:nvSpPr>
+        <p:spPr>
+          <a:xfrm>
+            <a:off x="7607998" y="2438400"/>
+            <a:ext cx="1704484" cy="1463040"/>
+          </a:xfrm>
+          <a:prstGeom prst="rect">
+            <a:avLst/>
+          </a:prstGeom>
+          <a:solidFill>
+            <a:srgbClr val="F6F7F9"/>
+          </a:solidFill>
+          <a:ln>
+            <a:noFill/>
+          </a:ln>
+          <a:effectLst/>
+        </p:spPr>
+        <p:style>
+          <a:lnRef idx="1">
+            <a:schemeClr val="accent1"/>
+          </a:lnRef>
+          <a:fillRef idx="3">
+            <a:schemeClr val="accent1"/>
+          </a:fillRef>
+          <a:effectRef idx="2">
+            <a:schemeClr val="accent1"/>
+          </a:effectRef>
+          <a:fontRef idx="minor">
+            <a:schemeClr val="lt1"/>
+          </a:fontRef>
+        </p:style>
+        <p:txBody>
+          <a:bodyPr rtlCol="0" anchor="ctr"/>
+          <a:lstStyle/>
+          <a:p>
+            <a:pPr algn="ctr"/>
+            <a:endParaRPr/>
+          </a:p>
+        </p:txBody>
+      </p:sp>
+      <p:sp>
+        <p:nvSpPr>
+          <p:cNvPr id="31" name="Rectangle 30"/>
+          <p:cNvSpPr/>
+          <p:nvPr/>
+        </p:nvSpPr>
+        <p:spPr>
+          <a:xfrm>
+            <a:off x="7607998" y="2438400"/>
+            <a:ext cx="43892" cy="1463040"/>
+          </a:xfrm>
+          <a:prstGeom prst="rect">
+            <a:avLst/>
+          </a:prstGeom>
+          <a:solidFill>
+            <a:srgbClr val="152130"/>
+          </a:solidFill>
+          <a:ln>
+            <a:noFill/>
+          </a:ln>
+          <a:effectLst/>
+        </p:spPr>
+        <p:style>
+          <a:lnRef idx="1">
+            <a:schemeClr val="accent1"/>
+          </a:lnRef>
+          <a:fillRef idx="3">
+            <a:schemeClr val="accent1"/>
+          </a:fillRef>
+          <a:effectRef idx="2">
+            <a:schemeClr val="accent1"/>
+          </a:effectRef>
+          <a:fontRef idx="minor">
+            <a:schemeClr val="lt1"/>
+          </a:fontRef>
+        </p:style>
+        <p:txBody>
+          <a:bodyPr rtlCol="0" anchor="ctr"/>
+          <a:lstStyle/>
+          <a:p>
+            <a:pPr algn="ctr"/>
+            <a:endParaRPr/>
+          </a:p>
+        </p:txBody>
+      </p:sp>
+      <p:sp>
+        <p:nvSpPr>
+          <p:cNvPr id="32" name="TextBox 31"/>
+          <p:cNvSpPr txBox="1"/>
+          <p:nvPr/>
+        </p:nvSpPr>
+        <p:spPr>
+          <a:xfrm>
+            <a:off x="7754305" y="2565196"/>
+            <a:ext cx="1470391" cy="292608"/>
+          </a:xfrm>
+          <a:prstGeom prst="rect">
+            <a:avLst/>
+          </a:prstGeom>
+          <a:noFill/>
+        </p:spPr>
+        <p:txBody>
+          <a:bodyPr wrap="square" lIns="0" tIns="0" rIns="0" bIns="0" anchor="t">
+            <a:spAutoFit/>
+          </a:bodyPr>
+          <a:lstStyle/>
+          <a:p>
+            <a:pPr algn="l">
+              <a:lnSpc>
+                <a:spcPct val="110000"/>
+              </a:lnSpc>
+              <a:spcAft>
+                <a:spcPts val="0"/>
+              </a:spcAft>
+            </a:pPr>
+            <a:r>
+              <a:rPr sz="1000" b="1" i="0">
                 <a:solidFill>
                   <a:srgbClr val="314359"/>
                 </a:solidFill>
-                <a:latin typeface="Arial"/>
-              </a:rPr>
-              <a:t>›  A dual lens:</a:t>
-            </a:r>
-            <a:r>
-              <a:rPr sz="1160">
+                <a:latin typeface="Times New Roman"/>
+              </a:rPr>
+              <a:t>Daniel Nyhrén</a:t>
+            </a:r>
+          </a:p>
+        </p:txBody>
+      </p:sp>
+      <p:sp>
+        <p:nvSpPr>
+          <p:cNvPr id="33" name="TextBox 32"/>
+          <p:cNvSpPr txBox="1"/>
+          <p:nvPr/>
+        </p:nvSpPr>
+        <p:spPr>
+          <a:xfrm>
+            <a:off x="7754305" y="2848051"/>
+            <a:ext cx="1470391" cy="234086"/>
+          </a:xfrm>
+          <a:prstGeom prst="rect">
+            <a:avLst/>
+          </a:prstGeom>
+          <a:noFill/>
+        </p:spPr>
+        <p:txBody>
+          <a:bodyPr wrap="square" lIns="0" tIns="0" rIns="0" bIns="0" anchor="t">
+            <a:spAutoFit/>
+          </a:bodyPr>
+          <a:lstStyle/>
+          <a:p>
+            <a:pPr algn="l">
+              <a:lnSpc>
+                <a:spcPct val="110000"/>
+              </a:lnSpc>
+              <a:spcAft>
+                <a:spcPts val="0"/>
+              </a:spcAft>
+            </a:pPr>
+            <a:r>
+              <a:rPr sz="680" b="1" i="0">
+                <a:solidFill>
+                  <a:srgbClr val="314359"/>
+                </a:solidFill>
+                <a:latin typeface="Arial"/>
+              </a:rPr>
+              <a:t>PARTNER</a:t>
+            </a:r>
+          </a:p>
+        </p:txBody>
+      </p:sp>
+      <p:sp>
+        <p:nvSpPr>
+          <p:cNvPr id="34" name="TextBox 33"/>
+          <p:cNvSpPr txBox="1"/>
+          <p:nvPr/>
+        </p:nvSpPr>
+        <p:spPr>
+          <a:xfrm>
+            <a:off x="7754305" y="3101644"/>
+            <a:ext cx="1455761" cy="682752"/>
+          </a:xfrm>
+          <a:prstGeom prst="rect">
+            <a:avLst/>
+          </a:prstGeom>
+          <a:noFill/>
+        </p:spPr>
+        <p:txBody>
+          <a:bodyPr wrap="square" lIns="0" tIns="0" rIns="0" bIns="0" anchor="t">
+            <a:spAutoFit/>
+          </a:bodyPr>
+          <a:lstStyle/>
+          <a:p>
+            <a:pPr algn="l">
+              <a:lnSpc>
+                <a:spcPct val="110000"/>
+              </a:lnSpc>
+              <a:spcAft>
+                <a:spcPts val="0"/>
+              </a:spcAft>
+            </a:pPr>
+            <a:r>
+              <a:rPr sz="720" b="0" i="0">
                 <a:solidFill>
                   <a:srgbClr val="0E1620"/>
                 </a:solidFill>
                 <a:latin typeface="Arial"/>
               </a:rPr>
-              <a:t>  a forensic investing lens to find the value and a C-suite operating lens that understands the “how” of execution.</a:t>
-            </a:r>
-          </a:p>
-          <a:p>
-            <a:pPr marL="169422" indent="-169422">
-              <a:lnSpc>
-                <a:spcPct val="112000"/>
-              </a:lnSpc>
-              <a:spcAft>
-                <a:spcPts val="1000"/>
-              </a:spcAft>
-            </a:pPr>
-            <a:r>
-              <a:rPr sz="1160" b="1">
+              <a:t>On the team since 2006; ex-CFO of Global Batterier.</a:t>
+            </a:r>
+          </a:p>
+        </p:txBody>
+      </p:sp>
+      <p:sp>
+        <p:nvSpPr>
+          <p:cNvPr id="35" name="TextBox 34"/>
+          <p:cNvSpPr txBox="1"/>
+          <p:nvPr/>
+        </p:nvSpPr>
+        <p:spPr>
+          <a:xfrm>
+            <a:off x="438922" y="4096512"/>
+            <a:ext cx="6583844" cy="292608"/>
+          </a:xfrm>
+          <a:prstGeom prst="rect">
+            <a:avLst/>
+          </a:prstGeom>
+          <a:noFill/>
+        </p:spPr>
+        <p:txBody>
+          <a:bodyPr wrap="square" lIns="0" tIns="0" rIns="0" bIns="0" anchor="t">
+            <a:spAutoFit/>
+          </a:bodyPr>
+          <a:lstStyle/>
+          <a:p>
+            <a:pPr algn="l">
+              <a:lnSpc>
+                <a:spcPct val="110000"/>
+              </a:lnSpc>
+              <a:spcAft>
+                <a:spcPts val="0"/>
+              </a:spcAft>
+            </a:pPr>
+            <a:r>
+              <a:rPr sz="880" b="1" i="0">
                 <a:solidFill>
                   <a:srgbClr val="314359"/>
                 </a:solidFill>
                 <a:latin typeface="Arial"/>
               </a:rPr>
-              <a:t>›  Skin in the game.</a:t>
-            </a:r>
-            <a:r>
-              <a:rPr sz="1160">
+              <a:t>OPERATIONS, FINANCE &amp; CONTROL — INDEPENDENT OF THE INVESTMENT TEAM</a:t>
+            </a:r>
+          </a:p>
+        </p:txBody>
+      </p:sp>
+      <p:sp>
+        <p:nvSpPr>
+          <p:cNvPr id="36" name="Rectangle 35"/>
+          <p:cNvSpPr/>
+          <p:nvPr/>
+        </p:nvSpPr>
+        <p:spPr>
+          <a:xfrm>
+            <a:off x="438922" y="4408626"/>
+            <a:ext cx="2165353" cy="1414272"/>
+          </a:xfrm>
+          <a:prstGeom prst="rect">
+            <a:avLst/>
+          </a:prstGeom>
+          <a:solidFill>
+            <a:srgbClr val="F6F7F9"/>
+          </a:solidFill>
+          <a:ln>
+            <a:noFill/>
+          </a:ln>
+          <a:effectLst/>
+        </p:spPr>
+        <p:style>
+          <a:lnRef idx="1">
+            <a:schemeClr val="accent1"/>
+          </a:lnRef>
+          <a:fillRef idx="3">
+            <a:schemeClr val="accent1"/>
+          </a:fillRef>
+          <a:effectRef idx="2">
+            <a:schemeClr val="accent1"/>
+          </a:effectRef>
+          <a:fontRef idx="minor">
+            <a:schemeClr val="lt1"/>
+          </a:fontRef>
+        </p:style>
+        <p:txBody>
+          <a:bodyPr rtlCol="0" anchor="ctr"/>
+          <a:lstStyle/>
+          <a:p>
+            <a:pPr algn="ctr"/>
+            <a:endParaRPr/>
+          </a:p>
+        </p:txBody>
+      </p:sp>
+      <p:sp>
+        <p:nvSpPr>
+          <p:cNvPr id="37" name="Rectangle 36"/>
+          <p:cNvSpPr/>
+          <p:nvPr/>
+        </p:nvSpPr>
+        <p:spPr>
+          <a:xfrm>
+            <a:off x="438922" y="4408626"/>
+            <a:ext cx="43892" cy="1414272"/>
+          </a:xfrm>
+          <a:prstGeom prst="rect">
+            <a:avLst/>
+          </a:prstGeom>
+          <a:solidFill>
+            <a:srgbClr val="152130"/>
+          </a:solidFill>
+          <a:ln>
+            <a:noFill/>
+          </a:ln>
+          <a:effectLst/>
+        </p:spPr>
+        <p:style>
+          <a:lnRef idx="1">
+            <a:schemeClr val="accent1"/>
+          </a:lnRef>
+          <a:fillRef idx="3">
+            <a:schemeClr val="accent1"/>
+          </a:fillRef>
+          <a:effectRef idx="2">
+            <a:schemeClr val="accent1"/>
+          </a:effectRef>
+          <a:fontRef idx="minor">
+            <a:schemeClr val="lt1"/>
+          </a:fontRef>
+        </p:style>
+        <p:txBody>
+          <a:bodyPr rtlCol="0" anchor="ctr"/>
+          <a:lstStyle/>
+          <a:p>
+            <a:pPr algn="ctr"/>
+            <a:endParaRPr/>
+          </a:p>
+        </p:txBody>
+      </p:sp>
+      <p:sp>
+        <p:nvSpPr>
+          <p:cNvPr id="38" name="TextBox 37"/>
+          <p:cNvSpPr txBox="1"/>
+          <p:nvPr/>
+        </p:nvSpPr>
+        <p:spPr>
+          <a:xfrm>
+            <a:off x="585230" y="4535422"/>
+            <a:ext cx="1931261" cy="292608"/>
+          </a:xfrm>
+          <a:prstGeom prst="rect">
+            <a:avLst/>
+          </a:prstGeom>
+          <a:noFill/>
+        </p:spPr>
+        <p:txBody>
+          <a:bodyPr wrap="square" lIns="0" tIns="0" rIns="0" bIns="0" anchor="t">
+            <a:spAutoFit/>
+          </a:bodyPr>
+          <a:lstStyle/>
+          <a:p>
+            <a:pPr algn="l">
+              <a:lnSpc>
+                <a:spcPct val="110000"/>
+              </a:lnSpc>
+              <a:spcAft>
+                <a:spcPts val="0"/>
+              </a:spcAft>
+            </a:pPr>
+            <a:r>
+              <a:rPr sz="1000" b="1" i="0">
+                <a:solidFill>
+                  <a:srgbClr val="314359"/>
+                </a:solidFill>
+                <a:latin typeface="Times New Roman"/>
+              </a:rPr>
+              <a:t>Malin Norrman</a:t>
+            </a:r>
+          </a:p>
+        </p:txBody>
+      </p:sp>
+      <p:sp>
+        <p:nvSpPr>
+          <p:cNvPr id="39" name="TextBox 38"/>
+          <p:cNvSpPr txBox="1"/>
+          <p:nvPr/>
+        </p:nvSpPr>
+        <p:spPr>
+          <a:xfrm>
+            <a:off x="585230" y="4818277"/>
+            <a:ext cx="1931261" cy="234086"/>
+          </a:xfrm>
+          <a:prstGeom prst="rect">
+            <a:avLst/>
+          </a:prstGeom>
+          <a:noFill/>
+        </p:spPr>
+        <p:txBody>
+          <a:bodyPr wrap="square" lIns="0" tIns="0" rIns="0" bIns="0" anchor="t">
+            <a:spAutoFit/>
+          </a:bodyPr>
+          <a:lstStyle/>
+          <a:p>
+            <a:pPr algn="l">
+              <a:lnSpc>
+                <a:spcPct val="110000"/>
+              </a:lnSpc>
+              <a:spcAft>
+                <a:spcPts val="0"/>
+              </a:spcAft>
+            </a:pPr>
+            <a:r>
+              <a:rPr sz="680" b="1" i="0">
+                <a:solidFill>
+                  <a:srgbClr val="314359"/>
+                </a:solidFill>
+                <a:latin typeface="Arial"/>
+              </a:rPr>
+              <a:t>CFO</a:t>
+            </a:r>
+          </a:p>
+        </p:txBody>
+      </p:sp>
+      <p:sp>
+        <p:nvSpPr>
+          <p:cNvPr id="40" name="TextBox 39"/>
+          <p:cNvSpPr txBox="1"/>
+          <p:nvPr/>
+        </p:nvSpPr>
+        <p:spPr>
+          <a:xfrm>
+            <a:off x="585230" y="5071870"/>
+            <a:ext cx="1916630" cy="682752"/>
+          </a:xfrm>
+          <a:prstGeom prst="rect">
+            <a:avLst/>
+          </a:prstGeom>
+          <a:noFill/>
+        </p:spPr>
+        <p:txBody>
+          <a:bodyPr wrap="square" lIns="0" tIns="0" rIns="0" bIns="0" anchor="t">
+            <a:spAutoFit/>
+          </a:bodyPr>
+          <a:lstStyle/>
+          <a:p>
+            <a:pPr algn="l">
+              <a:lnSpc>
+                <a:spcPct val="110000"/>
+              </a:lnSpc>
+              <a:spcAft>
+                <a:spcPts val="0"/>
+              </a:spcAft>
+            </a:pPr>
+            <a:r>
+              <a:rPr sz="720" b="0" i="0">
                 <a:solidFill>
                   <a:srgbClr val="0E1620"/>
                 </a:solidFill>
                 <a:latin typeface="Arial"/>
               </a:rPr>
-              <a:t>  The team uses Athanase as its own investment vehicle and shares in the success economics.</a:t>
-            </a:r>
-          </a:p>
-          <a:p>
-            <a:pPr marL="169422" indent="-169422">
-              <a:lnSpc>
-                <a:spcPct val="112000"/>
-              </a:lnSpc>
-              <a:spcAft>
-                <a:spcPts val="1000"/>
-              </a:spcAft>
-            </a:pPr>
-            <a:r>
-              <a:rPr sz="1160" b="1">
+              <a:t>Ex-COO/CFO of Captor Fund Mgmt; risk manager at Carnegie and AB Industrivärden.</a:t>
+            </a:r>
+          </a:p>
+        </p:txBody>
+      </p:sp>
+      <p:sp>
+        <p:nvSpPr>
+          <p:cNvPr id="41" name="Rectangle 40"/>
+          <p:cNvSpPr/>
+          <p:nvPr/>
+        </p:nvSpPr>
+        <p:spPr>
+          <a:xfrm>
+            <a:off x="2699376" y="4408626"/>
+            <a:ext cx="2165353" cy="1414272"/>
+          </a:xfrm>
+          <a:prstGeom prst="rect">
+            <a:avLst/>
+          </a:prstGeom>
+          <a:solidFill>
+            <a:srgbClr val="F6F7F9"/>
+          </a:solidFill>
+          <a:ln>
+            <a:noFill/>
+          </a:ln>
+          <a:effectLst/>
+        </p:spPr>
+        <p:style>
+          <a:lnRef idx="1">
+            <a:schemeClr val="accent1"/>
+          </a:lnRef>
+          <a:fillRef idx="3">
+            <a:schemeClr val="accent1"/>
+          </a:fillRef>
+          <a:effectRef idx="2">
+            <a:schemeClr val="accent1"/>
+          </a:effectRef>
+          <a:fontRef idx="minor">
+            <a:schemeClr val="lt1"/>
+          </a:fontRef>
+        </p:style>
+        <p:txBody>
+          <a:bodyPr rtlCol="0" anchor="ctr"/>
+          <a:lstStyle/>
+          <a:p>
+            <a:pPr algn="ctr"/>
+            <a:endParaRPr/>
+          </a:p>
+        </p:txBody>
+      </p:sp>
+      <p:sp>
+        <p:nvSpPr>
+          <p:cNvPr id="42" name="Rectangle 41"/>
+          <p:cNvSpPr/>
+          <p:nvPr/>
+        </p:nvSpPr>
+        <p:spPr>
+          <a:xfrm>
+            <a:off x="2699376" y="4408626"/>
+            <a:ext cx="43892" cy="1414272"/>
+          </a:xfrm>
+          <a:prstGeom prst="rect">
+            <a:avLst/>
+          </a:prstGeom>
+          <a:solidFill>
+            <a:srgbClr val="152130"/>
+          </a:solidFill>
+          <a:ln>
+            <a:noFill/>
+          </a:ln>
+          <a:effectLst/>
+        </p:spPr>
+        <p:style>
+          <a:lnRef idx="1">
+            <a:schemeClr val="accent1"/>
+          </a:lnRef>
+          <a:fillRef idx="3">
+            <a:schemeClr val="accent1"/>
+          </a:fillRef>
+          <a:effectRef idx="2">
+            <a:schemeClr val="accent1"/>
+          </a:effectRef>
+          <a:fontRef idx="minor">
+            <a:schemeClr val="lt1"/>
+          </a:fontRef>
+        </p:style>
+        <p:txBody>
+          <a:bodyPr rtlCol="0" anchor="ctr"/>
+          <a:lstStyle/>
+          <a:p>
+            <a:pPr algn="ctr"/>
+            <a:endParaRPr/>
+          </a:p>
+        </p:txBody>
+      </p:sp>
+      <p:sp>
+        <p:nvSpPr>
+          <p:cNvPr id="43" name="TextBox 42"/>
+          <p:cNvSpPr txBox="1"/>
+          <p:nvPr/>
+        </p:nvSpPr>
+        <p:spPr>
+          <a:xfrm>
+            <a:off x="2845683" y="4535422"/>
+            <a:ext cx="1931261" cy="292608"/>
+          </a:xfrm>
+          <a:prstGeom prst="rect">
+            <a:avLst/>
+          </a:prstGeom>
+          <a:noFill/>
+        </p:spPr>
+        <p:txBody>
+          <a:bodyPr wrap="square" lIns="0" tIns="0" rIns="0" bIns="0" anchor="t">
+            <a:spAutoFit/>
+          </a:bodyPr>
+          <a:lstStyle/>
+          <a:p>
+            <a:pPr algn="l">
+              <a:lnSpc>
+                <a:spcPct val="110000"/>
+              </a:lnSpc>
+              <a:spcAft>
+                <a:spcPts val="0"/>
+              </a:spcAft>
+            </a:pPr>
+            <a:r>
+              <a:rPr sz="1000" b="1" i="0">
                 <a:solidFill>
                   <a:srgbClr val="314359"/>
                 </a:solidFill>
-                <a:latin typeface="Arial"/>
-              </a:rPr>
-              <a:t>›  Institutional memory.</a:t>
-            </a:r>
-            <a:r>
-              <a:rPr sz="1160">
+                <a:latin typeface="Times New Roman"/>
+              </a:rPr>
+              <a:t>Grant Loon</a:t>
+            </a:r>
+          </a:p>
+        </p:txBody>
+      </p:sp>
+      <p:sp>
+        <p:nvSpPr>
+          <p:cNvPr id="44" name="TextBox 43"/>
+          <p:cNvSpPr txBox="1"/>
+          <p:nvPr/>
+        </p:nvSpPr>
+        <p:spPr>
+          <a:xfrm>
+            <a:off x="2845683" y="4818277"/>
+            <a:ext cx="1931261" cy="234086"/>
+          </a:xfrm>
+          <a:prstGeom prst="rect">
+            <a:avLst/>
+          </a:prstGeom>
+          <a:noFill/>
+        </p:spPr>
+        <p:txBody>
+          <a:bodyPr wrap="square" lIns="0" tIns="0" rIns="0" bIns="0" anchor="t">
+            <a:spAutoFit/>
+          </a:bodyPr>
+          <a:lstStyle/>
+          <a:p>
+            <a:pPr algn="l">
+              <a:lnSpc>
+                <a:spcPct val="110000"/>
+              </a:lnSpc>
+              <a:spcAft>
+                <a:spcPts val="0"/>
+              </a:spcAft>
+            </a:pPr>
+            <a:r>
+              <a:rPr sz="680" b="1" i="0">
+                <a:solidFill>
+                  <a:srgbClr val="314359"/>
+                </a:solidFill>
+                <a:latin typeface="Arial"/>
+              </a:rPr>
+              <a:t>HEAD OF FUND OPERATIONS</a:t>
+            </a:r>
+          </a:p>
+        </p:txBody>
+      </p:sp>
+      <p:sp>
+        <p:nvSpPr>
+          <p:cNvPr id="45" name="TextBox 44"/>
+          <p:cNvSpPr txBox="1"/>
+          <p:nvPr/>
+        </p:nvSpPr>
+        <p:spPr>
+          <a:xfrm>
+            <a:off x="2845683" y="5071870"/>
+            <a:ext cx="1916630" cy="682752"/>
+          </a:xfrm>
+          <a:prstGeom prst="rect">
+            <a:avLst/>
+          </a:prstGeom>
+          <a:noFill/>
+        </p:spPr>
+        <p:txBody>
+          <a:bodyPr wrap="square" lIns="0" tIns="0" rIns="0" bIns="0" anchor="t">
+            <a:spAutoFit/>
+          </a:bodyPr>
+          <a:lstStyle/>
+          <a:p>
+            <a:pPr algn="l">
+              <a:lnSpc>
+                <a:spcPct val="110000"/>
+              </a:lnSpc>
+              <a:spcAft>
+                <a:spcPts val="0"/>
+              </a:spcAft>
+            </a:pPr>
+            <a:r>
+              <a:rPr sz="720" b="0" i="0">
                 <a:solidFill>
                   <a:srgbClr val="0E1620"/>
                 </a:solidFill>
                 <a:latin typeface="Arial"/>
               </a:rPr>
-              <a:t>  Multiple market cycles together eliminate key-person risk and prevent repeating historical mistakes.</a:t>
+              <a:t>Ex-COO of Madrague Capital and Port Capital; Soros, Commerzbank, Morgan Stanley.</a:t>
+            </a:r>
+          </a:p>
+        </p:txBody>
+      </p:sp>
+      <p:sp>
+        <p:nvSpPr>
+          <p:cNvPr id="46" name="Rectangle 45"/>
+          <p:cNvSpPr/>
+          <p:nvPr/>
+        </p:nvSpPr>
+        <p:spPr>
+          <a:xfrm>
+            <a:off x="4959829" y="4408626"/>
+            <a:ext cx="2165353" cy="1414272"/>
+          </a:xfrm>
+          <a:prstGeom prst="rect">
+            <a:avLst/>
+          </a:prstGeom>
+          <a:solidFill>
+            <a:srgbClr val="F6F7F9"/>
+          </a:solidFill>
+          <a:ln>
+            <a:noFill/>
+          </a:ln>
+          <a:effectLst/>
+        </p:spPr>
+        <p:style>
+          <a:lnRef idx="1">
+            <a:schemeClr val="accent1"/>
+          </a:lnRef>
+          <a:fillRef idx="3">
+            <a:schemeClr val="accent1"/>
+          </a:fillRef>
+          <a:effectRef idx="2">
+            <a:schemeClr val="accent1"/>
+          </a:effectRef>
+          <a:fontRef idx="minor">
+            <a:schemeClr val="lt1"/>
+          </a:fontRef>
+        </p:style>
+        <p:txBody>
+          <a:bodyPr rtlCol="0" anchor="ctr"/>
+          <a:lstStyle/>
+          <a:p>
+            <a:pPr algn="ctr"/>
+            <a:endParaRPr/>
+          </a:p>
+        </p:txBody>
+      </p:sp>
+      <p:sp>
+        <p:nvSpPr>
+          <p:cNvPr id="47" name="Rectangle 46"/>
+          <p:cNvSpPr/>
+          <p:nvPr/>
+        </p:nvSpPr>
+        <p:spPr>
+          <a:xfrm>
+            <a:off x="4959829" y="4408626"/>
+            <a:ext cx="43892" cy="1414272"/>
+          </a:xfrm>
+          <a:prstGeom prst="rect">
+            <a:avLst/>
+          </a:prstGeom>
+          <a:solidFill>
+            <a:srgbClr val="152130"/>
+          </a:solidFill>
+          <a:ln>
+            <a:noFill/>
+          </a:ln>
+          <a:effectLst/>
+        </p:spPr>
+        <p:style>
+          <a:lnRef idx="1">
+            <a:schemeClr val="accent1"/>
+          </a:lnRef>
+          <a:fillRef idx="3">
+            <a:schemeClr val="accent1"/>
+          </a:fillRef>
+          <a:effectRef idx="2">
+            <a:schemeClr val="accent1"/>
+          </a:effectRef>
+          <a:fontRef idx="minor">
+            <a:schemeClr val="lt1"/>
+          </a:fontRef>
+        </p:style>
+        <p:txBody>
+          <a:bodyPr rtlCol="0" anchor="ctr"/>
+          <a:lstStyle/>
+          <a:p>
+            <a:pPr algn="ctr"/>
+            <a:endParaRPr/>
+          </a:p>
+        </p:txBody>
+      </p:sp>
+      <p:sp>
+        <p:nvSpPr>
+          <p:cNvPr id="48" name="TextBox 47"/>
+          <p:cNvSpPr txBox="1"/>
+          <p:nvPr/>
+        </p:nvSpPr>
+        <p:spPr>
+          <a:xfrm>
+            <a:off x="5106137" y="4535422"/>
+            <a:ext cx="1931261" cy="292608"/>
+          </a:xfrm>
+          <a:prstGeom prst="rect">
+            <a:avLst/>
+          </a:prstGeom>
+          <a:noFill/>
+        </p:spPr>
+        <p:txBody>
+          <a:bodyPr wrap="square" lIns="0" tIns="0" rIns="0" bIns="0" anchor="t">
+            <a:spAutoFit/>
+          </a:bodyPr>
+          <a:lstStyle/>
+          <a:p>
+            <a:pPr algn="l">
+              <a:lnSpc>
+                <a:spcPct val="110000"/>
+              </a:lnSpc>
+              <a:spcAft>
+                <a:spcPts val="0"/>
+              </a:spcAft>
+            </a:pPr>
+            <a:r>
+              <a:rPr sz="1000" b="1" i="0">
+                <a:solidFill>
+                  <a:srgbClr val="314359"/>
+                </a:solidFill>
+                <a:latin typeface="Times New Roman"/>
+              </a:rPr>
+              <a:t>Eva Andersson</a:t>
+            </a:r>
+          </a:p>
+        </p:txBody>
+      </p:sp>
+      <p:sp>
+        <p:nvSpPr>
+          <p:cNvPr id="49" name="TextBox 48"/>
+          <p:cNvSpPr txBox="1"/>
+          <p:nvPr/>
+        </p:nvSpPr>
+        <p:spPr>
+          <a:xfrm>
+            <a:off x="5106137" y="4818277"/>
+            <a:ext cx="1931261" cy="234086"/>
+          </a:xfrm>
+          <a:prstGeom prst="rect">
+            <a:avLst/>
+          </a:prstGeom>
+          <a:noFill/>
+        </p:spPr>
+        <p:txBody>
+          <a:bodyPr wrap="square" lIns="0" tIns="0" rIns="0" bIns="0" anchor="t">
+            <a:spAutoFit/>
+          </a:bodyPr>
+          <a:lstStyle/>
+          <a:p>
+            <a:pPr algn="l">
+              <a:lnSpc>
+                <a:spcPct val="110000"/>
+              </a:lnSpc>
+              <a:spcAft>
+                <a:spcPts val="0"/>
+              </a:spcAft>
+            </a:pPr>
+            <a:r>
+              <a:rPr sz="680" b="1" i="0">
+                <a:solidFill>
+                  <a:srgbClr val="314359"/>
+                </a:solidFill>
+                <a:latin typeface="Arial"/>
+              </a:rPr>
+              <a:t>FUND OPERATIONS</a:t>
+            </a:r>
+          </a:p>
+        </p:txBody>
+      </p:sp>
+      <p:sp>
+        <p:nvSpPr>
+          <p:cNvPr id="50" name="TextBox 49"/>
+          <p:cNvSpPr txBox="1"/>
+          <p:nvPr/>
+        </p:nvSpPr>
+        <p:spPr>
+          <a:xfrm>
+            <a:off x="5106137" y="5071870"/>
+            <a:ext cx="1916630" cy="682752"/>
+          </a:xfrm>
+          <a:prstGeom prst="rect">
+            <a:avLst/>
+          </a:prstGeom>
+          <a:noFill/>
+        </p:spPr>
+        <p:txBody>
+          <a:bodyPr wrap="square" lIns="0" tIns="0" rIns="0" bIns="0" anchor="t">
+            <a:spAutoFit/>
+          </a:bodyPr>
+          <a:lstStyle/>
+          <a:p>
+            <a:pPr algn="l">
+              <a:lnSpc>
+                <a:spcPct val="110000"/>
+              </a:lnSpc>
+              <a:spcAft>
+                <a:spcPts val="0"/>
+              </a:spcAft>
+            </a:pPr>
+            <a:r>
+              <a:rPr sz="720" b="0" i="0">
+                <a:solidFill>
+                  <a:srgbClr val="0E1620"/>
+                </a:solidFill>
+                <a:latin typeface="Arial"/>
+              </a:rPr>
+              <a:t>MBA, Business School London; sales-executive background.</a:t>
+            </a:r>
+          </a:p>
+        </p:txBody>
+      </p:sp>
+      <p:sp>
+        <p:nvSpPr>
+          <p:cNvPr id="51" name="Rectangle 50"/>
+          <p:cNvSpPr/>
+          <p:nvPr/>
+        </p:nvSpPr>
+        <p:spPr>
+          <a:xfrm>
+            <a:off x="7220283" y="4408626"/>
+            <a:ext cx="2165353" cy="1414272"/>
+          </a:xfrm>
+          <a:prstGeom prst="rect">
+            <a:avLst/>
+          </a:prstGeom>
+          <a:solidFill>
+            <a:srgbClr val="F6F7F9"/>
+          </a:solidFill>
+          <a:ln>
+            <a:noFill/>
+          </a:ln>
+          <a:effectLst/>
+        </p:spPr>
+        <p:style>
+          <a:lnRef idx="1">
+            <a:schemeClr val="accent1"/>
+          </a:lnRef>
+          <a:fillRef idx="3">
+            <a:schemeClr val="accent1"/>
+          </a:fillRef>
+          <a:effectRef idx="2">
+            <a:schemeClr val="accent1"/>
+          </a:effectRef>
+          <a:fontRef idx="minor">
+            <a:schemeClr val="lt1"/>
+          </a:fontRef>
+        </p:style>
+        <p:txBody>
+          <a:bodyPr rtlCol="0" anchor="ctr"/>
+          <a:lstStyle/>
+          <a:p>
+            <a:pPr algn="ctr"/>
+            <a:endParaRPr/>
+          </a:p>
+        </p:txBody>
+      </p:sp>
+      <p:sp>
+        <p:nvSpPr>
+          <p:cNvPr id="52" name="Rectangle 51"/>
+          <p:cNvSpPr/>
+          <p:nvPr/>
+        </p:nvSpPr>
+        <p:spPr>
+          <a:xfrm>
+            <a:off x="7220283" y="4408626"/>
+            <a:ext cx="43892" cy="1414272"/>
+          </a:xfrm>
+          <a:prstGeom prst="rect">
+            <a:avLst/>
+          </a:prstGeom>
+          <a:solidFill>
+            <a:srgbClr val="152130"/>
+          </a:solidFill>
+          <a:ln>
+            <a:noFill/>
+          </a:ln>
+          <a:effectLst/>
+        </p:spPr>
+        <p:style>
+          <a:lnRef idx="1">
+            <a:schemeClr val="accent1"/>
+          </a:lnRef>
+          <a:fillRef idx="3">
+            <a:schemeClr val="accent1"/>
+          </a:fillRef>
+          <a:effectRef idx="2">
+            <a:schemeClr val="accent1"/>
+          </a:effectRef>
+          <a:fontRef idx="minor">
+            <a:schemeClr val="lt1"/>
+          </a:fontRef>
+        </p:style>
+        <p:txBody>
+          <a:bodyPr rtlCol="0" anchor="ctr"/>
+          <a:lstStyle/>
+          <a:p>
+            <a:pPr algn="ctr"/>
+            <a:endParaRPr/>
+          </a:p>
+        </p:txBody>
+      </p:sp>
+      <p:sp>
+        <p:nvSpPr>
+          <p:cNvPr id="53" name="TextBox 52"/>
+          <p:cNvSpPr txBox="1"/>
+          <p:nvPr/>
+        </p:nvSpPr>
+        <p:spPr>
+          <a:xfrm>
+            <a:off x="7366590" y="4535422"/>
+            <a:ext cx="1931261" cy="292608"/>
+          </a:xfrm>
+          <a:prstGeom prst="rect">
+            <a:avLst/>
+          </a:prstGeom>
+          <a:noFill/>
+        </p:spPr>
+        <p:txBody>
+          <a:bodyPr wrap="square" lIns="0" tIns="0" rIns="0" bIns="0" anchor="t">
+            <a:spAutoFit/>
+          </a:bodyPr>
+          <a:lstStyle/>
+          <a:p>
+            <a:pPr algn="l">
+              <a:lnSpc>
+                <a:spcPct val="110000"/>
+              </a:lnSpc>
+              <a:spcAft>
+                <a:spcPts val="0"/>
+              </a:spcAft>
+            </a:pPr>
+            <a:r>
+              <a:rPr sz="1000" b="1" i="0">
+                <a:solidFill>
+                  <a:srgbClr val="314359"/>
+                </a:solidFill>
+                <a:latin typeface="Times New Roman"/>
+              </a:rPr>
+              <a:t>Zetong Liu</a:t>
+            </a:r>
+          </a:p>
+        </p:txBody>
+      </p:sp>
+      <p:sp>
+        <p:nvSpPr>
+          <p:cNvPr id="54" name="TextBox 53"/>
+          <p:cNvSpPr txBox="1"/>
+          <p:nvPr/>
+        </p:nvSpPr>
+        <p:spPr>
+          <a:xfrm>
+            <a:off x="7366590" y="4818277"/>
+            <a:ext cx="1931261" cy="234086"/>
+          </a:xfrm>
+          <a:prstGeom prst="rect">
+            <a:avLst/>
+          </a:prstGeom>
+          <a:noFill/>
+        </p:spPr>
+        <p:txBody>
+          <a:bodyPr wrap="square" lIns="0" tIns="0" rIns="0" bIns="0" anchor="t">
+            <a:spAutoFit/>
+          </a:bodyPr>
+          <a:lstStyle/>
+          <a:p>
+            <a:pPr algn="l">
+              <a:lnSpc>
+                <a:spcPct val="110000"/>
+              </a:lnSpc>
+              <a:spcAft>
+                <a:spcPts val="0"/>
+              </a:spcAft>
+            </a:pPr>
+            <a:r>
+              <a:rPr sz="680" b="1" i="0">
+                <a:solidFill>
+                  <a:srgbClr val="314359"/>
+                </a:solidFill>
+                <a:latin typeface="Arial"/>
+              </a:rPr>
+              <a:t>TECHNOLOGY</a:t>
+            </a:r>
+          </a:p>
+        </p:txBody>
+      </p:sp>
+      <p:sp>
+        <p:nvSpPr>
+          <p:cNvPr id="55" name="TextBox 54"/>
+          <p:cNvSpPr txBox="1"/>
+          <p:nvPr/>
+        </p:nvSpPr>
+        <p:spPr>
+          <a:xfrm>
+            <a:off x="7366590" y="5071870"/>
+            <a:ext cx="1916630" cy="682752"/>
+          </a:xfrm>
+          <a:prstGeom prst="rect">
+            <a:avLst/>
+          </a:prstGeom>
+          <a:noFill/>
+        </p:spPr>
+        <p:txBody>
+          <a:bodyPr wrap="square" lIns="0" tIns="0" rIns="0" bIns="0" anchor="t">
+            <a:spAutoFit/>
+          </a:bodyPr>
+          <a:lstStyle/>
+          <a:p>
+            <a:pPr algn="l">
+              <a:lnSpc>
+                <a:spcPct val="110000"/>
+              </a:lnSpc>
+              <a:spcAft>
+                <a:spcPts val="0"/>
+              </a:spcAft>
+            </a:pPr>
+            <a:r>
+              <a:rPr sz="720" b="0" i="0">
+                <a:solidFill>
+                  <a:srgbClr val="0E1620"/>
+                </a:solidFill>
+                <a:latin typeface="Arial"/>
+              </a:rPr>
+              <a:t>MSc applied &amp; computational mathematics, KTH; projects for the Swiss Finance Institute / EPFL.</a:t>
+            </a:r>
+          </a:p>
+        </p:txBody>
+      </p:sp>
+      <p:sp>
+        <p:nvSpPr>
+          <p:cNvPr id="56" name="Rectangle 55"/>
+          <p:cNvSpPr/>
+          <p:nvPr/>
+        </p:nvSpPr>
+        <p:spPr>
+          <a:xfrm>
+            <a:off x="438922" y="6164275"/>
+            <a:ext cx="8873559" cy="604723"/>
+          </a:xfrm>
+          <a:prstGeom prst="rect">
+            <a:avLst/>
+          </a:prstGeom>
+          <a:solidFill>
+            <a:srgbClr val="152130"/>
+          </a:solidFill>
+          <a:ln>
+            <a:noFill/>
+          </a:ln>
+          <a:effectLst/>
+        </p:spPr>
+        <p:style>
+          <a:lnRef idx="1">
+            <a:schemeClr val="accent1"/>
+          </a:lnRef>
+          <a:fillRef idx="3">
+            <a:schemeClr val="accent1"/>
+          </a:fillRef>
+          <a:effectRef idx="2">
+            <a:schemeClr val="accent1"/>
+          </a:effectRef>
+          <a:fontRef idx="minor">
+            <a:schemeClr val="lt1"/>
+          </a:fontRef>
+        </p:style>
+        <p:txBody>
+          <a:bodyPr rtlCol="0" anchor="ctr"/>
+          <a:lstStyle/>
+          <a:p>
+            <a:pPr algn="ctr"/>
+            <a:endParaRPr/>
+          </a:p>
+        </p:txBody>
+      </p:sp>
+      <p:sp>
+        <p:nvSpPr>
+          <p:cNvPr id="57" name="TextBox 56"/>
+          <p:cNvSpPr txBox="1"/>
+          <p:nvPr/>
+        </p:nvSpPr>
+        <p:spPr>
+          <a:xfrm>
+            <a:off x="585230" y="6164275"/>
+            <a:ext cx="8558998" cy="604723"/>
+          </a:xfrm>
+          <a:prstGeom prst="rect">
+            <a:avLst/>
+          </a:prstGeom>
+          <a:noFill/>
+        </p:spPr>
+        <p:txBody>
+          <a:bodyPr wrap="square" lIns="0" tIns="0" rIns="0" bIns="0" anchor="ctr">
+            <a:spAutoFit/>
+          </a:bodyPr>
+          <a:lstStyle/>
+          <a:p>
+            <a:pPr algn="l">
+              <a:lnSpc>
+                <a:spcPct val="110000"/>
+              </a:lnSpc>
+              <a:spcAft>
+                <a:spcPts val="0"/>
+              </a:spcAft>
+            </a:pPr>
+            <a:r>
+              <a:rPr sz="960" b="0" i="1">
+                <a:solidFill>
+                  <a:srgbClr val="FFFFFF"/>
+                </a:solidFill>
+                <a:latin typeface="Arial"/>
+              </a:rPr>
+              <a:t>Segregation of duties protects investors: operations, valuation and risk sit apart from investment decisions — with SEB (custody), MUFG (administration) and KPMG (audit) independently verifying every NAV and fee.</a:t>
             </a:r>
           </a:p>
         </p:txBody>
@@ -6263,7 +7640,7 @@
                 </a:solidFill>
                 <a:latin typeface="Arial"/>
               </a:rPr>
-              <a:t>Strictly confidential          11</a:t>
+              <a:t>Strictly confidential          12</a:t>
             </a:r>
           </a:p>
         </p:txBody>
@@ -7217,7 +8594,7 @@
                 </a:solidFill>
                 <a:latin typeface="Arial"/>
               </a:rPr>
-              <a:t>Strictly confidential          12</a:t>
+              <a:t>Strictly confidential          13</a:t>
             </a:r>
           </a:p>
         </p:txBody>
@@ -8700,7 +10077,7 @@
                 </a:solidFill>
                 <a:latin typeface="Arial"/>
               </a:rPr>
-              <a:t>Strictly confidential          13</a:t>
+              <a:t>Strictly confidential          14</a:t>
             </a:r>
           </a:p>
         </p:txBody>
@@ -10649,7 +12026,7 @@
                 </a:solidFill>
                 <a:latin typeface="Arial"/>
               </a:rPr>
-              <a:t>Strictly confidential          14</a:t>
+              <a:t>Strictly confidential          15</a:t>
             </a:r>
           </a:p>
         </p:txBody>
@@ -12424,7 +13801,7 @@
                 </a:solidFill>
                 <a:latin typeface="Arial"/>
               </a:rPr>
-              <a:t>Strictly confidential          15</a:t>
+              <a:t>Strictly confidential          16</a:t>
             </a:r>
           </a:p>
         </p:txBody>
@@ -13439,7 +14816,7 @@
                 </a:solidFill>
                 <a:latin typeface="Arial"/>
               </a:rPr>
-              <a:t>Strictly confidential          16</a:t>
+              <a:t>Strictly confidential          17</a:t>
             </a:r>
           </a:p>
         </p:txBody>
@@ -17461,7 +18838,7 @@
                 </a:solidFill>
                 <a:latin typeface="Arial"/>
               </a:rPr>
-              <a:t>Strictly confidential          17</a:t>
+              <a:t>Strictly confidential          18</a:t>
             </a:r>
           </a:p>
         </p:txBody>
@@ -18315,7 +19692,7 @@
                 </a:solidFill>
                 <a:latin typeface="Arial"/>
               </a:rPr>
-              <a:t>Strictly confidential          18</a:t>
+              <a:t>Strictly confidential          19</a:t>
             </a:r>
           </a:p>
         </p:txBody>
@@ -20210,7 +21587,7 @@
                 </a:solidFill>
                 <a:latin typeface="Arial"/>
               </a:rPr>
-              <a:t>Strictly confidential          19</a:t>
+              <a:t>Strictly confidential          20</a:t>
             </a:r>
           </a:p>
         </p:txBody>
@@ -22074,7 +23451,7 @@
                 </a:solidFill>
                 <a:latin typeface="Arial"/>
               </a:rPr>
-              <a:t>Strictly confidential          20</a:t>
+              <a:t>Strictly confidential          21</a:t>
             </a:r>
           </a:p>
         </p:txBody>
@@ -22536,7 +23913,7 @@
                 </a:solidFill>
                 <a:latin typeface="Arial"/>
               </a:rPr>
-              <a:t>Strictly confidential          21</a:t>
+              <a:t>Strictly confidential          22</a:t>
             </a:r>
           </a:p>
         </p:txBody>
@@ -28648,6 +30025,920 @@
 </p:sld>
 </file>
 
+<file path=ppt/slides/slide7.xml><?xml version="1.0" encoding="utf-8"?>
+<p:sld xmlns:a="http://schemas.openxmlformats.org/drawingml/2006/main" xmlns:r="http://schemas.openxmlformats.org/officeDocument/2006/relationships" xmlns:p="http://schemas.openxmlformats.org/presentationml/2006/main">
+  <p:cSld>
+    <p:spTree>
+      <p:nvGrpSpPr>
+        <p:cNvPr id="1" name=""/>
+        <p:cNvGrpSpPr/>
+        <p:nvPr/>
+      </p:nvGrpSpPr>
+      <p:grpSpPr>
+        <a:xfrm>
+          <a:off x="0" y="0"/>
+          <a:ext cx="0" cy="0"/>
+          <a:chOff x="0" y="0"/>
+          <a:chExt cx="0" cy="0"/>
+        </a:xfrm>
+      </p:grpSpPr>
+      <p:sp>
+        <p:nvSpPr>
+          <p:cNvPr id="2" name="Rectangle 1"/>
+          <p:cNvSpPr/>
+          <p:nvPr/>
+        </p:nvSpPr>
+        <p:spPr>
+          <a:xfrm>
+            <a:off x="0" y="0"/>
+            <a:ext cx="9753600" cy="7315200"/>
+          </a:xfrm>
+          <a:prstGeom prst="rect">
+            <a:avLst/>
+          </a:prstGeom>
+          <a:solidFill>
+            <a:srgbClr val="FFFFFF"/>
+          </a:solidFill>
+          <a:ln>
+            <a:noFill/>
+          </a:ln>
+          <a:effectLst/>
+        </p:spPr>
+        <p:style>
+          <a:lnRef idx="1">
+            <a:schemeClr val="accent1"/>
+          </a:lnRef>
+          <a:fillRef idx="3">
+            <a:schemeClr val="accent1"/>
+          </a:fillRef>
+          <a:effectRef idx="2">
+            <a:schemeClr val="accent1"/>
+          </a:effectRef>
+          <a:fontRef idx="minor">
+            <a:schemeClr val="lt1"/>
+          </a:fontRef>
+        </p:style>
+        <p:txBody>
+          <a:bodyPr rtlCol="0" anchor="ctr"/>
+          <a:lstStyle/>
+          <a:p>
+            <a:pPr algn="ctr"/>
+            <a:endParaRPr/>
+          </a:p>
+        </p:txBody>
+      </p:sp>
+      <p:pic>
+        <p:nvPicPr>
+          <p:cNvPr id="3" name="Picture 2" descr="mark_dark.png"/>
+          <p:cNvPicPr>
+            <a:picLocks noChangeAspect="1"/>
+          </p:cNvPicPr>
+          <p:nvPr/>
+        </p:nvPicPr>
+        <p:blipFill>
+          <a:blip r:embed="rId2"/>
+          <a:stretch>
+            <a:fillRect/>
+          </a:stretch>
+        </p:blipFill>
+        <p:spPr>
+          <a:xfrm>
+            <a:off x="402346" y="234086"/>
+            <a:ext cx="224012" cy="190199"/>
+          </a:xfrm>
+          <a:prstGeom prst="rect">
+            <a:avLst/>
+          </a:prstGeom>
+        </p:spPr>
+      </p:pic>
+      <p:sp>
+        <p:nvSpPr>
+          <p:cNvPr id="4" name="TextBox 3"/>
+          <p:cNvSpPr txBox="1"/>
+          <p:nvPr/>
+        </p:nvSpPr>
+        <p:spPr>
+          <a:xfrm>
+            <a:off x="716907" y="263347"/>
+            <a:ext cx="5120768" cy="292608"/>
+          </a:xfrm>
+          <a:prstGeom prst="rect">
+            <a:avLst/>
+          </a:prstGeom>
+          <a:noFill/>
+        </p:spPr>
+        <p:txBody>
+          <a:bodyPr wrap="square" lIns="0" tIns="0" rIns="0" bIns="0" anchor="t">
+            <a:spAutoFit/>
+          </a:bodyPr>
+          <a:lstStyle/>
+          <a:p>
+            <a:pPr algn="l">
+              <a:lnSpc>
+                <a:spcPct val="110000"/>
+              </a:lnSpc>
+              <a:spcAft>
+                <a:spcPts val="0"/>
+              </a:spcAft>
+            </a:pPr>
+            <a:r>
+              <a:rPr sz="880" b="0" i="0">
+                <a:solidFill>
+                  <a:srgbClr val="556A83"/>
+                </a:solidFill>
+                <a:latin typeface="Arial"/>
+              </a:rPr>
+              <a:t>Overview</a:t>
+            </a:r>
+          </a:p>
+        </p:txBody>
+      </p:sp>
+      <p:sp>
+        <p:nvSpPr>
+          <p:cNvPr id="5" name="Rectangle 4"/>
+          <p:cNvSpPr/>
+          <p:nvPr/>
+        </p:nvSpPr>
+        <p:spPr>
+          <a:xfrm>
+            <a:off x="0" y="604723"/>
+            <a:ext cx="9753600" cy="1024128"/>
+          </a:xfrm>
+          <a:prstGeom prst="rect">
+            <a:avLst/>
+          </a:prstGeom>
+          <a:solidFill>
+            <a:srgbClr val="F6F7F9"/>
+          </a:solidFill>
+          <a:ln>
+            <a:noFill/>
+          </a:ln>
+          <a:effectLst/>
+        </p:spPr>
+        <p:style>
+          <a:lnRef idx="1">
+            <a:schemeClr val="accent1"/>
+          </a:lnRef>
+          <a:fillRef idx="3">
+            <a:schemeClr val="accent1"/>
+          </a:fillRef>
+          <a:effectRef idx="2">
+            <a:schemeClr val="accent1"/>
+          </a:effectRef>
+          <a:fontRef idx="minor">
+            <a:schemeClr val="lt1"/>
+          </a:fontRef>
+        </p:style>
+        <p:txBody>
+          <a:bodyPr rtlCol="0" anchor="ctr"/>
+          <a:lstStyle/>
+          <a:p>
+            <a:pPr algn="ctr"/>
+            <a:endParaRPr/>
+          </a:p>
+        </p:txBody>
+      </p:sp>
+      <p:sp>
+        <p:nvSpPr>
+          <p:cNvPr id="6" name="TextBox 5"/>
+          <p:cNvSpPr txBox="1"/>
+          <p:nvPr/>
+        </p:nvSpPr>
+        <p:spPr>
+          <a:xfrm>
+            <a:off x="438922" y="721766"/>
+            <a:ext cx="8851613" cy="829056"/>
+          </a:xfrm>
+          <a:prstGeom prst="rect">
+            <a:avLst/>
+          </a:prstGeom>
+          <a:noFill/>
+        </p:spPr>
+        <p:txBody>
+          <a:bodyPr wrap="square" lIns="0" tIns="0" rIns="0" bIns="0" anchor="t">
+            <a:spAutoFit/>
+          </a:bodyPr>
+          <a:lstStyle/>
+          <a:p>
+            <a:pPr algn="l">
+              <a:lnSpc>
+                <a:spcPct val="110000"/>
+              </a:lnSpc>
+              <a:spcAft>
+                <a:spcPts val="200"/>
+              </a:spcAft>
+            </a:pPr>
+            <a:r>
+              <a:rPr sz="2400" b="0" i="0" spc="-90">
+                <a:solidFill>
+                  <a:srgbClr val="314359"/>
+                </a:solidFill>
+                <a:latin typeface="Times New Roman"/>
+              </a:rPr>
+              <a:t>Athanase at a glance</a:t>
+            </a:r>
+          </a:p>
+        </p:txBody>
+      </p:sp>
+      <p:sp>
+        <p:nvSpPr>
+          <p:cNvPr id="7" name="TextBox 6"/>
+          <p:cNvSpPr txBox="1"/>
+          <p:nvPr/>
+        </p:nvSpPr>
+        <p:spPr>
+          <a:xfrm>
+            <a:off x="6583844" y="6876288"/>
+            <a:ext cx="2926153" cy="292608"/>
+          </a:xfrm>
+          <a:prstGeom prst="rect">
+            <a:avLst/>
+          </a:prstGeom>
+          <a:noFill/>
+        </p:spPr>
+        <p:txBody>
+          <a:bodyPr wrap="square" lIns="0" tIns="0" rIns="0" bIns="0" anchor="t">
+            <a:spAutoFit/>
+          </a:bodyPr>
+          <a:lstStyle/>
+          <a:p>
+            <a:pPr algn="r">
+              <a:lnSpc>
+                <a:spcPct val="110000"/>
+              </a:lnSpc>
+              <a:spcAft>
+                <a:spcPts val="0"/>
+              </a:spcAft>
+            </a:pPr>
+            <a:r>
+              <a:rPr sz="680" b="0" i="0">
+                <a:solidFill>
+                  <a:srgbClr val="556A83"/>
+                </a:solidFill>
+                <a:latin typeface="Arial"/>
+              </a:rPr>
+              <a:t>Strictly confidential          8</a:t>
+            </a:r>
+          </a:p>
+        </p:txBody>
+      </p:sp>
+      <p:sp>
+        <p:nvSpPr>
+          <p:cNvPr id="8" name="Rectangle 7"/>
+          <p:cNvSpPr/>
+          <p:nvPr/>
+        </p:nvSpPr>
+        <p:spPr>
+          <a:xfrm>
+            <a:off x="548653" y="1901952"/>
+            <a:ext cx="2158037" cy="1804416"/>
+          </a:xfrm>
+          <a:prstGeom prst="rect">
+            <a:avLst/>
+          </a:prstGeom>
+          <a:solidFill>
+            <a:srgbClr val="F6F7F9"/>
+          </a:solidFill>
+          <a:ln>
+            <a:noFill/>
+          </a:ln>
+          <a:effectLst/>
+        </p:spPr>
+        <p:style>
+          <a:lnRef idx="1">
+            <a:schemeClr val="accent1"/>
+          </a:lnRef>
+          <a:fillRef idx="3">
+            <a:schemeClr val="accent1"/>
+          </a:fillRef>
+          <a:effectRef idx="2">
+            <a:schemeClr val="accent1"/>
+          </a:effectRef>
+          <a:fontRef idx="minor">
+            <a:schemeClr val="lt1"/>
+          </a:fontRef>
+        </p:style>
+        <p:txBody>
+          <a:bodyPr rtlCol="0" anchor="ctr"/>
+          <a:lstStyle/>
+          <a:p>
+            <a:pPr algn="ctr"/>
+            <a:endParaRPr/>
+          </a:p>
+        </p:txBody>
+      </p:sp>
+      <p:sp>
+        <p:nvSpPr>
+          <p:cNvPr id="9" name="TextBox 8"/>
+          <p:cNvSpPr txBox="1"/>
+          <p:nvPr/>
+        </p:nvSpPr>
+        <p:spPr>
+          <a:xfrm>
+            <a:off x="548653" y="2175052"/>
+            <a:ext cx="2158037" cy="1365504"/>
+          </a:xfrm>
+          <a:prstGeom prst="rect">
+            <a:avLst/>
+          </a:prstGeom>
+          <a:noFill/>
+        </p:spPr>
+        <p:txBody>
+          <a:bodyPr wrap="square" lIns="0" tIns="0" rIns="0" bIns="0" anchor="t">
+            <a:spAutoFit/>
+          </a:bodyPr>
+          <a:lstStyle/>
+          <a:p>
+            <a:pPr algn="ctr">
+              <a:lnSpc>
+                <a:spcPct val="110000"/>
+              </a:lnSpc>
+              <a:spcAft>
+                <a:spcPts val="400"/>
+              </a:spcAft>
+            </a:pPr>
+            <a:r>
+              <a:rPr sz="3200" b="0" i="0" spc="-120">
+                <a:solidFill>
+                  <a:srgbClr val="314359"/>
+                </a:solidFill>
+                <a:latin typeface="Times New Roman"/>
+              </a:rPr>
+              <a:t>38</a:t>
+            </a:r>
+          </a:p>
+          <a:p>
+            <a:pPr algn="ctr">
+              <a:lnSpc>
+                <a:spcPct val="110000"/>
+              </a:lnSpc>
+              <a:spcAft>
+                <a:spcPts val="0"/>
+              </a:spcAft>
+            </a:pPr>
+            <a:r>
+              <a:rPr sz="960" b="0" i="0">
+                <a:solidFill>
+                  <a:srgbClr val="556A83"/>
+                </a:solidFill>
+                <a:latin typeface="Arial"/>
+              </a:rPr>
+              <a:t>investments as</a:t>
+            </a:r>
+          </a:p>
+          <a:p>
+            <a:pPr algn="ctr">
+              <a:lnSpc>
+                <a:spcPct val="110000"/>
+              </a:lnSpc>
+              <a:spcAft>
+                <a:spcPts val="0"/>
+              </a:spcAft>
+            </a:pPr>
+            <a:r>
+              <a:rPr sz="960" b="0" i="0">
+                <a:solidFill>
+                  <a:srgbClr val="556A83"/>
+                </a:solidFill>
+                <a:latin typeface="Arial"/>
+              </a:rPr>
+              <a:t>engaged owners</a:t>
+            </a:r>
+          </a:p>
+        </p:txBody>
+      </p:sp>
+      <p:sp>
+        <p:nvSpPr>
+          <p:cNvPr id="10" name="Rectangle 9"/>
+          <p:cNvSpPr/>
+          <p:nvPr/>
+        </p:nvSpPr>
+        <p:spPr>
+          <a:xfrm>
+            <a:off x="2838368" y="1901952"/>
+            <a:ext cx="2158037" cy="1804416"/>
+          </a:xfrm>
+          <a:prstGeom prst="rect">
+            <a:avLst/>
+          </a:prstGeom>
+          <a:solidFill>
+            <a:srgbClr val="F6F7F9"/>
+          </a:solidFill>
+          <a:ln>
+            <a:noFill/>
+          </a:ln>
+          <a:effectLst/>
+        </p:spPr>
+        <p:style>
+          <a:lnRef idx="1">
+            <a:schemeClr val="accent1"/>
+          </a:lnRef>
+          <a:fillRef idx="3">
+            <a:schemeClr val="accent1"/>
+          </a:fillRef>
+          <a:effectRef idx="2">
+            <a:schemeClr val="accent1"/>
+          </a:effectRef>
+          <a:fontRef idx="minor">
+            <a:schemeClr val="lt1"/>
+          </a:fontRef>
+        </p:style>
+        <p:txBody>
+          <a:bodyPr rtlCol="0" anchor="ctr"/>
+          <a:lstStyle/>
+          <a:p>
+            <a:pPr algn="ctr"/>
+            <a:endParaRPr/>
+          </a:p>
+        </p:txBody>
+      </p:sp>
+      <p:sp>
+        <p:nvSpPr>
+          <p:cNvPr id="11" name="TextBox 10"/>
+          <p:cNvSpPr txBox="1"/>
+          <p:nvPr/>
+        </p:nvSpPr>
+        <p:spPr>
+          <a:xfrm>
+            <a:off x="2838368" y="2175052"/>
+            <a:ext cx="2158037" cy="1365504"/>
+          </a:xfrm>
+          <a:prstGeom prst="rect">
+            <a:avLst/>
+          </a:prstGeom>
+          <a:noFill/>
+        </p:spPr>
+        <p:txBody>
+          <a:bodyPr wrap="square" lIns="0" tIns="0" rIns="0" bIns="0" anchor="t">
+            <a:spAutoFit/>
+          </a:bodyPr>
+          <a:lstStyle/>
+          <a:p>
+            <a:pPr algn="ctr">
+              <a:lnSpc>
+                <a:spcPct val="110000"/>
+              </a:lnSpc>
+              <a:spcAft>
+                <a:spcPts val="400"/>
+              </a:spcAft>
+            </a:pPr>
+            <a:r>
+              <a:rPr sz="3200" b="0" i="0" spc="-120">
+                <a:solidFill>
+                  <a:srgbClr val="314359"/>
+                </a:solidFill>
+                <a:latin typeface="Times New Roman"/>
+              </a:rPr>
+              <a:t>19%</a:t>
+            </a:r>
+          </a:p>
+          <a:p>
+            <a:pPr algn="ctr">
+              <a:lnSpc>
+                <a:spcPct val="110000"/>
+              </a:lnSpc>
+              <a:spcAft>
+                <a:spcPts val="0"/>
+              </a:spcAft>
+            </a:pPr>
+            <a:r>
+              <a:rPr sz="960" b="0" i="0">
+                <a:solidFill>
+                  <a:srgbClr val="556A83"/>
+                </a:solidFill>
+                <a:latin typeface="Arial"/>
+              </a:rPr>
+              <a:t>avg annualised NET,</a:t>
+            </a:r>
+          </a:p>
+          <a:p>
+            <a:pPr algn="ctr">
+              <a:lnSpc>
+                <a:spcPct val="110000"/>
+              </a:lnSpc>
+              <a:spcAft>
+                <a:spcPts val="0"/>
+              </a:spcAft>
+            </a:pPr>
+            <a:r>
+              <a:rPr sz="960" b="0" i="0">
+                <a:solidFill>
+                  <a:srgbClr val="556A83"/>
+                </a:solidFill>
+                <a:latin typeface="Arial"/>
+              </a:rPr>
+              <a:t>any entry month*</a:t>
+            </a:r>
+          </a:p>
+        </p:txBody>
+      </p:sp>
+      <p:sp>
+        <p:nvSpPr>
+          <p:cNvPr id="12" name="Rectangle 11"/>
+          <p:cNvSpPr/>
+          <p:nvPr/>
+        </p:nvSpPr>
+        <p:spPr>
+          <a:xfrm>
+            <a:off x="5128083" y="1901952"/>
+            <a:ext cx="2158037" cy="1804416"/>
+          </a:xfrm>
+          <a:prstGeom prst="rect">
+            <a:avLst/>
+          </a:prstGeom>
+          <a:solidFill>
+            <a:srgbClr val="F6F7F9"/>
+          </a:solidFill>
+          <a:ln>
+            <a:noFill/>
+          </a:ln>
+          <a:effectLst/>
+        </p:spPr>
+        <p:style>
+          <a:lnRef idx="1">
+            <a:schemeClr val="accent1"/>
+          </a:lnRef>
+          <a:fillRef idx="3">
+            <a:schemeClr val="accent1"/>
+          </a:fillRef>
+          <a:effectRef idx="2">
+            <a:schemeClr val="accent1"/>
+          </a:effectRef>
+          <a:fontRef idx="minor">
+            <a:schemeClr val="lt1"/>
+          </a:fontRef>
+        </p:style>
+        <p:txBody>
+          <a:bodyPr rtlCol="0" anchor="ctr"/>
+          <a:lstStyle/>
+          <a:p>
+            <a:pPr algn="ctr"/>
+            <a:endParaRPr/>
+          </a:p>
+        </p:txBody>
+      </p:sp>
+      <p:sp>
+        <p:nvSpPr>
+          <p:cNvPr id="13" name="TextBox 12"/>
+          <p:cNvSpPr txBox="1"/>
+          <p:nvPr/>
+        </p:nvSpPr>
+        <p:spPr>
+          <a:xfrm>
+            <a:off x="5128083" y="2175052"/>
+            <a:ext cx="2158037" cy="1365504"/>
+          </a:xfrm>
+          <a:prstGeom prst="rect">
+            <a:avLst/>
+          </a:prstGeom>
+          <a:noFill/>
+        </p:spPr>
+        <p:txBody>
+          <a:bodyPr wrap="square" lIns="0" tIns="0" rIns="0" bIns="0" anchor="t">
+            <a:spAutoFit/>
+          </a:bodyPr>
+          <a:lstStyle/>
+          <a:p>
+            <a:pPr algn="ctr">
+              <a:lnSpc>
+                <a:spcPct val="110000"/>
+              </a:lnSpc>
+              <a:spcAft>
+                <a:spcPts val="400"/>
+              </a:spcAft>
+            </a:pPr>
+            <a:r>
+              <a:rPr sz="3200" b="0" i="0" spc="-120">
+                <a:solidFill>
+                  <a:srgbClr val="314359"/>
+                </a:solidFill>
+                <a:latin typeface="Times New Roman"/>
+              </a:rPr>
+              <a:t>7%</a:t>
+            </a:r>
+          </a:p>
+          <a:p>
+            <a:pPr algn="ctr">
+              <a:lnSpc>
+                <a:spcPct val="110000"/>
+              </a:lnSpc>
+              <a:spcAft>
+                <a:spcPts val="0"/>
+              </a:spcAft>
+            </a:pPr>
+            <a:r>
+              <a:rPr sz="960" b="0" i="0">
+                <a:solidFill>
+                  <a:srgbClr val="556A83"/>
+                </a:solidFill>
+                <a:latin typeface="Arial"/>
+              </a:rPr>
+              <a:t>worst-ever entry,</a:t>
+            </a:r>
+          </a:p>
+          <a:p>
+            <a:pPr algn="ctr">
+              <a:lnSpc>
+                <a:spcPct val="110000"/>
+              </a:lnSpc>
+              <a:spcAft>
+                <a:spcPts val="0"/>
+              </a:spcAft>
+            </a:pPr>
+            <a:r>
+              <a:rPr sz="960" b="0" i="0">
+                <a:solidFill>
+                  <a:srgbClr val="556A83"/>
+                </a:solidFill>
+                <a:latin typeface="Arial"/>
+              </a:rPr>
+              <a:t>still positive*</a:t>
+            </a:r>
+          </a:p>
+        </p:txBody>
+      </p:sp>
+      <p:sp>
+        <p:nvSpPr>
+          <p:cNvPr id="14" name="Rectangle 13"/>
+          <p:cNvSpPr/>
+          <p:nvPr/>
+        </p:nvSpPr>
+        <p:spPr>
+          <a:xfrm>
+            <a:off x="7417798" y="1901952"/>
+            <a:ext cx="2158037" cy="1804416"/>
+          </a:xfrm>
+          <a:prstGeom prst="rect">
+            <a:avLst/>
+          </a:prstGeom>
+          <a:solidFill>
+            <a:srgbClr val="F6F7F9"/>
+          </a:solidFill>
+          <a:ln>
+            <a:noFill/>
+          </a:ln>
+          <a:effectLst/>
+        </p:spPr>
+        <p:style>
+          <a:lnRef idx="1">
+            <a:schemeClr val="accent1"/>
+          </a:lnRef>
+          <a:fillRef idx="3">
+            <a:schemeClr val="accent1"/>
+          </a:fillRef>
+          <a:effectRef idx="2">
+            <a:schemeClr val="accent1"/>
+          </a:effectRef>
+          <a:fontRef idx="minor">
+            <a:schemeClr val="lt1"/>
+          </a:fontRef>
+        </p:style>
+        <p:txBody>
+          <a:bodyPr rtlCol="0" anchor="ctr"/>
+          <a:lstStyle/>
+          <a:p>
+            <a:pPr algn="ctr"/>
+            <a:endParaRPr/>
+          </a:p>
+        </p:txBody>
+      </p:sp>
+      <p:sp>
+        <p:nvSpPr>
+          <p:cNvPr id="15" name="TextBox 14"/>
+          <p:cNvSpPr txBox="1"/>
+          <p:nvPr/>
+        </p:nvSpPr>
+        <p:spPr>
+          <a:xfrm>
+            <a:off x="7417798" y="2175052"/>
+            <a:ext cx="2158037" cy="1365504"/>
+          </a:xfrm>
+          <a:prstGeom prst="rect">
+            <a:avLst/>
+          </a:prstGeom>
+          <a:noFill/>
+        </p:spPr>
+        <p:txBody>
+          <a:bodyPr wrap="square" lIns="0" tIns="0" rIns="0" bIns="0" anchor="t">
+            <a:spAutoFit/>
+          </a:bodyPr>
+          <a:lstStyle/>
+          <a:p>
+            <a:pPr algn="ctr">
+              <a:lnSpc>
+                <a:spcPct val="110000"/>
+              </a:lnSpc>
+              <a:spcAft>
+                <a:spcPts val="400"/>
+              </a:spcAft>
+            </a:pPr>
+            <a:r>
+              <a:rPr sz="3200" b="0" i="0" spc="-120">
+                <a:solidFill>
+                  <a:srgbClr val="314359"/>
+                </a:solidFill>
+                <a:latin typeface="Times New Roman"/>
+              </a:rPr>
+              <a:t>18×</a:t>
+            </a:r>
+          </a:p>
+          <a:p>
+            <a:pPr algn="ctr">
+              <a:lnSpc>
+                <a:spcPct val="110000"/>
+              </a:lnSpc>
+              <a:spcAft>
+                <a:spcPts val="0"/>
+              </a:spcAft>
+            </a:pPr>
+            <a:r>
+              <a:rPr sz="960" b="0" i="0">
+                <a:solidFill>
+                  <a:srgbClr val="556A83"/>
+                </a:solidFill>
+                <a:latin typeface="Arial"/>
+              </a:rPr>
+              <a:t>growth of capital</a:t>
+            </a:r>
+          </a:p>
+          <a:p>
+            <a:pPr algn="ctr">
+              <a:lnSpc>
+                <a:spcPct val="110000"/>
+              </a:lnSpc>
+              <a:spcAft>
+                <a:spcPts val="0"/>
+              </a:spcAft>
+            </a:pPr>
+            <a:r>
+              <a:rPr sz="960" b="0" i="0">
+                <a:solidFill>
+                  <a:srgbClr val="556A83"/>
+                </a:solidFill>
+                <a:latin typeface="Arial"/>
+              </a:rPr>
+              <a:t>since 2006</a:t>
+            </a:r>
+          </a:p>
+        </p:txBody>
+      </p:sp>
+      <p:sp>
+        <p:nvSpPr>
+          <p:cNvPr id="16" name="TextBox 15"/>
+          <p:cNvSpPr txBox="1"/>
+          <p:nvPr/>
+        </p:nvSpPr>
+        <p:spPr>
+          <a:xfrm>
+            <a:off x="548653" y="3998976"/>
+            <a:ext cx="8705305" cy="4584192"/>
+          </a:xfrm>
+          <a:prstGeom prst="rect">
+            <a:avLst/>
+          </a:prstGeom>
+          <a:noFill/>
+        </p:spPr>
+        <p:txBody>
+          <a:bodyPr wrap="square" lIns="0" tIns="0" rIns="0" bIns="0" anchor="t">
+            <a:spAutoFit/>
+          </a:bodyPr>
+          <a:lstStyle/>
+          <a:p>
+            <a:pPr marL="175264" indent="-175264">
+              <a:lnSpc>
+                <a:spcPct val="112000"/>
+              </a:lnSpc>
+              <a:spcAft>
+                <a:spcPts val="1000"/>
+              </a:spcAft>
+            </a:pPr>
+            <a:r>
+              <a:rPr sz="1200" b="1">
+                <a:solidFill>
+                  <a:srgbClr val="314359"/>
+                </a:solidFill>
+                <a:latin typeface="Arial"/>
+              </a:rPr>
+              <a:t>›  ~19% average annualised return*</a:t>
+            </a:r>
+            <a:r>
+              <a:rPr sz="1200">
+                <a:solidFill>
+                  <a:srgbClr val="0E1620"/>
+                </a:solidFill>
+                <a:latin typeface="Arial"/>
+              </a:rPr>
+              <a:t>  whatever month you invested and held to today — entry timing has barely mattered.</a:t>
+            </a:r>
+          </a:p>
+          <a:p>
+            <a:pPr marL="175264" indent="-175264">
+              <a:lnSpc>
+                <a:spcPct val="112000"/>
+              </a:lnSpc>
+              <a:spcAft>
+                <a:spcPts val="1000"/>
+              </a:spcAft>
+            </a:pPr>
+            <a:r>
+              <a:rPr sz="1200" b="1">
+                <a:solidFill>
+                  <a:srgbClr val="314359"/>
+                </a:solidFill>
+                <a:latin typeface="Arial"/>
+              </a:rPr>
+              <a:t>›  ~7% in the single worst entry month</a:t>
+            </a:r>
+            <a:r>
+              <a:rPr sz="1200">
+                <a:solidFill>
+                  <a:srgbClr val="0E1620"/>
+                </a:solidFill>
+                <a:latin typeface="Arial"/>
+              </a:rPr>
+              <a:t>  even the unluckiest possible entry still compounded at a mid-single-digit net return — no investor lost over the holding period.</a:t>
+            </a:r>
+          </a:p>
+          <a:p>
+            <a:pPr marL="175264" indent="-175264">
+              <a:lnSpc>
+                <a:spcPct val="112000"/>
+              </a:lnSpc>
+              <a:spcAft>
+                <a:spcPts val="1000"/>
+              </a:spcAft>
+            </a:pPr>
+            <a:r>
+              <a:rPr sz="1200" b="1">
+                <a:solidFill>
+                  <a:srgbClr val="314359"/>
+                </a:solidFill>
+                <a:latin typeface="Arial"/>
+              </a:rPr>
+              <a:t>›  16.3% time-weighted NET since 2006</a:t>
+            </a:r>
+            <a:r>
+              <a:rPr sz="1200">
+                <a:solidFill>
+                  <a:srgbClr val="0E1620"/>
+                </a:solidFill>
+                <a:latin typeface="Arial"/>
+              </a:rPr>
+              <a:t>  vs MSCI IMI 6.2% — net of all fees.</a:t>
+            </a:r>
+          </a:p>
+        </p:txBody>
+      </p:sp>
+      <p:sp>
+        <p:nvSpPr>
+          <p:cNvPr id="17" name="TextBox 16"/>
+          <p:cNvSpPr txBox="1"/>
+          <p:nvPr/>
+        </p:nvSpPr>
+        <p:spPr>
+          <a:xfrm>
+            <a:off x="548653" y="6583680"/>
+            <a:ext cx="8632151" cy="390144"/>
+          </a:xfrm>
+          <a:prstGeom prst="rect">
+            <a:avLst/>
+          </a:prstGeom>
+          <a:noFill/>
+        </p:spPr>
+        <p:txBody>
+          <a:bodyPr wrap="square" lIns="0" tIns="0" rIns="0" bIns="0" anchor="t">
+            <a:spAutoFit/>
+          </a:bodyPr>
+          <a:lstStyle/>
+          <a:p>
+            <a:pPr algn="l">
+              <a:lnSpc>
+                <a:spcPct val="110000"/>
+              </a:lnSpc>
+              <a:spcAft>
+                <a:spcPts val="0"/>
+              </a:spcAft>
+            </a:pPr>
+            <a:r>
+              <a:rPr sz="720" b="0" i="0">
+                <a:solidFill>
+                  <a:srgbClr val="556A83"/>
+                </a:solidFill>
+                <a:latin typeface="Arial"/>
+              </a:rPr>
+              <a:t>*Average of the annualised NET return earned investing in each individual month and holding to the end (107 entry months, AIPFII). Time-weighted figure annualised over actual invested time. Past performance is not indicative of future results.</a:t>
+            </a:r>
+          </a:p>
+        </p:txBody>
+      </p:sp>
+    </p:spTree>
+  </p:cSld>
+  <p:clrMapOvr>
+    <a:masterClrMapping/>
+  </p:clrMapOvr>
+</p:sld>
+</file>
+
 <file path=ppt/slides/slide8.xml><?xml version="1.0" encoding="utf-8"?>
 <p:sld xmlns:a="http://schemas.openxmlformats.org/drawingml/2006/main" xmlns:r="http://schemas.openxmlformats.org/officeDocument/2006/relationships" xmlns:p="http://schemas.openxmlformats.org/presentationml/2006/main">
   <p:cSld>
@@ -28771,7 +31062,7 @@
                 </a:solidFill>
                 <a:latin typeface="Arial"/>
               </a:rPr>
-              <a:t>Overview</a:t>
+              <a:t>Why Athanase</a:t>
             </a:r>
           </a:p>
         </p:txBody>
@@ -28785,7 +31076,7 @@
         <p:spPr>
           <a:xfrm>
             <a:off x="0" y="604723"/>
-            <a:ext cx="9753600" cy="1024128"/>
+            <a:ext cx="9753600" cy="1414272"/>
           </a:xfrm>
           <a:prstGeom prst="rect">
             <a:avLst/>
@@ -28858,7 +31149,7 @@
                 </a:solidFill>
                 <a:latin typeface="Times New Roman"/>
               </a:rPr>
-              <a:t>Athanase at a glance</a:t>
+              <a:t>Why Athanase is the firm best built to capture this inefficiency</a:t>
             </a:r>
           </a:p>
         </p:txBody>
@@ -28866,6 +31157,48 @@
       <p:sp>
         <p:nvSpPr>
           <p:cNvPr id="7" name="TextBox 6"/>
+          <p:cNvSpPr txBox="1"/>
+          <p:nvPr/>
+        </p:nvSpPr>
+        <p:spPr>
+          <a:xfrm>
+            <a:off x="453553" y="1511808"/>
+            <a:ext cx="8705305" cy="487680"/>
+          </a:xfrm>
+          <a:prstGeom prst="rect">
+            <a:avLst/>
+          </a:prstGeom>
+          <a:noFill/>
+        </p:spPr>
+        <p:txBody>
+          <a:bodyPr wrap="square" lIns="0" tIns="0" rIns="0" bIns="0" anchor="t">
+            <a:spAutoFit/>
+          </a:bodyPr>
+          <a:lstStyle/>
+          <a:p>
+            <a:pPr algn="l">
+              <a:lnSpc>
+                <a:spcPct val="110000"/>
+              </a:lnSpc>
+              <a:spcAft>
+                <a:spcPts val="0"/>
+              </a:spcAft>
+            </a:pPr>
+            <a:r>
+              <a:rPr sz="1040" b="0" i="1">
+                <a:solidFill>
+                  <a:srgbClr val="556A83"/>
+                </a:solidFill>
+                <a:latin typeface="Arial"/>
+              </a:rPr>
+              <a:t>Harvesting this mispricing takes four capabilities at once — find the hidden core, win real control, fix it from the boardroom, and prove it repeats. Few managers have one; we have built all four.</a:t>
+            </a:r>
+          </a:p>
+        </p:txBody>
+      </p:sp>
+      <p:sp>
+        <p:nvSpPr>
+          <p:cNvPr id="8" name="TextBox 7"/>
           <p:cNvSpPr txBox="1"/>
           <p:nvPr/>
         </p:nvSpPr>
@@ -28900,21 +31233,108 @@
                 </a:solidFill>
                 <a:latin typeface="Arial"/>
               </a:rPr>
-              <a:t>Strictly confidential          7</a:t>
-            </a:r>
-          </a:p>
-        </p:txBody>
-      </p:sp>
-      <p:sp>
-        <p:nvSpPr>
-          <p:cNvPr id="8" name="Rectangle 7"/>
+              <a:t>Strictly confidential          9</a:t>
+            </a:r>
+          </a:p>
+        </p:txBody>
+      </p:sp>
+      <p:sp>
+        <p:nvSpPr>
+          <p:cNvPr id="9" name="Rectangle 8"/>
           <p:cNvSpPr/>
           <p:nvPr/>
         </p:nvSpPr>
         <p:spPr>
           <a:xfrm>
-            <a:off x="548653" y="1901952"/>
-            <a:ext cx="2158037" cy="1804416"/>
+            <a:off x="453553" y="2292096"/>
+            <a:ext cx="4286814" cy="448665"/>
+          </a:xfrm>
+          <a:prstGeom prst="rect">
+            <a:avLst/>
+          </a:prstGeom>
+          <a:solidFill>
+            <a:srgbClr val="152130"/>
+          </a:solidFill>
+          <a:ln>
+            <a:noFill/>
+          </a:ln>
+          <a:effectLst/>
+        </p:spPr>
+        <p:style>
+          <a:lnRef idx="1">
+            <a:schemeClr val="accent1"/>
+          </a:lnRef>
+          <a:fillRef idx="3">
+            <a:schemeClr val="accent1"/>
+          </a:fillRef>
+          <a:effectRef idx="2">
+            <a:schemeClr val="accent1"/>
+          </a:effectRef>
+          <a:fontRef idx="minor">
+            <a:schemeClr val="lt1"/>
+          </a:fontRef>
+        </p:style>
+        <p:txBody>
+          <a:bodyPr rtlCol="0" anchor="ctr"/>
+          <a:lstStyle/>
+          <a:p>
+            <a:pPr algn="ctr"/>
+            <a:endParaRPr/>
+          </a:p>
+        </p:txBody>
+      </p:sp>
+      <p:sp>
+        <p:nvSpPr>
+          <p:cNvPr id="10" name="TextBox 9"/>
+          <p:cNvSpPr txBox="1"/>
+          <p:nvPr/>
+        </p:nvSpPr>
+        <p:spPr>
+          <a:xfrm>
+            <a:off x="570599" y="2292096"/>
+            <a:ext cx="4067352" cy="448665"/>
+          </a:xfrm>
+          <a:prstGeom prst="rect">
+            <a:avLst/>
+          </a:prstGeom>
+          <a:noFill/>
+        </p:spPr>
+        <p:txBody>
+          <a:bodyPr wrap="square" lIns="0" tIns="0" rIns="0" bIns="0" anchor="ctr">
+            <a:spAutoFit/>
+          </a:bodyPr>
+          <a:lstStyle/>
+          <a:p>
+            <a:pPr algn="l">
+              <a:lnSpc>
+                <a:spcPct val="110000"/>
+              </a:lnSpc>
+              <a:spcAft>
+                <a:spcPts val="0"/>
+              </a:spcAft>
+            </a:pPr>
+            <a:r>
+              <a:rPr sz="1000" b="1" i="0">
+                <a:solidFill>
+                  <a:srgbClr val="FFFFFF"/>
+                </a:solidFill>
+                <a:latin typeface="Times New Roman"/>
+              </a:rPr>
+              <a:t>1 · We find what others miss</a:t>
+            </a:r>
+          </a:p>
+        </p:txBody>
+      </p:sp>
+      <p:sp>
+        <p:nvSpPr>
+          <p:cNvPr id="11" name="Rectangle 10"/>
+          <p:cNvSpPr/>
+          <p:nvPr/>
+        </p:nvSpPr>
+        <p:spPr>
+          <a:xfrm>
+            <a:off x="453553" y="2740761"/>
+            <a:ext cx="4286814" cy="1697126"/>
           </a:xfrm>
           <a:prstGeom prst="rect">
             <a:avLst/>
@@ -28952,14 +31372,14 @@
       </p:sp>
       <p:sp>
         <p:nvSpPr>
-          <p:cNvPr id="9" name="TextBox 8"/>
-          <p:cNvSpPr txBox="1"/>
-          <p:nvPr/>
-        </p:nvSpPr>
-        <p:spPr>
-          <a:xfrm>
-            <a:off x="548653" y="2175052"/>
-            <a:ext cx="2158037" cy="1365504"/>
+          <p:cNvPr id="12" name="TextBox 11"/>
+          <p:cNvSpPr txBox="1"/>
+          <p:nvPr/>
+        </p:nvSpPr>
+        <p:spPr>
+          <a:xfrm>
+            <a:off x="585230" y="2857804"/>
+            <a:ext cx="4023460" cy="1502054"/>
           </a:xfrm>
           <a:prstGeom prst="rect">
             <a:avLst/>
@@ -28972,74 +31392,215 @@
           </a:bodyPr>
           <a:lstStyle/>
           <a:p>
-            <a:pPr algn="ctr">
+            <a:pPr marL="118875" indent="-118875">
+              <a:lnSpc>
+                <a:spcPct val="108000"/>
+              </a:lnSpc>
+              <a:spcAft>
+                <a:spcPts val="400"/>
+              </a:spcAft>
+            </a:pPr>
+            <a:r>
+              <a:rPr sz="720" b="1">
+                <a:solidFill>
+                  <a:srgbClr val="556A83"/>
+                </a:solidFill>
+                <a:latin typeface="Arial"/>
+              </a:rPr>
+              <a:t>›  </a:t>
+            </a:r>
+            <a:r>
+              <a:rPr sz="720" b="1">
+                <a:solidFill>
+                  <a:srgbClr val="314359"/>
+                </a:solidFill>
+                <a:latin typeface="Arial"/>
+              </a:rPr>
+              <a:t>A proprietary universe</a:t>
+            </a:r>
+            <a:r>
+              <a:rPr sz="720">
+                <a:solidFill>
+                  <a:srgbClr val="0E1620"/>
+                </a:solidFill>
+                <a:latin typeface="Arial"/>
+              </a:rPr>
+              <a:t> — ~60,000 companies restated to economic reality, separating the profitable core from the value-destroying pivot.</a:t>
+            </a:r>
+          </a:p>
+          <a:p>
+            <a:pPr marL="118875" indent="-118875">
+              <a:lnSpc>
+                <a:spcPct val="108000"/>
+              </a:lnSpc>
+              <a:spcAft>
+                <a:spcPts val="400"/>
+              </a:spcAft>
+            </a:pPr>
+            <a:r>
+              <a:rPr sz="720" b="1">
+                <a:solidFill>
+                  <a:srgbClr val="556A83"/>
+                </a:solidFill>
+                <a:latin typeface="Arial"/>
+              </a:rPr>
+              <a:t>›  </a:t>
+            </a:r>
+            <a:r>
+              <a:rPr sz="720" b="1">
+                <a:solidFill>
+                  <a:srgbClr val="314359"/>
+                </a:solidFill>
+                <a:latin typeface="Arial"/>
+              </a:rPr>
+              <a:t>Moat- and CEO-scored</a:t>
+            </a:r>
+            <a:r>
+              <a:rPr sz="720">
+                <a:solidFill>
+                  <a:srgbClr val="0E1620"/>
+                </a:solidFill>
+                <a:latin typeface="Arial"/>
+              </a:rPr>
+              <a:t> — ~20,000 names ranked; about 1 in 1,000 screened is ever bought.</a:t>
+            </a:r>
+          </a:p>
+          <a:p>
+            <a:pPr marL="118875" indent="-118875">
+              <a:lnSpc>
+                <a:spcPct val="108000"/>
+              </a:lnSpc>
+              <a:spcAft>
+                <a:spcPts val="400"/>
+              </a:spcAft>
+            </a:pPr>
+            <a:r>
+              <a:rPr sz="720" b="1">
+                <a:solidFill>
+                  <a:srgbClr val="556A83"/>
+                </a:solidFill>
+                <a:latin typeface="Arial"/>
+              </a:rPr>
+              <a:t>›  </a:t>
+            </a:r>
+            <a:r>
+              <a:rPr sz="720" b="1">
+                <a:solidFill>
+                  <a:srgbClr val="314359"/>
+                </a:solidFill>
+                <a:latin typeface="Arial"/>
+              </a:rPr>
+              <a:t>Hidden cores, not broken companies</a:t>
+            </a:r>
+            <a:r>
+              <a:rPr sz="720">
+                <a:solidFill>
+                  <a:srgbClr val="0E1620"/>
+                </a:solidFill>
+                <a:latin typeface="Arial"/>
+              </a:rPr>
+              <a:t> — market leaders attractive even if we change nothing — no adverse selection.</a:t>
+            </a:r>
+          </a:p>
+        </p:txBody>
+      </p:sp>
+      <p:sp>
+        <p:nvSpPr>
+          <p:cNvPr id="13" name="Rectangle 12"/>
+          <p:cNvSpPr/>
+          <p:nvPr/>
+        </p:nvSpPr>
+        <p:spPr>
+          <a:xfrm>
+            <a:off x="4872045" y="2292096"/>
+            <a:ext cx="4286814" cy="448665"/>
+          </a:xfrm>
+          <a:prstGeom prst="rect">
+            <a:avLst/>
+          </a:prstGeom>
+          <a:solidFill>
+            <a:srgbClr val="152130"/>
+          </a:solidFill>
+          <a:ln>
+            <a:noFill/>
+          </a:ln>
+          <a:effectLst/>
+        </p:spPr>
+        <p:style>
+          <a:lnRef idx="1">
+            <a:schemeClr val="accent1"/>
+          </a:lnRef>
+          <a:fillRef idx="3">
+            <a:schemeClr val="accent1"/>
+          </a:fillRef>
+          <a:effectRef idx="2">
+            <a:schemeClr val="accent1"/>
+          </a:effectRef>
+          <a:fontRef idx="minor">
+            <a:schemeClr val="lt1"/>
+          </a:fontRef>
+        </p:style>
+        <p:txBody>
+          <a:bodyPr rtlCol="0" anchor="ctr"/>
+          <a:lstStyle/>
+          <a:p>
+            <a:pPr algn="ctr"/>
+            <a:endParaRPr/>
+          </a:p>
+        </p:txBody>
+      </p:sp>
+      <p:sp>
+        <p:nvSpPr>
+          <p:cNvPr id="14" name="TextBox 13"/>
+          <p:cNvSpPr txBox="1"/>
+          <p:nvPr/>
+        </p:nvSpPr>
+        <p:spPr>
+          <a:xfrm>
+            <a:off x="4989091" y="2292096"/>
+            <a:ext cx="4067352" cy="448665"/>
+          </a:xfrm>
+          <a:prstGeom prst="rect">
+            <a:avLst/>
+          </a:prstGeom>
+          <a:noFill/>
+        </p:spPr>
+        <p:txBody>
+          <a:bodyPr wrap="square" lIns="0" tIns="0" rIns="0" bIns="0" anchor="ctr">
+            <a:spAutoFit/>
+          </a:bodyPr>
+          <a:lstStyle/>
+          <a:p>
+            <a:pPr algn="l">
               <a:lnSpc>
                 <a:spcPct val="110000"/>
               </a:lnSpc>
               <a:spcAft>
-                <a:spcPts val="400"/>
-              </a:spcAft>
-            </a:pPr>
-            <a:r>
-              <a:rPr sz="3200" b="0" i="0" spc="-120">
-                <a:solidFill>
-                  <a:srgbClr val="314359"/>
+                <a:spcPts val="0"/>
+              </a:spcAft>
+            </a:pPr>
+            <a:r>
+              <a:rPr sz="1000" b="1" i="0">
+                <a:solidFill>
+                  <a:srgbClr val="FFFFFF"/>
                 </a:solidFill>
                 <a:latin typeface="Times New Roman"/>
               </a:rPr>
-              <a:t>38</a:t>
-            </a:r>
-          </a:p>
-          <a:p>
-            <a:pPr algn="ctr">
-              <a:lnSpc>
-                <a:spcPct val="110000"/>
-              </a:lnSpc>
-              <a:spcAft>
-                <a:spcPts val="0"/>
-              </a:spcAft>
-            </a:pPr>
-            <a:r>
-              <a:rPr sz="960" b="0" i="0">
-                <a:solidFill>
-                  <a:srgbClr val="556A83"/>
-                </a:solidFill>
-                <a:latin typeface="Arial"/>
-              </a:rPr>
-              <a:t>investments as</a:t>
-            </a:r>
-          </a:p>
-          <a:p>
-            <a:pPr algn="ctr">
-              <a:lnSpc>
-                <a:spcPct val="110000"/>
-              </a:lnSpc>
-              <a:spcAft>
-                <a:spcPts val="0"/>
-              </a:spcAft>
-            </a:pPr>
-            <a:r>
-              <a:rPr sz="960" b="0" i="0">
-                <a:solidFill>
-                  <a:srgbClr val="556A83"/>
-                </a:solidFill>
-                <a:latin typeface="Arial"/>
-              </a:rPr>
-              <a:t>engaged owners</a:t>
-            </a:r>
-          </a:p>
-        </p:txBody>
-      </p:sp>
-      <p:sp>
-        <p:nvSpPr>
-          <p:cNvPr id="10" name="Rectangle 9"/>
+              <a:t>2 · We can actually change it</a:t>
+            </a:r>
+          </a:p>
+        </p:txBody>
+      </p:sp>
+      <p:sp>
+        <p:nvSpPr>
+          <p:cNvPr id="15" name="Rectangle 14"/>
           <p:cNvSpPr/>
           <p:nvPr/>
         </p:nvSpPr>
         <p:spPr>
           <a:xfrm>
-            <a:off x="2838368" y="1901952"/>
-            <a:ext cx="2158037" cy="1804416"/>
+            <a:off x="4872045" y="2740761"/>
+            <a:ext cx="4286814" cy="1697126"/>
           </a:xfrm>
           <a:prstGeom prst="rect">
             <a:avLst/>
@@ -29077,14 +31638,14 @@
       </p:sp>
       <p:sp>
         <p:nvSpPr>
-          <p:cNvPr id="11" name="TextBox 10"/>
-          <p:cNvSpPr txBox="1"/>
-          <p:nvPr/>
-        </p:nvSpPr>
-        <p:spPr>
-          <a:xfrm>
-            <a:off x="2838368" y="2175052"/>
-            <a:ext cx="2158037" cy="1365504"/>
+          <p:cNvPr id="16" name="TextBox 15"/>
+          <p:cNvSpPr txBox="1"/>
+          <p:nvPr/>
+        </p:nvSpPr>
+        <p:spPr>
+          <a:xfrm>
+            <a:off x="5003721" y="2857804"/>
+            <a:ext cx="4023460" cy="1502054"/>
           </a:xfrm>
           <a:prstGeom prst="rect">
             <a:avLst/>
@@ -29097,74 +31658,215 @@
           </a:bodyPr>
           <a:lstStyle/>
           <a:p>
-            <a:pPr algn="ctr">
+            <a:pPr marL="118875" indent="-118875">
+              <a:lnSpc>
+                <a:spcPct val="108000"/>
+              </a:lnSpc>
+              <a:spcAft>
+                <a:spcPts val="400"/>
+              </a:spcAft>
+            </a:pPr>
+            <a:r>
+              <a:rPr sz="720" b="1">
+                <a:solidFill>
+                  <a:srgbClr val="556A83"/>
+                </a:solidFill>
+                <a:latin typeface="Arial"/>
+              </a:rPr>
+              <a:t>›  </a:t>
+            </a:r>
+            <a:r>
+              <a:rPr sz="720" b="1">
+                <a:solidFill>
+                  <a:srgbClr val="314359"/>
+                </a:solidFill>
+                <a:latin typeface="Arial"/>
+              </a:rPr>
+              <a:t>An operator’s edge, not an analyst’s</a:t>
+            </a:r>
+            <a:r>
+              <a:rPr sz="720">
+                <a:solidFill>
+                  <a:srgbClr val="0E1620"/>
+                </a:solidFill>
+                <a:latin typeface="Arial"/>
+              </a:rPr>
+              <a:t> — one integrated team for 20 years; 30+ public board seats; former CEOs and CIOs.</a:t>
+            </a:r>
+          </a:p>
+          <a:p>
+            <a:pPr marL="118875" indent="-118875">
+              <a:lnSpc>
+                <a:spcPct val="108000"/>
+              </a:lnSpc>
+              <a:spcAft>
+                <a:spcPts val="400"/>
+              </a:spcAft>
+            </a:pPr>
+            <a:r>
+              <a:rPr sz="720" b="1">
+                <a:solidFill>
+                  <a:srgbClr val="556A83"/>
+                </a:solidFill>
+                <a:latin typeface="Arial"/>
+              </a:rPr>
+              <a:t>›  </a:t>
+            </a:r>
+            <a:r>
+              <a:rPr sz="720" b="1">
+                <a:solidFill>
+                  <a:srgbClr val="314359"/>
+                </a:solidFill>
+                <a:latin typeface="Arial"/>
+              </a:rPr>
+              <a:t>Control from the boardroom</a:t>
+            </a:r>
+            <a:r>
+              <a:rPr sz="720">
+                <a:solidFill>
+                  <a:srgbClr val="0E1620"/>
+                </a:solidFill>
+                <a:latin typeface="Arial"/>
+              </a:rPr>
+              <a:t> — the experience to fix capital allocation, M&amp;A and focus — not merely to advise.</a:t>
+            </a:r>
+          </a:p>
+          <a:p>
+            <a:pPr marL="118875" indent="-118875">
+              <a:lnSpc>
+                <a:spcPct val="108000"/>
+              </a:lnSpc>
+              <a:spcAft>
+                <a:spcPts val="400"/>
+              </a:spcAft>
+            </a:pPr>
+            <a:r>
+              <a:rPr sz="720" b="1">
+                <a:solidFill>
+                  <a:srgbClr val="556A83"/>
+                </a:solidFill>
+                <a:latin typeface="Arial"/>
+              </a:rPr>
+              <a:t>›  </a:t>
+            </a:r>
+            <a:r>
+              <a:rPr sz="720" b="1">
+                <a:solidFill>
+                  <a:srgbClr val="314359"/>
+                </a:solidFill>
+                <a:latin typeface="Arial"/>
+              </a:rPr>
+              <a:t>The edge AI cannot replicate</a:t>
+            </a:r>
+            <a:r>
+              <a:rPr sz="720">
+                <a:solidFill>
+                  <a:srgbClr val="0E1620"/>
+                </a:solidFill>
+                <a:latin typeface="Arial"/>
+              </a:rPr>
+              <a:t> — access, influence and execution, not reading public data faster.</a:t>
+            </a:r>
+          </a:p>
+        </p:txBody>
+      </p:sp>
+      <p:sp>
+        <p:nvSpPr>
+          <p:cNvPr id="17" name="Rectangle 16"/>
+          <p:cNvSpPr/>
+          <p:nvPr/>
+        </p:nvSpPr>
+        <p:spPr>
+          <a:xfrm>
+            <a:off x="453553" y="4535424"/>
+            <a:ext cx="4286814" cy="448665"/>
+          </a:xfrm>
+          <a:prstGeom prst="rect">
+            <a:avLst/>
+          </a:prstGeom>
+          <a:solidFill>
+            <a:srgbClr val="152130"/>
+          </a:solidFill>
+          <a:ln>
+            <a:noFill/>
+          </a:ln>
+          <a:effectLst/>
+        </p:spPr>
+        <p:style>
+          <a:lnRef idx="1">
+            <a:schemeClr val="accent1"/>
+          </a:lnRef>
+          <a:fillRef idx="3">
+            <a:schemeClr val="accent1"/>
+          </a:fillRef>
+          <a:effectRef idx="2">
+            <a:schemeClr val="accent1"/>
+          </a:effectRef>
+          <a:fontRef idx="minor">
+            <a:schemeClr val="lt1"/>
+          </a:fontRef>
+        </p:style>
+        <p:txBody>
+          <a:bodyPr rtlCol="0" anchor="ctr"/>
+          <a:lstStyle/>
+          <a:p>
+            <a:pPr algn="ctr"/>
+            <a:endParaRPr/>
+          </a:p>
+        </p:txBody>
+      </p:sp>
+      <p:sp>
+        <p:nvSpPr>
+          <p:cNvPr id="18" name="TextBox 17"/>
+          <p:cNvSpPr txBox="1"/>
+          <p:nvPr/>
+        </p:nvSpPr>
+        <p:spPr>
+          <a:xfrm>
+            <a:off x="570599" y="4535424"/>
+            <a:ext cx="4067352" cy="448665"/>
+          </a:xfrm>
+          <a:prstGeom prst="rect">
+            <a:avLst/>
+          </a:prstGeom>
+          <a:noFill/>
+        </p:spPr>
+        <p:txBody>
+          <a:bodyPr wrap="square" lIns="0" tIns="0" rIns="0" bIns="0" anchor="ctr">
+            <a:spAutoFit/>
+          </a:bodyPr>
+          <a:lstStyle/>
+          <a:p>
+            <a:pPr algn="l">
               <a:lnSpc>
                 <a:spcPct val="110000"/>
               </a:lnSpc>
               <a:spcAft>
-                <a:spcPts val="400"/>
-              </a:spcAft>
-            </a:pPr>
-            <a:r>
-              <a:rPr sz="3200" b="0" i="0" spc="-120">
-                <a:solidFill>
-                  <a:srgbClr val="314359"/>
+                <a:spcPts val="0"/>
+              </a:spcAft>
+            </a:pPr>
+            <a:r>
+              <a:rPr sz="1000" b="1" i="0">
+                <a:solidFill>
+                  <a:srgbClr val="FFFFFF"/>
                 </a:solidFill>
                 <a:latin typeface="Times New Roman"/>
               </a:rPr>
-              <a:t>19%</a:t>
-            </a:r>
-          </a:p>
-          <a:p>
-            <a:pPr algn="ctr">
-              <a:lnSpc>
-                <a:spcPct val="110000"/>
-              </a:lnSpc>
-              <a:spcAft>
-                <a:spcPts val="0"/>
-              </a:spcAft>
-            </a:pPr>
-            <a:r>
-              <a:rPr sz="960" b="0" i="0">
-                <a:solidFill>
-                  <a:srgbClr val="556A83"/>
-                </a:solidFill>
-                <a:latin typeface="Arial"/>
-              </a:rPr>
-              <a:t>avg annualised NET,</a:t>
-            </a:r>
-          </a:p>
-          <a:p>
-            <a:pPr algn="ctr">
-              <a:lnSpc>
-                <a:spcPct val="110000"/>
-              </a:lnSpc>
-              <a:spcAft>
-                <a:spcPts val="0"/>
-              </a:spcAft>
-            </a:pPr>
-            <a:r>
-              <a:rPr sz="960" b="0" i="0">
-                <a:solidFill>
-                  <a:srgbClr val="556A83"/>
-                </a:solidFill>
-                <a:latin typeface="Arial"/>
-              </a:rPr>
-              <a:t>any entry month*</a:t>
-            </a:r>
-          </a:p>
-        </p:txBody>
-      </p:sp>
-      <p:sp>
-        <p:nvSpPr>
-          <p:cNvPr id="12" name="Rectangle 11"/>
+              <a:t>3 · We own the lane others abandoned</a:t>
+            </a:r>
+          </a:p>
+        </p:txBody>
+      </p:sp>
+      <p:sp>
+        <p:nvSpPr>
+          <p:cNvPr id="19" name="Rectangle 18"/>
           <p:cNvSpPr/>
           <p:nvPr/>
         </p:nvSpPr>
         <p:spPr>
           <a:xfrm>
-            <a:off x="5128083" y="1901952"/>
-            <a:ext cx="2158037" cy="1804416"/>
+            <a:off x="453553" y="4984089"/>
+            <a:ext cx="4286814" cy="1697126"/>
           </a:xfrm>
           <a:prstGeom prst="rect">
             <a:avLst/>
@@ -29202,14 +31904,14 @@
       </p:sp>
       <p:sp>
         <p:nvSpPr>
-          <p:cNvPr id="13" name="TextBox 12"/>
-          <p:cNvSpPr txBox="1"/>
-          <p:nvPr/>
-        </p:nvSpPr>
-        <p:spPr>
-          <a:xfrm>
-            <a:off x="5128083" y="2175052"/>
-            <a:ext cx="2158037" cy="1365504"/>
+          <p:cNvPr id="20" name="TextBox 19"/>
+          <p:cNvSpPr txBox="1"/>
+          <p:nvPr/>
+        </p:nvSpPr>
+        <p:spPr>
+          <a:xfrm>
+            <a:off x="585230" y="5101132"/>
+            <a:ext cx="4023460" cy="811632"/>
           </a:xfrm>
           <a:prstGeom prst="rect">
             <a:avLst/>
@@ -29222,74 +31924,248 @@
           </a:bodyPr>
           <a:lstStyle/>
           <a:p>
-            <a:pPr algn="ctr">
+            <a:pPr marL="118875" indent="-118875">
+              <a:lnSpc>
+                <a:spcPct val="108000"/>
+              </a:lnSpc>
+              <a:spcAft>
+                <a:spcPts val="400"/>
+              </a:spcAft>
+            </a:pPr>
+            <a:r>
+              <a:rPr sz="720" b="1" dirty="0">
+                <a:solidFill>
+                  <a:srgbClr val="556A83"/>
+                </a:solidFill>
+                <a:latin typeface="Arial"/>
+              </a:rPr>
+              <a:t>›  </a:t>
+            </a:r>
+            <a:r>
+              <a:rPr sz="720" b="1" dirty="0">
+                <a:solidFill>
+                  <a:srgbClr val="314359"/>
+                </a:solidFill>
+                <a:latin typeface="Arial"/>
+              </a:rPr>
+              <a:t>The mid-market sweet spot</a:t>
+            </a:r>
+            <a:r>
+              <a:rPr sz="720" dirty="0">
+                <a:solidFill>
+                  <a:srgbClr val="0E1620"/>
+                </a:solidFill>
+                <a:latin typeface="Arial"/>
+              </a:rPr>
+              <a:t> — €50m–€3bn, where a single board seat genuinely moves the outcome.</a:t>
+            </a:r>
+          </a:p>
+          <a:p>
+            <a:pPr marL="118875" indent="-118875">
+              <a:lnSpc>
+                <a:spcPct val="108000"/>
+              </a:lnSpc>
+              <a:spcAft>
+                <a:spcPts val="400"/>
+              </a:spcAft>
+            </a:pPr>
+            <a:r>
+              <a:rPr sz="720" b="1" dirty="0">
+                <a:solidFill>
+                  <a:srgbClr val="556A83"/>
+                </a:solidFill>
+                <a:latin typeface="Arial"/>
+              </a:rPr>
+              <a:t>›  </a:t>
+            </a:r>
+            <a:r>
+              <a:rPr sz="720" b="1" dirty="0">
+                <a:solidFill>
+                  <a:srgbClr val="314359"/>
+                </a:solidFill>
+                <a:latin typeface="Arial"/>
+              </a:rPr>
+              <a:t>Uncontested by the giants</a:t>
+            </a:r>
+            <a:r>
+              <a:rPr sz="720" dirty="0">
+                <a:solidFill>
+                  <a:srgbClr val="0E1620"/>
+                </a:solidFill>
+                <a:latin typeface="Arial"/>
+              </a:rPr>
+              <a:t> — mega</a:t>
+            </a:r>
+            <a:r>
+              <a:rPr lang="en-GB" sz="720" dirty="0">
+                <a:solidFill>
+                  <a:srgbClr val="0E1620"/>
+                </a:solidFill>
+                <a:latin typeface="Arial"/>
+              </a:rPr>
+              <a:t>-</a:t>
+            </a:r>
+            <a:r>
+              <a:rPr sz="720" dirty="0">
+                <a:solidFill>
+                  <a:srgbClr val="0E1620"/>
+                </a:solidFill>
+                <a:latin typeface="Arial"/>
+              </a:rPr>
+              <a:t>cap activists left it behind as they scaled: high return, low competition.</a:t>
+            </a:r>
+          </a:p>
+          <a:p>
+            <a:pPr marL="118875" indent="-118875">
+              <a:lnSpc>
+                <a:spcPct val="108000"/>
+              </a:lnSpc>
+              <a:spcAft>
+                <a:spcPts val="400"/>
+              </a:spcAft>
+            </a:pPr>
+            <a:r>
+              <a:rPr sz="720" b="1" dirty="0">
+                <a:solidFill>
+                  <a:srgbClr val="556A83"/>
+                </a:solidFill>
+                <a:latin typeface="Arial"/>
+              </a:rPr>
+              <a:t>›  </a:t>
+            </a:r>
+            <a:r>
+              <a:rPr sz="720" b="1" dirty="0">
+                <a:solidFill>
+                  <a:srgbClr val="314359"/>
+                </a:solidFill>
+                <a:latin typeface="Arial"/>
+              </a:rPr>
+              <a:t>Control by agreement</a:t>
+            </a:r>
+            <a:r>
+              <a:rPr sz="720" dirty="0">
+                <a:solidFill>
+                  <a:srgbClr val="0E1620"/>
+                </a:solidFill>
+                <a:latin typeface="Arial"/>
+              </a:rPr>
+              <a:t> — a </a:t>
+            </a:r>
+            <a:r>
+              <a:rPr lang="en-GB" sz="720" dirty="0">
+                <a:solidFill>
+                  <a:srgbClr val="0E1620"/>
+                </a:solidFill>
+                <a:latin typeface="Arial"/>
+              </a:rPr>
+              <a:t>we invest after we have agreed on board engagement with the other shareholders</a:t>
+            </a:r>
+            <a:endParaRPr sz="720" dirty="0">
+              <a:solidFill>
+                <a:srgbClr val="0E1620"/>
+              </a:solidFill>
+              <a:latin typeface="Arial"/>
+            </a:endParaRPr>
+          </a:p>
+        </p:txBody>
+      </p:sp>
+      <p:sp>
+        <p:nvSpPr>
+          <p:cNvPr id="21" name="Rectangle 20"/>
+          <p:cNvSpPr/>
+          <p:nvPr/>
+        </p:nvSpPr>
+        <p:spPr>
+          <a:xfrm>
+            <a:off x="4872045" y="4535424"/>
+            <a:ext cx="4286814" cy="448665"/>
+          </a:xfrm>
+          <a:prstGeom prst="rect">
+            <a:avLst/>
+          </a:prstGeom>
+          <a:solidFill>
+            <a:srgbClr val="152130"/>
+          </a:solidFill>
+          <a:ln>
+            <a:noFill/>
+          </a:ln>
+          <a:effectLst/>
+        </p:spPr>
+        <p:style>
+          <a:lnRef idx="1">
+            <a:schemeClr val="accent1"/>
+          </a:lnRef>
+          <a:fillRef idx="3">
+            <a:schemeClr val="accent1"/>
+          </a:fillRef>
+          <a:effectRef idx="2">
+            <a:schemeClr val="accent1"/>
+          </a:effectRef>
+          <a:fontRef idx="minor">
+            <a:schemeClr val="lt1"/>
+          </a:fontRef>
+        </p:style>
+        <p:txBody>
+          <a:bodyPr rtlCol="0" anchor="ctr"/>
+          <a:lstStyle/>
+          <a:p>
+            <a:pPr algn="ctr"/>
+            <a:endParaRPr/>
+          </a:p>
+        </p:txBody>
+      </p:sp>
+      <p:sp>
+        <p:nvSpPr>
+          <p:cNvPr id="22" name="TextBox 21"/>
+          <p:cNvSpPr txBox="1"/>
+          <p:nvPr/>
+        </p:nvSpPr>
+        <p:spPr>
+          <a:xfrm>
+            <a:off x="4989091" y="4535424"/>
+            <a:ext cx="4067352" cy="448665"/>
+          </a:xfrm>
+          <a:prstGeom prst="rect">
+            <a:avLst/>
+          </a:prstGeom>
+          <a:noFill/>
+        </p:spPr>
+        <p:txBody>
+          <a:bodyPr wrap="square" lIns="0" tIns="0" rIns="0" bIns="0" anchor="ctr">
+            <a:spAutoFit/>
+          </a:bodyPr>
+          <a:lstStyle/>
+          <a:p>
+            <a:pPr algn="l">
               <a:lnSpc>
                 <a:spcPct val="110000"/>
               </a:lnSpc>
               <a:spcAft>
-                <a:spcPts val="400"/>
-              </a:spcAft>
-            </a:pPr>
-            <a:r>
-              <a:rPr sz="3200" b="0" i="0" spc="-120">
-                <a:solidFill>
-                  <a:srgbClr val="314359"/>
+                <a:spcPts val="0"/>
+              </a:spcAft>
+            </a:pPr>
+            <a:r>
+              <a:rPr sz="1000" b="1" i="0">
+                <a:solidFill>
+                  <a:srgbClr val="FFFFFF"/>
                 </a:solidFill>
                 <a:latin typeface="Times New Roman"/>
               </a:rPr>
-              <a:t>7%</a:t>
-            </a:r>
-          </a:p>
-          <a:p>
-            <a:pPr algn="ctr">
-              <a:lnSpc>
-                <a:spcPct val="110000"/>
-              </a:lnSpc>
-              <a:spcAft>
-                <a:spcPts val="0"/>
-              </a:spcAft>
-            </a:pPr>
-            <a:r>
-              <a:rPr sz="960" b="0" i="0">
-                <a:solidFill>
-                  <a:srgbClr val="556A83"/>
-                </a:solidFill>
-                <a:latin typeface="Arial"/>
-              </a:rPr>
-              <a:t>worst-ever entry,</a:t>
-            </a:r>
-          </a:p>
-          <a:p>
-            <a:pPr algn="ctr">
-              <a:lnSpc>
-                <a:spcPct val="110000"/>
-              </a:lnSpc>
-              <a:spcAft>
-                <a:spcPts val="0"/>
-              </a:spcAft>
-            </a:pPr>
-            <a:r>
-              <a:rPr sz="960" b="0" i="0">
-                <a:solidFill>
-                  <a:srgbClr val="556A83"/>
-                </a:solidFill>
-                <a:latin typeface="Arial"/>
-              </a:rPr>
-              <a:t>still positive*</a:t>
-            </a:r>
-          </a:p>
-        </p:txBody>
-      </p:sp>
-      <p:sp>
-        <p:nvSpPr>
-          <p:cNvPr id="14" name="Rectangle 13"/>
+              <a:t>4 · And we have proven it repeats</a:t>
+            </a:r>
+          </a:p>
+        </p:txBody>
+      </p:sp>
+      <p:sp>
+        <p:nvSpPr>
+          <p:cNvPr id="23" name="Rectangle 22"/>
           <p:cNvSpPr/>
           <p:nvPr/>
         </p:nvSpPr>
         <p:spPr>
           <a:xfrm>
-            <a:off x="7417798" y="1901952"/>
-            <a:ext cx="2158037" cy="1804416"/>
+            <a:off x="4872045" y="4984089"/>
+            <a:ext cx="4286814" cy="1697126"/>
           </a:xfrm>
           <a:prstGeom prst="rect">
             <a:avLst/>
@@ -29327,14 +32203,14 @@
       </p:sp>
       <p:sp>
         <p:nvSpPr>
-          <p:cNvPr id="15" name="TextBox 14"/>
-          <p:cNvSpPr txBox="1"/>
-          <p:nvPr/>
-        </p:nvSpPr>
-        <p:spPr>
-          <a:xfrm>
-            <a:off x="7417798" y="2175052"/>
-            <a:ext cx="2158037" cy="1365504"/>
+          <p:cNvPr id="24" name="TextBox 23"/>
+          <p:cNvSpPr txBox="1"/>
+          <p:nvPr/>
+        </p:nvSpPr>
+        <p:spPr>
+          <a:xfrm>
+            <a:off x="5003721" y="5101132"/>
+            <a:ext cx="4023460" cy="743280"/>
           </a:xfrm>
           <a:prstGeom prst="rect">
             <a:avLst/>
@@ -29347,210 +32223,172 @@
           </a:bodyPr>
           <a:lstStyle/>
           <a:p>
-            <a:pPr algn="ctr">
-              <a:lnSpc>
-                <a:spcPct val="110000"/>
+            <a:pPr marL="118875" indent="-118875">
+              <a:lnSpc>
+                <a:spcPct val="108000"/>
               </a:lnSpc>
               <a:spcAft>
                 <a:spcPts val="400"/>
               </a:spcAft>
             </a:pPr>
             <a:r>
-              <a:rPr sz="3200" b="0" i="0" spc="-120">
+              <a:rPr sz="720" b="1" dirty="0">
+                <a:solidFill>
+                  <a:srgbClr val="556A83"/>
+                </a:solidFill>
+                <a:latin typeface="Arial"/>
+              </a:rPr>
+              <a:t>›  </a:t>
+            </a:r>
+            <a:r>
+              <a:rPr sz="720" b="1" dirty="0">
                 <a:solidFill>
                   <a:srgbClr val="314359"/>
                 </a:solidFill>
-                <a:latin typeface="Times New Roman"/>
-              </a:rPr>
-              <a:t>18×</a:t>
-            </a:r>
-          </a:p>
-          <a:p>
-            <a:pPr algn="ctr">
-              <a:lnSpc>
-                <a:spcPct val="110000"/>
-              </a:lnSpc>
-              <a:spcAft>
-                <a:spcPts val="0"/>
-              </a:spcAft>
-            </a:pPr>
-            <a:r>
-              <a:rPr sz="960" b="0" i="0">
+                <a:latin typeface="Arial"/>
+              </a:rPr>
+              <a:t>1</a:t>
+            </a:r>
+            <a:r>
+              <a:rPr lang="en-GB" sz="720" b="1" dirty="0">
+                <a:solidFill>
+                  <a:srgbClr val="314359"/>
+                </a:solidFill>
+                <a:latin typeface="Arial"/>
+              </a:rPr>
+              <a:t>9</a:t>
+            </a:r>
+            <a:r>
+              <a:rPr sz="720" b="1" dirty="0">
+                <a:solidFill>
+                  <a:srgbClr val="314359"/>
+                </a:solidFill>
+                <a:latin typeface="Arial"/>
+              </a:rPr>
+              <a:t>% net p.a., capital grown 18×</a:t>
+            </a:r>
+            <a:r>
+              <a:rPr lang="en-GB" sz="720" b="1" dirty="0">
+                <a:solidFill>
+                  <a:srgbClr val="314359"/>
+                </a:solidFill>
+                <a:latin typeface="Arial"/>
+              </a:rPr>
+              <a:t>, </a:t>
+            </a:r>
+            <a:r>
+              <a:rPr lang="en-US" sz="700" b="1" dirty="0">
+                <a:solidFill>
+                  <a:srgbClr val="314359"/>
+                </a:solidFill>
+              </a:rPr>
+              <a:t>7% worst-entry record</a:t>
+            </a:r>
+            <a:r>
+              <a:rPr sz="720" dirty="0">
+                <a:solidFill>
+                  <a:srgbClr val="0E1620"/>
+                </a:solidFill>
+                <a:latin typeface="Arial"/>
+              </a:rPr>
+              <a:t> — through two full market cycles, net of every fee.</a:t>
+            </a:r>
+          </a:p>
+          <a:p>
+            <a:pPr marL="118875" indent="-118875">
+              <a:lnSpc>
+                <a:spcPct val="108000"/>
+              </a:lnSpc>
+              <a:spcAft>
+                <a:spcPts val="400"/>
+              </a:spcAft>
+            </a:pPr>
+            <a:r>
+              <a:rPr sz="720" b="1" dirty="0">
                 <a:solidFill>
                   <a:srgbClr val="556A83"/>
                 </a:solidFill>
                 <a:latin typeface="Arial"/>
               </a:rPr>
-              <a:t>growth of capital</a:t>
-            </a:r>
-          </a:p>
-          <a:p>
-            <a:pPr algn="ctr">
-              <a:lnSpc>
-                <a:spcPct val="110000"/>
-              </a:lnSpc>
-              <a:spcAft>
-                <a:spcPts val="0"/>
-              </a:spcAft>
-            </a:pPr>
-            <a:r>
-              <a:rPr sz="960" b="0" i="0">
+              <a:t>›  </a:t>
+            </a:r>
+            <a:r>
+              <a:rPr sz="720" b="1" dirty="0">
+                <a:solidFill>
+                  <a:srgbClr val="314359"/>
+                </a:solidFill>
+                <a:latin typeface="Arial"/>
+              </a:rPr>
+              <a:t>92% deal-level hit rate (35 of 38)</a:t>
+            </a:r>
+            <a:r>
+              <a:rPr sz="720" dirty="0">
+                <a:solidFill>
+                  <a:srgbClr val="0E1620"/>
+                </a:solidFill>
+                <a:latin typeface="Arial"/>
+              </a:rPr>
+              <a:t> — a 5× MOIC roughly every two years: skill, not luck.</a:t>
+            </a:r>
+          </a:p>
+          <a:p>
+            <a:pPr marL="118875" indent="-118875">
+              <a:lnSpc>
+                <a:spcPct val="108000"/>
+              </a:lnSpc>
+              <a:spcAft>
+                <a:spcPts val="400"/>
+              </a:spcAft>
+            </a:pPr>
+            <a:r>
+              <a:rPr sz="720" b="1" dirty="0">
                 <a:solidFill>
                   <a:srgbClr val="556A83"/>
                 </a:solidFill>
                 <a:latin typeface="Arial"/>
               </a:rPr>
-              <a:t>since 2006</a:t>
-            </a:r>
-          </a:p>
-        </p:txBody>
-      </p:sp>
-      <p:sp>
-        <p:nvSpPr>
-          <p:cNvPr id="16" name="TextBox 15"/>
-          <p:cNvSpPr txBox="1"/>
-          <p:nvPr/>
-        </p:nvSpPr>
-        <p:spPr>
-          <a:xfrm>
-            <a:off x="548653" y="3998976"/>
-            <a:ext cx="8705305" cy="4584192"/>
-          </a:xfrm>
-          <a:prstGeom prst="rect">
-            <a:avLst/>
-          </a:prstGeom>
-          <a:noFill/>
-        </p:spPr>
-        <p:txBody>
-          <a:bodyPr wrap="square" lIns="0" tIns="0" rIns="0" bIns="0" anchor="t">
-            <a:spAutoFit/>
-          </a:bodyPr>
-          <a:lstStyle/>
-          <a:p>
-            <a:pPr marL="175264" indent="-175264">
-              <a:lnSpc>
-                <a:spcPct val="112000"/>
-              </a:lnSpc>
-              <a:spcAft>
-                <a:spcPts val="1000"/>
-              </a:spcAft>
-            </a:pPr>
-            <a:r>
-              <a:rPr sz="1200" b="1">
+              <a:t>›  </a:t>
+            </a:r>
+            <a:r>
+              <a:rPr sz="720" b="1" dirty="0">
                 <a:solidFill>
                   <a:srgbClr val="314359"/>
                 </a:solidFill>
                 <a:latin typeface="Arial"/>
               </a:rPr>
-              <a:t>›  ~19% average annualised return*</a:t>
-            </a:r>
-            <a:r>
-              <a:rPr sz="1200">
+              <a:t>93% up / 43% down capture</a:t>
+            </a:r>
+            <a:r>
+              <a:rPr sz="720" dirty="0">
                 <a:solidFill>
                   <a:srgbClr val="0E1620"/>
                 </a:solidFill>
                 <a:latin typeface="Arial"/>
               </a:rPr>
-              <a:t>  whatever month you invested and held to today — entry timing has barely mattered.</a:t>
-            </a:r>
-          </a:p>
-          <a:p>
-            <a:pPr marL="175264" indent="-175264">
-              <a:lnSpc>
-                <a:spcPct val="112000"/>
-              </a:lnSpc>
-              <a:spcAft>
-                <a:spcPts val="1000"/>
-              </a:spcAft>
-            </a:pPr>
-            <a:r>
-              <a:rPr sz="1200" b="1">
-                <a:solidFill>
-                  <a:srgbClr val="314359"/>
-                </a:solidFill>
-                <a:latin typeface="Arial"/>
-              </a:rPr>
-              <a:t>›  ~7% in the single worst entry month</a:t>
-            </a:r>
-            <a:r>
-              <a:rPr sz="1200">
-                <a:solidFill>
-                  <a:srgbClr val="0E1620"/>
-                </a:solidFill>
-                <a:latin typeface="Arial"/>
-              </a:rPr>
-              <a:t>  even the unluckiest possible entry still compounded at a mid-single-digit net return — no investor lost over the holding period.</a:t>
-            </a:r>
-          </a:p>
-          <a:p>
-            <a:pPr marL="175264" indent="-175264">
-              <a:lnSpc>
-                <a:spcPct val="112000"/>
-              </a:lnSpc>
-              <a:spcAft>
-                <a:spcPts val="1000"/>
-              </a:spcAft>
-            </a:pPr>
-            <a:r>
-              <a:rPr sz="1200" b="1">
-                <a:solidFill>
-                  <a:srgbClr val="314359"/>
-                </a:solidFill>
-                <a:latin typeface="Arial"/>
-              </a:rPr>
-              <a:t>›  16.3% time-weighted NET since 2006</a:t>
-            </a:r>
-            <a:r>
-              <a:rPr sz="1200">
-                <a:solidFill>
-                  <a:srgbClr val="0E1620"/>
-                </a:solidFill>
-                <a:latin typeface="Arial"/>
-              </a:rPr>
-              <a:t>  vs MSCI IMI 6.2% — net of all fees.</a:t>
-            </a:r>
-          </a:p>
-        </p:txBody>
-      </p:sp>
-      <p:sp>
-        <p:nvSpPr>
-          <p:cNvPr id="17" name="TextBox 16"/>
-          <p:cNvSpPr txBox="1"/>
-          <p:nvPr/>
-        </p:nvSpPr>
-        <p:spPr>
-          <a:xfrm>
-            <a:off x="548653" y="6583680"/>
-            <a:ext cx="8632151" cy="390144"/>
-          </a:xfrm>
-          <a:prstGeom prst="rect">
-            <a:avLst/>
-          </a:prstGeom>
-          <a:noFill/>
-        </p:spPr>
-        <p:txBody>
-          <a:bodyPr wrap="square" lIns="0" tIns="0" rIns="0" bIns="0" anchor="t">
-            <a:spAutoFit/>
-          </a:bodyPr>
-          <a:lstStyle/>
-          <a:p>
-            <a:pPr algn="l">
-              <a:lnSpc>
-                <a:spcPct val="110000"/>
-              </a:lnSpc>
-              <a:spcAft>
-                <a:spcPts val="0"/>
-              </a:spcAft>
-            </a:pPr>
-            <a:r>
-              <a:rPr sz="720" b="0" i="0">
-                <a:solidFill>
-                  <a:srgbClr val="556A83"/>
-                </a:solidFill>
-                <a:latin typeface="Arial"/>
-              </a:rPr>
-              <a:t>*Average of the annualised NET return earned investing in each individual month and holding to the end (107 entry months, AIPFII). Time-weighted figure annualised over actual invested time. Past performance is not indicative of future results.</a:t>
-            </a:r>
+              <a:t> — we harvest the inefficiency and protect the downside.</a:t>
+            </a:r>
+            <a:endParaRPr lang="en-GB" sz="720" dirty="0">
+              <a:solidFill>
+                <a:srgbClr val="0E1620"/>
+              </a:solidFill>
+              <a:latin typeface="Arial"/>
+            </a:endParaRPr>
+          </a:p>
+          <a:p>
+            <a:pPr marL="118875" indent="-118875">
+              <a:lnSpc>
+                <a:spcPct val="108000"/>
+              </a:lnSpc>
+              <a:spcAft>
+                <a:spcPts val="400"/>
+              </a:spcAft>
+            </a:pPr>
+            <a:endParaRPr sz="720" dirty="0">
+              <a:solidFill>
+                <a:srgbClr val="0E1620"/>
+              </a:solidFill>
+              <a:latin typeface="Arial"/>
+            </a:endParaRPr>
           </a:p>
         </p:txBody>
       </p:sp>
@@ -29685,7 +32523,7 @@
                 </a:solidFill>
                 <a:latin typeface="Arial"/>
               </a:rPr>
-              <a:t>Why Athanase</a:t>
+              <a:t>Experience</a:t>
             </a:r>
           </a:p>
         </p:txBody>
@@ -29772,7 +32610,7 @@
                 </a:solidFill>
                 <a:latin typeface="Times New Roman"/>
               </a:rPr>
-              <a:t>Why Athanase is the firm best built to capture this inefficiency</a:t>
+              <a:t>An integrated team, 20 years together</a:t>
             </a:r>
           </a:p>
         </p:txBody>
@@ -29814,7 +32652,7 @@
                 </a:solidFill>
                 <a:latin typeface="Arial"/>
               </a:rPr>
-              <a:t>Harvesting this mispricing takes four capabilities at once — find the hidden core, win real control, fix it from the boardroom, and prove it repeats. Few managers have one; we have built all four.</a:t>
+              <a:t>In a world of specialists, a rare unit that has the operating experience to control the outcome.</a:t>
             </a:r>
           </a:p>
         </p:txBody>
@@ -29856,7 +32694,7 @@
                 </a:solidFill>
                 <a:latin typeface="Arial"/>
               </a:rPr>
-              <a:t>Strictly confidential          8</a:t>
+              <a:t>Strictly confidential          10</a:t>
             </a:r>
           </a:p>
         </p:txBody>
@@ -29869,14 +32707,14 @@
         </p:nvSpPr>
         <p:spPr>
           <a:xfrm>
-            <a:off x="453553" y="2292096"/>
-            <a:ext cx="4286814" cy="448665"/>
+            <a:off x="1170461" y="2701747"/>
+            <a:ext cx="7242229" cy="21674"/>
           </a:xfrm>
           <a:prstGeom prst="rect">
             <a:avLst/>
           </a:prstGeom>
           <a:solidFill>
-            <a:srgbClr val="152130"/>
+            <a:srgbClr val="556A83"/>
           </a:solidFill>
           <a:ln>
             <a:noFill/>
@@ -29914,21 +32752,21 @@
         </p:nvSpPr>
         <p:spPr>
           <a:xfrm>
-            <a:off x="570599" y="2292096"/>
-            <a:ext cx="4067352" cy="448665"/>
-          </a:xfrm>
-          <a:prstGeom prst="rect">
-            <a:avLst/>
-          </a:prstGeom>
-          <a:noFill/>
-        </p:spPr>
-        <p:txBody>
-          <a:bodyPr wrap="square" lIns="0" tIns="0" rIns="0" bIns="0" anchor="ctr">
-            <a:spAutoFit/>
-          </a:bodyPr>
-          <a:lstStyle/>
-          <a:p>
-            <a:pPr algn="l">
+            <a:off x="438922" y="2292096"/>
+            <a:ext cx="1463076" cy="341376"/>
+          </a:xfrm>
+          <a:prstGeom prst="rect">
+            <a:avLst/>
+          </a:prstGeom>
+          <a:noFill/>
+        </p:spPr>
+        <p:txBody>
+          <a:bodyPr wrap="square" lIns="0" tIns="0" rIns="0" bIns="0" anchor="t">
+            <a:spAutoFit/>
+          </a:bodyPr>
+          <a:lstStyle/>
+          <a:p>
+            <a:pPr algn="ctr">
               <a:lnSpc>
                 <a:spcPct val="110000"/>
               </a:lnSpc>
@@ -29937,36 +32775,38 @@
               </a:spcAft>
             </a:pPr>
             <a:r>
-              <a:rPr sz="1000" b="1" i="0">
-                <a:solidFill>
-                  <a:srgbClr val="FFFFFF"/>
+              <a:rPr sz="1200" b="1" i="0">
+                <a:solidFill>
+                  <a:srgbClr val="314359"/>
                 </a:solidFill>
                 <a:latin typeface="Times New Roman"/>
               </a:rPr>
-              <a:t>1 · We find what others miss</a:t>
-            </a:r>
-          </a:p>
-        </p:txBody>
-      </p:sp>
-      <p:sp>
-        <p:nvSpPr>
-          <p:cNvPr id="11" name="Rectangle 10"/>
+              <a:t>1992</a:t>
+            </a:r>
+          </a:p>
+        </p:txBody>
+      </p:sp>
+      <p:sp>
+        <p:nvSpPr>
+          <p:cNvPr id="11" name="Oval 10"/>
           <p:cNvSpPr/>
           <p:nvPr/>
         </p:nvSpPr>
         <p:spPr>
           <a:xfrm>
-            <a:off x="453553" y="2740761"/>
-            <a:ext cx="4286814" cy="1697126"/>
-          </a:xfrm>
-          <a:prstGeom prst="rect">
+            <a:off x="1104622" y="2633472"/>
+            <a:ext cx="131676" cy="175564"/>
+          </a:xfrm>
+          <a:prstGeom prst="ellipse">
             <a:avLst/>
           </a:prstGeom>
           <a:solidFill>
-            <a:srgbClr val="F6F7F9"/>
+            <a:srgbClr val="152130"/>
           </a:solidFill>
-          <a:ln>
-            <a:noFill/>
+          <a:ln w="19050">
+            <a:solidFill>
+              <a:srgbClr val="FFFFFF"/>
+            </a:solidFill>
           </a:ln>
           <a:effectLst/>
         </p:spPr>
@@ -30001,8 +32841,8 @@
         </p:nvSpPr>
         <p:spPr>
           <a:xfrm>
-            <a:off x="585230" y="2857804"/>
-            <a:ext cx="4023460" cy="1502054"/>
+            <a:off x="365769" y="2857804"/>
+            <a:ext cx="1609384" cy="292608"/>
           </a:xfrm>
           <a:prstGeom prst="rect">
             <a:avLst/>
@@ -30015,137 +32855,89 @@
           </a:bodyPr>
           <a:lstStyle/>
           <a:p>
-            <a:pPr marL="118875" indent="-118875">
-              <a:lnSpc>
-                <a:spcPct val="108000"/>
-              </a:lnSpc>
-              <a:spcAft>
-                <a:spcPts val="400"/>
-              </a:spcAft>
-            </a:pPr>
-            <a:r>
-              <a:rPr sz="720" b="1">
-                <a:solidFill>
-                  <a:srgbClr val="556A83"/>
-                </a:solidFill>
-                <a:latin typeface="Arial"/>
-              </a:rPr>
-              <a:t>›  </a:t>
-            </a:r>
-            <a:r>
-              <a:rPr sz="720" b="1">
+            <a:pPr algn="ctr">
+              <a:lnSpc>
+                <a:spcPct val="110000"/>
+              </a:lnSpc>
+              <a:spcAft>
+                <a:spcPts val="0"/>
+              </a:spcAft>
+            </a:pPr>
+            <a:r>
+              <a:rPr sz="960" b="0" i="0">
                 <a:solidFill>
                   <a:srgbClr val="314359"/>
                 </a:solidFill>
                 <a:latin typeface="Arial"/>
               </a:rPr>
-              <a:t>A proprietary universe</a:t>
-            </a:r>
-            <a:r>
-              <a:rPr sz="720">
-                <a:solidFill>
-                  <a:srgbClr val="0E1620"/>
-                </a:solidFill>
-                <a:latin typeface="Arial"/>
-              </a:rPr>
-              <a:t> — ~60,000 companies restated to economic reality, separating the profitable core from the value-destroying pivot.</a:t>
-            </a:r>
-          </a:p>
-          <a:p>
-            <a:pPr marL="118875" indent="-118875">
-              <a:lnSpc>
-                <a:spcPct val="108000"/>
-              </a:lnSpc>
-              <a:spcAft>
-                <a:spcPts val="400"/>
-              </a:spcAft>
-            </a:pPr>
-            <a:r>
-              <a:rPr sz="720" b="1">
-                <a:solidFill>
-                  <a:srgbClr val="556A83"/>
-                </a:solidFill>
-                <a:latin typeface="Arial"/>
-              </a:rPr>
-              <a:t>›  </a:t>
-            </a:r>
-            <a:r>
-              <a:rPr sz="720" b="1">
+              <a:t>Öresund</a:t>
+            </a:r>
+          </a:p>
+        </p:txBody>
+      </p:sp>
+      <p:sp>
+        <p:nvSpPr>
+          <p:cNvPr id="13" name="TextBox 12"/>
+          <p:cNvSpPr txBox="1"/>
+          <p:nvPr/>
+        </p:nvSpPr>
+        <p:spPr>
+          <a:xfrm>
+            <a:off x="2852999" y="2292096"/>
+            <a:ext cx="1463076" cy="341376"/>
+          </a:xfrm>
+          <a:prstGeom prst="rect">
+            <a:avLst/>
+          </a:prstGeom>
+          <a:noFill/>
+        </p:spPr>
+        <p:txBody>
+          <a:bodyPr wrap="square" lIns="0" tIns="0" rIns="0" bIns="0" anchor="t">
+            <a:spAutoFit/>
+          </a:bodyPr>
+          <a:lstStyle/>
+          <a:p>
+            <a:pPr algn="ctr">
+              <a:lnSpc>
+                <a:spcPct val="110000"/>
+              </a:lnSpc>
+              <a:spcAft>
+                <a:spcPts val="0"/>
+              </a:spcAft>
+            </a:pPr>
+            <a:r>
+              <a:rPr sz="1200" b="1" i="0">
                 <a:solidFill>
                   <a:srgbClr val="314359"/>
                 </a:solidFill>
-                <a:latin typeface="Arial"/>
-              </a:rPr>
-              <a:t>Moat- and CEO-scored</a:t>
-            </a:r>
-            <a:r>
-              <a:rPr sz="720">
-                <a:solidFill>
-                  <a:srgbClr val="0E1620"/>
-                </a:solidFill>
-                <a:latin typeface="Arial"/>
-              </a:rPr>
-              <a:t> — ~20,000 names ranked; about 1 in 1,000 screened is ever bought.</a:t>
-            </a:r>
-          </a:p>
-          <a:p>
-            <a:pPr marL="118875" indent="-118875">
-              <a:lnSpc>
-                <a:spcPct val="108000"/>
-              </a:lnSpc>
-              <a:spcAft>
-                <a:spcPts val="400"/>
-              </a:spcAft>
-            </a:pPr>
-            <a:r>
-              <a:rPr sz="720" b="1">
-                <a:solidFill>
-                  <a:srgbClr val="556A83"/>
-                </a:solidFill>
-                <a:latin typeface="Arial"/>
-              </a:rPr>
-              <a:t>›  </a:t>
-            </a:r>
-            <a:r>
-              <a:rPr sz="720" b="1">
-                <a:solidFill>
-                  <a:srgbClr val="314359"/>
-                </a:solidFill>
-                <a:latin typeface="Arial"/>
-              </a:rPr>
-              <a:t>Hidden cores, not broken companies</a:t>
-            </a:r>
-            <a:r>
-              <a:rPr sz="720">
-                <a:solidFill>
-                  <a:srgbClr val="0E1620"/>
-                </a:solidFill>
-                <a:latin typeface="Arial"/>
-              </a:rPr>
-              <a:t> — market leaders attractive even if we change nothing — no adverse selection.</a:t>
-            </a:r>
-          </a:p>
-        </p:txBody>
-      </p:sp>
-      <p:sp>
-        <p:nvSpPr>
-          <p:cNvPr id="13" name="Rectangle 12"/>
+                <a:latin typeface="Times New Roman"/>
+              </a:rPr>
+              <a:t>1996</a:t>
+            </a:r>
+          </a:p>
+        </p:txBody>
+      </p:sp>
+      <p:sp>
+        <p:nvSpPr>
+          <p:cNvPr id="14" name="Oval 13"/>
           <p:cNvSpPr/>
           <p:nvPr/>
         </p:nvSpPr>
         <p:spPr>
           <a:xfrm>
-            <a:off x="4872045" y="2292096"/>
-            <a:ext cx="4286814" cy="448665"/>
-          </a:xfrm>
-          <a:prstGeom prst="rect">
+            <a:off x="3518699" y="2633472"/>
+            <a:ext cx="131676" cy="175564"/>
+          </a:xfrm>
+          <a:prstGeom prst="ellipse">
             <a:avLst/>
           </a:prstGeom>
           <a:solidFill>
             <a:srgbClr val="152130"/>
           </a:solidFill>
-          <a:ln>
-            <a:noFill/>
+          <a:ln w="19050">
+            <a:solidFill>
+              <a:srgbClr val="FFFFFF"/>
+            </a:solidFill>
           </a:ln>
           <a:effectLst/>
         </p:spPr>
@@ -30174,27 +32966,27 @@
       </p:sp>
       <p:sp>
         <p:nvSpPr>
-          <p:cNvPr id="14" name="TextBox 13"/>
-          <p:cNvSpPr txBox="1"/>
-          <p:nvPr/>
-        </p:nvSpPr>
-        <p:spPr>
-          <a:xfrm>
-            <a:off x="4989091" y="2292096"/>
-            <a:ext cx="4067352" cy="448665"/>
-          </a:xfrm>
-          <a:prstGeom prst="rect">
-            <a:avLst/>
-          </a:prstGeom>
-          <a:noFill/>
-        </p:spPr>
-        <p:txBody>
-          <a:bodyPr wrap="square" lIns="0" tIns="0" rIns="0" bIns="0" anchor="ctr">
-            <a:spAutoFit/>
-          </a:bodyPr>
-          <a:lstStyle/>
-          <a:p>
-            <a:pPr algn="l">
+          <p:cNvPr id="15" name="TextBox 14"/>
+          <p:cNvSpPr txBox="1"/>
+          <p:nvPr/>
+        </p:nvSpPr>
+        <p:spPr>
+          <a:xfrm>
+            <a:off x="2779845" y="2857804"/>
+            <a:ext cx="1609384" cy="292608"/>
+          </a:xfrm>
+          <a:prstGeom prst="rect">
+            <a:avLst/>
+          </a:prstGeom>
+          <a:noFill/>
+        </p:spPr>
+        <p:txBody>
+          <a:bodyPr wrap="square" lIns="0" tIns="0" rIns="0" bIns="0" anchor="t">
+            <a:spAutoFit/>
+          </a:bodyPr>
+          <a:lstStyle/>
+          <a:p>
+            <a:pPr algn="ctr">
               <a:lnSpc>
                 <a:spcPct val="110000"/>
               </a:lnSpc>
@@ -30203,36 +32995,80 @@
               </a:spcAft>
             </a:pPr>
             <a:r>
-              <a:rPr sz="1000" b="1" i="0">
-                <a:solidFill>
-                  <a:srgbClr val="FFFFFF"/>
+              <a:rPr sz="960" b="0" i="0">
+                <a:solidFill>
+                  <a:srgbClr val="314359"/>
+                </a:solidFill>
+                <a:latin typeface="Arial"/>
+              </a:rPr>
+              <a:t>Custos</a:t>
+            </a:r>
+          </a:p>
+        </p:txBody>
+      </p:sp>
+      <p:sp>
+        <p:nvSpPr>
+          <p:cNvPr id="16" name="TextBox 15"/>
+          <p:cNvSpPr txBox="1"/>
+          <p:nvPr/>
+        </p:nvSpPr>
+        <p:spPr>
+          <a:xfrm>
+            <a:off x="5267075" y="2292096"/>
+            <a:ext cx="1463076" cy="341376"/>
+          </a:xfrm>
+          <a:prstGeom prst="rect">
+            <a:avLst/>
+          </a:prstGeom>
+          <a:noFill/>
+        </p:spPr>
+        <p:txBody>
+          <a:bodyPr wrap="square" lIns="0" tIns="0" rIns="0" bIns="0" anchor="t">
+            <a:spAutoFit/>
+          </a:bodyPr>
+          <a:lstStyle/>
+          <a:p>
+            <a:pPr algn="ctr">
+              <a:lnSpc>
+                <a:spcPct val="110000"/>
+              </a:lnSpc>
+              <a:spcAft>
+                <a:spcPts val="0"/>
+              </a:spcAft>
+            </a:pPr>
+            <a:r>
+              <a:rPr sz="1200" b="1" i="0">
+                <a:solidFill>
+                  <a:srgbClr val="314359"/>
                 </a:solidFill>
                 <a:latin typeface="Times New Roman"/>
               </a:rPr>
-              <a:t>2 · We can actually change it</a:t>
-            </a:r>
-          </a:p>
-        </p:txBody>
-      </p:sp>
-      <p:sp>
-        <p:nvSpPr>
-          <p:cNvPr id="15" name="Rectangle 14"/>
+              <a:t>2006</a:t>
+            </a:r>
+          </a:p>
+        </p:txBody>
+      </p:sp>
+      <p:sp>
+        <p:nvSpPr>
+          <p:cNvPr id="17" name="Oval 16"/>
           <p:cNvSpPr/>
           <p:nvPr/>
         </p:nvSpPr>
         <p:spPr>
           <a:xfrm>
-            <a:off x="4872045" y="2740761"/>
-            <a:ext cx="4286814" cy="1697126"/>
-          </a:xfrm>
-          <a:prstGeom prst="rect">
+            <a:off x="5932775" y="2633472"/>
+            <a:ext cx="131676" cy="175564"/>
+          </a:xfrm>
+          <a:prstGeom prst="ellipse">
             <a:avLst/>
           </a:prstGeom>
           <a:solidFill>
-            <a:srgbClr val="F6F7F9"/>
+            <a:srgbClr val="152130"/>
           </a:solidFill>
-          <a:ln>
-            <a:noFill/>
+          <a:ln w="19050">
+            <a:solidFill>
+              <a:srgbClr val="FFFFFF"/>
+            </a:solidFill>
           </a:ln>
           <a:effectLst/>
         </p:spPr>
@@ -30261,14 +33097,14 @@
       </p:sp>
       <p:sp>
         <p:nvSpPr>
-          <p:cNvPr id="16" name="TextBox 15"/>
-          <p:cNvSpPr txBox="1"/>
-          <p:nvPr/>
-        </p:nvSpPr>
-        <p:spPr>
-          <a:xfrm>
-            <a:off x="5003721" y="2857804"/>
-            <a:ext cx="4023460" cy="1502054"/>
+          <p:cNvPr id="18" name="TextBox 17"/>
+          <p:cNvSpPr txBox="1"/>
+          <p:nvPr/>
+        </p:nvSpPr>
+        <p:spPr>
+          <a:xfrm>
+            <a:off x="5193921" y="2857804"/>
+            <a:ext cx="1609384" cy="292608"/>
           </a:xfrm>
           <a:prstGeom prst="rect">
             <a:avLst/>
@@ -30281,137 +33117,89 @@
           </a:bodyPr>
           <a:lstStyle/>
           <a:p>
-            <a:pPr marL="118875" indent="-118875">
-              <a:lnSpc>
-                <a:spcPct val="108000"/>
-              </a:lnSpc>
-              <a:spcAft>
-                <a:spcPts val="400"/>
-              </a:spcAft>
-            </a:pPr>
-            <a:r>
-              <a:rPr sz="720" b="1">
-                <a:solidFill>
-                  <a:srgbClr val="556A83"/>
-                </a:solidFill>
-                <a:latin typeface="Arial"/>
-              </a:rPr>
-              <a:t>›  </a:t>
-            </a:r>
-            <a:r>
-              <a:rPr sz="720" b="1">
+            <a:pPr algn="ctr">
+              <a:lnSpc>
+                <a:spcPct val="110000"/>
+              </a:lnSpc>
+              <a:spcAft>
+                <a:spcPts val="0"/>
+              </a:spcAft>
+            </a:pPr>
+            <a:r>
+              <a:rPr sz="960" b="0" i="0">
                 <a:solidFill>
                   <a:srgbClr val="314359"/>
                 </a:solidFill>
                 <a:latin typeface="Arial"/>
               </a:rPr>
-              <a:t>An operator’s edge, not an analyst’s</a:t>
-            </a:r>
-            <a:r>
-              <a:rPr sz="720">
-                <a:solidFill>
-                  <a:srgbClr val="0E1620"/>
-                </a:solidFill>
-                <a:latin typeface="Arial"/>
-              </a:rPr>
-              <a:t> — one integrated team for 20 years; 30+ public board seats; former CEOs and CIOs.</a:t>
-            </a:r>
-          </a:p>
-          <a:p>
-            <a:pPr marL="118875" indent="-118875">
-              <a:lnSpc>
-                <a:spcPct val="108000"/>
-              </a:lnSpc>
-              <a:spcAft>
-                <a:spcPts val="400"/>
-              </a:spcAft>
-            </a:pPr>
-            <a:r>
-              <a:rPr sz="720" b="1">
-                <a:solidFill>
-                  <a:srgbClr val="556A83"/>
-                </a:solidFill>
-                <a:latin typeface="Arial"/>
-              </a:rPr>
-              <a:t>›  </a:t>
-            </a:r>
-            <a:r>
-              <a:rPr sz="720" b="1">
+              <a:t>Creades</a:t>
+            </a:r>
+          </a:p>
+        </p:txBody>
+      </p:sp>
+      <p:sp>
+        <p:nvSpPr>
+          <p:cNvPr id="19" name="TextBox 18"/>
+          <p:cNvSpPr txBox="1"/>
+          <p:nvPr/>
+        </p:nvSpPr>
+        <p:spPr>
+          <a:xfrm>
+            <a:off x="7681152" y="2292096"/>
+            <a:ext cx="1463076" cy="341376"/>
+          </a:xfrm>
+          <a:prstGeom prst="rect">
+            <a:avLst/>
+          </a:prstGeom>
+          <a:noFill/>
+        </p:spPr>
+        <p:txBody>
+          <a:bodyPr wrap="square" lIns="0" tIns="0" rIns="0" bIns="0" anchor="t">
+            <a:spAutoFit/>
+          </a:bodyPr>
+          <a:lstStyle/>
+          <a:p>
+            <a:pPr algn="ctr">
+              <a:lnSpc>
+                <a:spcPct val="110000"/>
+              </a:lnSpc>
+              <a:spcAft>
+                <a:spcPts val="0"/>
+              </a:spcAft>
+            </a:pPr>
+            <a:r>
+              <a:rPr sz="1200" b="1" i="0">
                 <a:solidFill>
                   <a:srgbClr val="314359"/>
                 </a:solidFill>
-                <a:latin typeface="Arial"/>
-              </a:rPr>
-              <a:t>Control from the boardroom</a:t>
-            </a:r>
-            <a:r>
-              <a:rPr sz="720">
-                <a:solidFill>
-                  <a:srgbClr val="0E1620"/>
-                </a:solidFill>
-                <a:latin typeface="Arial"/>
-              </a:rPr>
-              <a:t> — the experience to fix capital allocation, M&amp;A and focus — not merely to advise.</a:t>
-            </a:r>
-          </a:p>
-          <a:p>
-            <a:pPr marL="118875" indent="-118875">
-              <a:lnSpc>
-                <a:spcPct val="108000"/>
-              </a:lnSpc>
-              <a:spcAft>
-                <a:spcPts val="400"/>
-              </a:spcAft>
-            </a:pPr>
-            <a:r>
-              <a:rPr sz="720" b="1">
-                <a:solidFill>
-                  <a:srgbClr val="556A83"/>
-                </a:solidFill>
-                <a:latin typeface="Arial"/>
-              </a:rPr>
-              <a:t>›  </a:t>
-            </a:r>
-            <a:r>
-              <a:rPr sz="720" b="1">
-                <a:solidFill>
-                  <a:srgbClr val="314359"/>
-                </a:solidFill>
-                <a:latin typeface="Arial"/>
-              </a:rPr>
-              <a:t>The edge AI cannot replicate</a:t>
-            </a:r>
-            <a:r>
-              <a:rPr sz="720">
-                <a:solidFill>
-                  <a:srgbClr val="0E1620"/>
-                </a:solidFill>
-                <a:latin typeface="Arial"/>
-              </a:rPr>
-              <a:t> — access, influence and execution, not reading public data faster.</a:t>
-            </a:r>
-          </a:p>
-        </p:txBody>
-      </p:sp>
-      <p:sp>
-        <p:nvSpPr>
-          <p:cNvPr id="17" name="Rectangle 16"/>
+                <a:latin typeface="Times New Roman"/>
+              </a:rPr>
+              <a:t>2015</a:t>
+            </a:r>
+          </a:p>
+        </p:txBody>
+      </p:sp>
+      <p:sp>
+        <p:nvSpPr>
+          <p:cNvPr id="20" name="Oval 19"/>
           <p:cNvSpPr/>
           <p:nvPr/>
         </p:nvSpPr>
         <p:spPr>
           <a:xfrm>
-            <a:off x="453553" y="4535424"/>
-            <a:ext cx="4286814" cy="448665"/>
-          </a:xfrm>
-          <a:prstGeom prst="rect">
+            <a:off x="8346852" y="2633472"/>
+            <a:ext cx="131676" cy="175564"/>
+          </a:xfrm>
+          <a:prstGeom prst="ellipse">
             <a:avLst/>
           </a:prstGeom>
           <a:solidFill>
             <a:srgbClr val="152130"/>
           </a:solidFill>
-          <a:ln>
-            <a:noFill/>
+          <a:ln w="19050">
+            <a:solidFill>
+              <a:srgbClr val="FFFFFF"/>
+            </a:solidFill>
           </a:ln>
           <a:effectLst/>
         </p:spPr>
@@ -30440,27 +33228,27 @@
       </p:sp>
       <p:sp>
         <p:nvSpPr>
-          <p:cNvPr id="18" name="TextBox 17"/>
-          <p:cNvSpPr txBox="1"/>
-          <p:nvPr/>
-        </p:nvSpPr>
-        <p:spPr>
-          <a:xfrm>
-            <a:off x="570599" y="4535424"/>
-            <a:ext cx="4067352" cy="448665"/>
-          </a:xfrm>
-          <a:prstGeom prst="rect">
-            <a:avLst/>
-          </a:prstGeom>
-          <a:noFill/>
-        </p:spPr>
-        <p:txBody>
-          <a:bodyPr wrap="square" lIns="0" tIns="0" rIns="0" bIns="0" anchor="ctr">
-            <a:spAutoFit/>
-          </a:bodyPr>
-          <a:lstStyle/>
-          <a:p>
-            <a:pPr algn="l">
+          <p:cNvPr id="21" name="TextBox 20"/>
+          <p:cNvSpPr txBox="1"/>
+          <p:nvPr/>
+        </p:nvSpPr>
+        <p:spPr>
+          <a:xfrm>
+            <a:off x="7607998" y="2857804"/>
+            <a:ext cx="1609384" cy="292608"/>
+          </a:xfrm>
+          <a:prstGeom prst="rect">
+            <a:avLst/>
+          </a:prstGeom>
+          <a:noFill/>
+        </p:spPr>
+        <p:txBody>
+          <a:bodyPr wrap="square" lIns="0" tIns="0" rIns="0" bIns="0" anchor="t">
+            <a:spAutoFit/>
+          </a:bodyPr>
+          <a:lstStyle/>
+          <a:p>
+            <a:pPr algn="ctr">
               <a:lnSpc>
                 <a:spcPct val="110000"/>
               </a:lnSpc>
@@ -30469,72 +33257,27 @@
               </a:spcAft>
             </a:pPr>
             <a:r>
-              <a:rPr sz="1000" b="1" i="0">
-                <a:solidFill>
-                  <a:srgbClr val="FFFFFF"/>
-                </a:solidFill>
-                <a:latin typeface="Times New Roman"/>
-              </a:rPr>
-              <a:t>3 · We own the lane others abandoned</a:t>
-            </a:r>
-          </a:p>
-        </p:txBody>
-      </p:sp>
-      <p:sp>
-        <p:nvSpPr>
-          <p:cNvPr id="19" name="Rectangle 18"/>
-          <p:cNvSpPr/>
-          <p:nvPr/>
-        </p:nvSpPr>
-        <p:spPr>
-          <a:xfrm>
-            <a:off x="453553" y="4984089"/>
-            <a:ext cx="4286814" cy="1697126"/>
-          </a:xfrm>
-          <a:prstGeom prst="rect">
-            <a:avLst/>
-          </a:prstGeom>
-          <a:solidFill>
-            <a:srgbClr val="F6F7F9"/>
-          </a:solidFill>
-          <a:ln>
-            <a:noFill/>
-          </a:ln>
-          <a:effectLst/>
-        </p:spPr>
-        <p:style>
-          <a:lnRef idx="1">
-            <a:schemeClr val="accent1"/>
-          </a:lnRef>
-          <a:fillRef idx="3">
-            <a:schemeClr val="accent1"/>
-          </a:fillRef>
-          <a:effectRef idx="2">
-            <a:schemeClr val="accent1"/>
-          </a:effectRef>
-          <a:fontRef idx="minor">
-            <a:schemeClr val="lt1"/>
-          </a:fontRef>
-        </p:style>
-        <p:txBody>
-          <a:bodyPr rtlCol="0" anchor="ctr"/>
-          <a:lstStyle/>
-          <a:p>
-            <a:pPr algn="ctr"/>
-            <a:endParaRPr/>
-          </a:p>
-        </p:txBody>
-      </p:sp>
-      <p:sp>
-        <p:nvSpPr>
-          <p:cNvPr id="20" name="TextBox 19"/>
-          <p:cNvSpPr txBox="1"/>
-          <p:nvPr/>
-        </p:nvSpPr>
-        <p:spPr>
-          <a:xfrm>
-            <a:off x="585230" y="5101132"/>
-            <a:ext cx="4023460" cy="811632"/>
+              <a:rPr sz="960" b="0" i="0">
+                <a:solidFill>
+                  <a:srgbClr val="314359"/>
+                </a:solidFill>
+                <a:latin typeface="Arial"/>
+              </a:rPr>
+              <a:t>Athanase</a:t>
+            </a:r>
+          </a:p>
+        </p:txBody>
+      </p:sp>
+      <p:sp>
+        <p:nvSpPr>
+          <p:cNvPr id="22" name="TextBox 21"/>
+          <p:cNvSpPr txBox="1"/>
+          <p:nvPr/>
+        </p:nvSpPr>
+        <p:spPr>
+          <a:xfrm>
+            <a:off x="548653" y="3511296"/>
+            <a:ext cx="8705305" cy="4584192"/>
           </a:xfrm>
           <a:prstGeom prst="rect">
             <a:avLst/>
@@ -30547,471 +33290,144 @@
           </a:bodyPr>
           <a:lstStyle/>
           <a:p>
-            <a:pPr marL="118875" indent="-118875">
-              <a:lnSpc>
-                <a:spcPct val="108000"/>
-              </a:lnSpc>
-              <a:spcAft>
-                <a:spcPts val="400"/>
-              </a:spcAft>
-            </a:pPr>
-            <a:r>
-              <a:rPr sz="720" b="1" dirty="0">
-                <a:solidFill>
-                  <a:srgbClr val="556A83"/>
-                </a:solidFill>
-                <a:latin typeface="Arial"/>
-              </a:rPr>
-              <a:t>›  </a:t>
-            </a:r>
-            <a:r>
-              <a:rPr sz="720" b="1" dirty="0">
+            <a:pPr marL="169422" indent="-169422">
+              <a:lnSpc>
+                <a:spcPct val="112000"/>
+              </a:lnSpc>
+              <a:spcAft>
+                <a:spcPts val="1000"/>
+              </a:spcAft>
+            </a:pPr>
+            <a:r>
+              <a:rPr sz="1160" b="1">
                 <a:solidFill>
                   <a:srgbClr val="314359"/>
                 </a:solidFill>
                 <a:latin typeface="Arial"/>
               </a:rPr>
-              <a:t>The mid-market sweet spot</a:t>
-            </a:r>
-            <a:r>
-              <a:rPr sz="720" dirty="0">
+              <a:t>›  38 companies managed,</a:t>
+            </a:r>
+            <a:r>
+              <a:rPr sz="1160">
                 <a:solidFill>
                   <a:srgbClr val="0E1620"/>
                 </a:solidFill>
                 <a:latin typeface="Arial"/>
               </a:rPr>
-              <a:t> — €50m–€3bn, where a single board seat genuinely moves the outcome.</a:t>
-            </a:r>
-          </a:p>
-          <a:p>
-            <a:pPr marL="118875" indent="-118875">
-              <a:lnSpc>
-                <a:spcPct val="108000"/>
-              </a:lnSpc>
-              <a:spcAft>
-                <a:spcPts val="400"/>
-              </a:spcAft>
-            </a:pPr>
-            <a:r>
-              <a:rPr sz="720" b="1" dirty="0">
-                <a:solidFill>
-                  <a:srgbClr val="556A83"/>
-                </a:solidFill>
-                <a:latin typeface="Arial"/>
-              </a:rPr>
-              <a:t>›  </a:t>
-            </a:r>
-            <a:r>
-              <a:rPr sz="720" b="1" dirty="0">
+              <a:t>  with a proven ability to tell a “strong core” from a “prestige trap”.</a:t>
+            </a:r>
+          </a:p>
+          <a:p>
+            <a:pPr marL="169422" indent="-169422">
+              <a:lnSpc>
+                <a:spcPct val="112000"/>
+              </a:lnSpc>
+              <a:spcAft>
+                <a:spcPts val="1000"/>
+              </a:spcAft>
+            </a:pPr>
+            <a:r>
+              <a:rPr sz="1160" b="1">
                 <a:solidFill>
                   <a:srgbClr val="314359"/>
                 </a:solidFill>
                 <a:latin typeface="Arial"/>
               </a:rPr>
-              <a:t>Uncontested by the giants</a:t>
-            </a:r>
-            <a:r>
-              <a:rPr sz="720" dirty="0">
+              <a:t>›  30+ public board seats</a:t>
+            </a:r>
+            <a:r>
+              <a:rPr sz="1160">
                 <a:solidFill>
                   <a:srgbClr val="0E1620"/>
                 </a:solidFill>
                 <a:latin typeface="Arial"/>
               </a:rPr>
-              <a:t> — mega</a:t>
-            </a:r>
-            <a:r>
-              <a:rPr lang="en-GB" sz="720" dirty="0">
+              <a:t>  — real experience mandating pivots and protecting shareholder interests, not writing engagement letters.</a:t>
+            </a:r>
+          </a:p>
+          <a:p>
+            <a:pPr marL="169422" indent="-169422">
+              <a:lnSpc>
+                <a:spcPct val="112000"/>
+              </a:lnSpc>
+              <a:spcAft>
+                <a:spcPts val="1000"/>
+              </a:spcAft>
+            </a:pPr>
+            <a:r>
+              <a:rPr sz="1160" b="1">
+                <a:solidFill>
+                  <a:srgbClr val="314359"/>
+                </a:solidFill>
+                <a:latin typeface="Arial"/>
+              </a:rPr>
+              <a:t>›  A dual lens:</a:t>
+            </a:r>
+            <a:r>
+              <a:rPr sz="1160">
                 <a:solidFill>
                   <a:srgbClr val="0E1620"/>
                 </a:solidFill>
                 <a:latin typeface="Arial"/>
               </a:rPr>
-              <a:t>-</a:t>
-            </a:r>
-            <a:r>
-              <a:rPr sz="720" dirty="0">
+              <a:t>  a forensic investing lens to find the value and a C-suite operating lens that understands the “how” of execution.</a:t>
+            </a:r>
+          </a:p>
+          <a:p>
+            <a:pPr marL="169422" indent="-169422">
+              <a:lnSpc>
+                <a:spcPct val="112000"/>
+              </a:lnSpc>
+              <a:spcAft>
+                <a:spcPts val="1000"/>
+              </a:spcAft>
+            </a:pPr>
+            <a:r>
+              <a:rPr sz="1160" b="1">
+                <a:solidFill>
+                  <a:srgbClr val="314359"/>
+                </a:solidFill>
+                <a:latin typeface="Arial"/>
+              </a:rPr>
+              <a:t>›  Skin in the game.</a:t>
+            </a:r>
+            <a:r>
+              <a:rPr sz="1160">
                 <a:solidFill>
                   <a:srgbClr val="0E1620"/>
                 </a:solidFill>
                 <a:latin typeface="Arial"/>
               </a:rPr>
-              <a:t>cap activists left it behind as they scaled: high return, low competition.</a:t>
-            </a:r>
-          </a:p>
-          <a:p>
-            <a:pPr marL="118875" indent="-118875">
-              <a:lnSpc>
-                <a:spcPct val="108000"/>
-              </a:lnSpc>
-              <a:spcAft>
-                <a:spcPts val="400"/>
-              </a:spcAft>
-            </a:pPr>
-            <a:r>
-              <a:rPr sz="720" b="1" dirty="0">
-                <a:solidFill>
-                  <a:srgbClr val="556A83"/>
-                </a:solidFill>
-                <a:latin typeface="Arial"/>
-              </a:rPr>
-              <a:t>›  </a:t>
-            </a:r>
-            <a:r>
-              <a:rPr sz="720" b="1" dirty="0">
+              <a:t>  The team uses Athanase as its own investment vehicle and shares in the success economics.</a:t>
+            </a:r>
+          </a:p>
+          <a:p>
+            <a:pPr marL="169422" indent="-169422">
+              <a:lnSpc>
+                <a:spcPct val="112000"/>
+              </a:lnSpc>
+              <a:spcAft>
+                <a:spcPts val="1000"/>
+              </a:spcAft>
+            </a:pPr>
+            <a:r>
+              <a:rPr sz="1160" b="1">
                 <a:solidFill>
                   <a:srgbClr val="314359"/>
                 </a:solidFill>
                 <a:latin typeface="Arial"/>
               </a:rPr>
-              <a:t>Control by agreement</a:t>
-            </a:r>
-            <a:r>
-              <a:rPr sz="720" dirty="0">
+              <a:t>›  Institutional memory.</a:t>
+            </a:r>
+            <a:r>
+              <a:rPr sz="1160">
                 <a:solidFill>
                   <a:srgbClr val="0E1620"/>
                 </a:solidFill>
                 <a:latin typeface="Arial"/>
               </a:rPr>
-              <a:t> — a </a:t>
-            </a:r>
-            <a:r>
-              <a:rPr lang="en-GB" sz="720" dirty="0">
-                <a:solidFill>
-                  <a:srgbClr val="0E1620"/>
-                </a:solidFill>
-                <a:latin typeface="Arial"/>
-              </a:rPr>
-              <a:t>we invest after we have agreed on board engagement with the other shareholders</a:t>
-            </a:r>
-            <a:endParaRPr sz="720" dirty="0">
-              <a:solidFill>
-                <a:srgbClr val="0E1620"/>
-              </a:solidFill>
-              <a:latin typeface="Arial"/>
-            </a:endParaRPr>
-          </a:p>
-        </p:txBody>
-      </p:sp>
-      <p:sp>
-        <p:nvSpPr>
-          <p:cNvPr id="21" name="Rectangle 20"/>
-          <p:cNvSpPr/>
-          <p:nvPr/>
-        </p:nvSpPr>
-        <p:spPr>
-          <a:xfrm>
-            <a:off x="4872045" y="4535424"/>
-            <a:ext cx="4286814" cy="448665"/>
-          </a:xfrm>
-          <a:prstGeom prst="rect">
-            <a:avLst/>
-          </a:prstGeom>
-          <a:solidFill>
-            <a:srgbClr val="152130"/>
-          </a:solidFill>
-          <a:ln>
-            <a:noFill/>
-          </a:ln>
-          <a:effectLst/>
-        </p:spPr>
-        <p:style>
-          <a:lnRef idx="1">
-            <a:schemeClr val="accent1"/>
-          </a:lnRef>
-          <a:fillRef idx="3">
-            <a:schemeClr val="accent1"/>
-          </a:fillRef>
-          <a:effectRef idx="2">
-            <a:schemeClr val="accent1"/>
-          </a:effectRef>
-          <a:fontRef idx="minor">
-            <a:schemeClr val="lt1"/>
-          </a:fontRef>
-        </p:style>
-        <p:txBody>
-          <a:bodyPr rtlCol="0" anchor="ctr"/>
-          <a:lstStyle/>
-          <a:p>
-            <a:pPr algn="ctr"/>
-            <a:endParaRPr/>
-          </a:p>
-        </p:txBody>
-      </p:sp>
-      <p:sp>
-        <p:nvSpPr>
-          <p:cNvPr id="22" name="TextBox 21"/>
-          <p:cNvSpPr txBox="1"/>
-          <p:nvPr/>
-        </p:nvSpPr>
-        <p:spPr>
-          <a:xfrm>
-            <a:off x="4989091" y="4535424"/>
-            <a:ext cx="4067352" cy="448665"/>
-          </a:xfrm>
-          <a:prstGeom prst="rect">
-            <a:avLst/>
-          </a:prstGeom>
-          <a:noFill/>
-        </p:spPr>
-        <p:txBody>
-          <a:bodyPr wrap="square" lIns="0" tIns="0" rIns="0" bIns="0" anchor="ctr">
-            <a:spAutoFit/>
-          </a:bodyPr>
-          <a:lstStyle/>
-          <a:p>
-            <a:pPr algn="l">
-              <a:lnSpc>
-                <a:spcPct val="110000"/>
-              </a:lnSpc>
-              <a:spcAft>
-                <a:spcPts val="0"/>
-              </a:spcAft>
-            </a:pPr>
-            <a:r>
-              <a:rPr sz="1000" b="1" i="0">
-                <a:solidFill>
-                  <a:srgbClr val="FFFFFF"/>
-                </a:solidFill>
-                <a:latin typeface="Times New Roman"/>
-              </a:rPr>
-              <a:t>4 · And we have proven it repeats</a:t>
-            </a:r>
-          </a:p>
-        </p:txBody>
-      </p:sp>
-      <p:sp>
-        <p:nvSpPr>
-          <p:cNvPr id="23" name="Rectangle 22"/>
-          <p:cNvSpPr/>
-          <p:nvPr/>
-        </p:nvSpPr>
-        <p:spPr>
-          <a:xfrm>
-            <a:off x="4872045" y="4984089"/>
-            <a:ext cx="4286814" cy="1697126"/>
-          </a:xfrm>
-          <a:prstGeom prst="rect">
-            <a:avLst/>
-          </a:prstGeom>
-          <a:solidFill>
-            <a:srgbClr val="F6F7F9"/>
-          </a:solidFill>
-          <a:ln>
-            <a:noFill/>
-          </a:ln>
-          <a:effectLst/>
-        </p:spPr>
-        <p:style>
-          <a:lnRef idx="1">
-            <a:schemeClr val="accent1"/>
-          </a:lnRef>
-          <a:fillRef idx="3">
-            <a:schemeClr val="accent1"/>
-          </a:fillRef>
-          <a:effectRef idx="2">
-            <a:schemeClr val="accent1"/>
-          </a:effectRef>
-          <a:fontRef idx="minor">
-            <a:schemeClr val="lt1"/>
-          </a:fontRef>
-        </p:style>
-        <p:txBody>
-          <a:bodyPr rtlCol="0" anchor="ctr"/>
-          <a:lstStyle/>
-          <a:p>
-            <a:pPr algn="ctr"/>
-            <a:endParaRPr/>
-          </a:p>
-        </p:txBody>
-      </p:sp>
-      <p:sp>
-        <p:nvSpPr>
-          <p:cNvPr id="24" name="TextBox 23"/>
-          <p:cNvSpPr txBox="1"/>
-          <p:nvPr/>
-        </p:nvSpPr>
-        <p:spPr>
-          <a:xfrm>
-            <a:off x="5003721" y="5101132"/>
-            <a:ext cx="4023460" cy="743280"/>
-          </a:xfrm>
-          <a:prstGeom prst="rect">
-            <a:avLst/>
-          </a:prstGeom>
-          <a:noFill/>
-        </p:spPr>
-        <p:txBody>
-          <a:bodyPr wrap="square" lIns="0" tIns="0" rIns="0" bIns="0" anchor="t">
-            <a:spAutoFit/>
-          </a:bodyPr>
-          <a:lstStyle/>
-          <a:p>
-            <a:pPr marL="118875" indent="-118875">
-              <a:lnSpc>
-                <a:spcPct val="108000"/>
-              </a:lnSpc>
-              <a:spcAft>
-                <a:spcPts val="400"/>
-              </a:spcAft>
-            </a:pPr>
-            <a:r>
-              <a:rPr sz="720" b="1" dirty="0">
-                <a:solidFill>
-                  <a:srgbClr val="556A83"/>
-                </a:solidFill>
-                <a:latin typeface="Arial"/>
-              </a:rPr>
-              <a:t>›  </a:t>
-            </a:r>
-            <a:r>
-              <a:rPr sz="720" b="1" dirty="0">
-                <a:solidFill>
-                  <a:srgbClr val="314359"/>
-                </a:solidFill>
-                <a:latin typeface="Arial"/>
-              </a:rPr>
-              <a:t>1</a:t>
-            </a:r>
-            <a:r>
-              <a:rPr lang="en-GB" sz="720" b="1" dirty="0">
-                <a:solidFill>
-                  <a:srgbClr val="314359"/>
-                </a:solidFill>
-                <a:latin typeface="Arial"/>
-              </a:rPr>
-              <a:t>9</a:t>
-            </a:r>
-            <a:r>
-              <a:rPr sz="720" b="1" dirty="0">
-                <a:solidFill>
-                  <a:srgbClr val="314359"/>
-                </a:solidFill>
-                <a:latin typeface="Arial"/>
-              </a:rPr>
-              <a:t>% net p.a., capital grown 18×</a:t>
-            </a:r>
-            <a:r>
-              <a:rPr lang="en-GB" sz="720" b="1" dirty="0">
-                <a:solidFill>
-                  <a:srgbClr val="314359"/>
-                </a:solidFill>
-                <a:latin typeface="Arial"/>
-              </a:rPr>
-              <a:t>, </a:t>
-            </a:r>
-            <a:r>
-              <a:rPr lang="en-US" sz="700" b="1" dirty="0">
-                <a:solidFill>
-                  <a:srgbClr val="314359"/>
-                </a:solidFill>
-              </a:rPr>
-              <a:t>7% worst-entry record</a:t>
-            </a:r>
-            <a:r>
-              <a:rPr sz="720" dirty="0">
-                <a:solidFill>
-                  <a:srgbClr val="0E1620"/>
-                </a:solidFill>
-                <a:latin typeface="Arial"/>
-              </a:rPr>
-              <a:t> — through two full market cycles, net of every fee.</a:t>
-            </a:r>
-          </a:p>
-          <a:p>
-            <a:pPr marL="118875" indent="-118875">
-              <a:lnSpc>
-                <a:spcPct val="108000"/>
-              </a:lnSpc>
-              <a:spcAft>
-                <a:spcPts val="400"/>
-              </a:spcAft>
-            </a:pPr>
-            <a:r>
-              <a:rPr sz="720" b="1" dirty="0">
-                <a:solidFill>
-                  <a:srgbClr val="556A83"/>
-                </a:solidFill>
-                <a:latin typeface="Arial"/>
-              </a:rPr>
-              <a:t>›  </a:t>
-            </a:r>
-            <a:r>
-              <a:rPr sz="720" b="1" dirty="0">
-                <a:solidFill>
-                  <a:srgbClr val="314359"/>
-                </a:solidFill>
-                <a:latin typeface="Arial"/>
-              </a:rPr>
-              <a:t>92% deal-level hit rate (35 of 38)</a:t>
-            </a:r>
-            <a:r>
-              <a:rPr sz="720" dirty="0">
-                <a:solidFill>
-                  <a:srgbClr val="0E1620"/>
-                </a:solidFill>
-                <a:latin typeface="Arial"/>
-              </a:rPr>
-              <a:t> — a 5× MOIC roughly every two years: skill, not luck.</a:t>
-            </a:r>
-          </a:p>
-          <a:p>
-            <a:pPr marL="118875" indent="-118875">
-              <a:lnSpc>
-                <a:spcPct val="108000"/>
-              </a:lnSpc>
-              <a:spcAft>
-                <a:spcPts val="400"/>
-              </a:spcAft>
-            </a:pPr>
-            <a:r>
-              <a:rPr sz="720" b="1" dirty="0">
-                <a:solidFill>
-                  <a:srgbClr val="556A83"/>
-                </a:solidFill>
-                <a:latin typeface="Arial"/>
-              </a:rPr>
-              <a:t>›  </a:t>
-            </a:r>
-            <a:r>
-              <a:rPr sz="720" b="1" dirty="0">
-                <a:solidFill>
-                  <a:srgbClr val="314359"/>
-                </a:solidFill>
-                <a:latin typeface="Arial"/>
-              </a:rPr>
-              <a:t>93% up / 43% down capture</a:t>
-            </a:r>
-            <a:r>
-              <a:rPr sz="720" dirty="0">
-                <a:solidFill>
-                  <a:srgbClr val="0E1620"/>
-                </a:solidFill>
-                <a:latin typeface="Arial"/>
-              </a:rPr>
-              <a:t> — we harvest the inefficiency and protect the downside.</a:t>
-            </a:r>
-            <a:endParaRPr lang="en-GB" sz="720" dirty="0">
-              <a:solidFill>
-                <a:srgbClr val="0E1620"/>
-              </a:solidFill>
-              <a:latin typeface="Arial"/>
-            </a:endParaRPr>
-          </a:p>
-          <a:p>
-            <a:pPr marL="118875" indent="-118875">
-              <a:lnSpc>
-                <a:spcPct val="108000"/>
-              </a:lnSpc>
-              <a:spcAft>
-                <a:spcPts val="400"/>
-              </a:spcAft>
-            </a:pPr>
-            <a:endParaRPr sz="720" dirty="0">
-              <a:solidFill>
-                <a:srgbClr val="0E1620"/>
-              </a:solidFill>
-              <a:latin typeface="Arial"/>
-            </a:endParaRPr>
+              <a:t>  Multiple market cycles together eliminate key-person risk and prevent repeating historical mistakes.</a:t>
+            </a:r>
           </a:p>
         </p:txBody>
       </p:sp>
@@ -31023,7 +33439,7 @@
 </p:sld>
 </file>
 
-<file path=ppt/slides/slide900.xml><?xml version="1.0" encoding="utf-8"?>
+<file path=ppt/slides/slide901.xml><?xml version="1.0" encoding="utf-8"?>
 <p:sld xmlns:a="http://schemas.openxmlformats.org/drawingml/2006/main" xmlns:p="http://schemas.openxmlformats.org/presentationml/2006/main" xmlns:r="http://schemas.openxmlformats.org/officeDocument/2006/relationships">
   <p:cSld>
     <p:spTree>
@@ -31139,7 +33555,7 @@
                 </a:solidFill>
                 <a:latin typeface="Arial"/>
               </a:rPr>
-              <a:t>Experience</a:t>
+              <a:t>The Opportunity</a:t>
             </a:r>
           </a:p>
         </p:txBody>
@@ -31226,7 +33642,7 @@
                 </a:solidFill>
                 <a:latin typeface="Times New Roman"/>
               </a:rPr>
-              <a:t>The people behind the track record</a:t>
+              <a:t>Why mid-caps are more often mispriced</a:t>
             </a:r>
           </a:p>
         </p:txBody>
@@ -31268,7 +33684,7 @@
                 </a:solidFill>
                 <a:latin typeface="Arial"/>
               </a:rPr>
-              <a:t>An integrated investment team — and an independent operations, finance and control function that safeguards investor capital.</a:t>
+              <a:t>The companies that are easiest to improve are also the most likely to be mispriced — three structural features of the mid-market leave more value on the table.</a:t>
             </a:r>
           </a:p>
         </p:txBody>
@@ -31310,34 +33726,79 @@
                 </a:solidFill>
                 <a:latin typeface="Arial"/>
               </a:rPr>
-              <a:t>Strictly confidential          10</a:t>
-            </a:r>
-          </a:p>
-        </p:txBody>
-      </p:sp>
-      <p:sp>
-        <p:nvSpPr>
-          <p:cNvPr id="9" name="TextBox 8"/>
-          <p:cNvSpPr txBox="1"/>
-          <p:nvPr/>
-        </p:nvSpPr>
-        <p:spPr>
-          <a:xfrm>
-            <a:off x="438922" y="2126284"/>
-            <a:ext cx="5852306" cy="292608"/>
-          </a:xfrm>
-          <a:prstGeom prst="rect">
-            <a:avLst/>
-          </a:prstGeom>
-          <a:noFill/>
-        </p:spPr>
-        <p:txBody>
-          <a:bodyPr wrap="square" lIns="0" tIns="0" rIns="0" bIns="0" anchor="t">
-            <a:spAutoFit/>
-          </a:bodyPr>
-          <a:lstStyle/>
-          <a:p>
-            <a:pPr algn="l">
+              <a:t>Strictly confidential          7</a:t>
+            </a:r>
+          </a:p>
+        </p:txBody>
+      </p:sp>
+      <p:sp>
+        <p:nvSpPr>
+          <p:cNvPr id="9" name="Rectangle 8"/>
+          <p:cNvSpPr/>
+          <p:nvPr/>
+        </p:nvSpPr>
+        <p:spPr>
+          <a:xfrm>
+            <a:off x="438922" y="2292096"/>
+            <a:ext cx="2706691" cy="507187"/>
+          </a:xfrm>
+          <a:prstGeom prst="rect">
+            <a:avLst/>
+          </a:prstGeom>
+          <a:solidFill>
+            <a:srgbClr val="152130"/>
+          </a:solidFill>
+          <a:ln>
+            <a:noFill/>
+          </a:ln>
+          <a:effectLst/>
+        </p:spPr>
+        <p:style>
+          <a:lnRef idx="1">
+            <a:schemeClr val="accent1"/>
+          </a:lnRef>
+          <a:fillRef idx="3">
+            <a:schemeClr val="accent1"/>
+          </a:fillRef>
+          <a:effectRef idx="2">
+            <a:schemeClr val="accent1"/>
+          </a:effectRef>
+          <a:fontRef idx="minor">
+            <a:schemeClr val="lt1"/>
+          </a:fontRef>
+        </p:style>
+        <p:txBody>
+          <a:bodyPr rtlCol="0" anchor="ctr"/>
+          <a:lstStyle/>
+          <a:p>
+            <a:pPr algn="ctr"/>
+            <a:endParaRPr/>
+          </a:p>
+        </p:txBody>
+      </p:sp>
+      <p:sp>
+        <p:nvSpPr>
+          <p:cNvPr id="10" name="TextBox 9"/>
+          <p:cNvSpPr txBox="1"/>
+          <p:nvPr/>
+        </p:nvSpPr>
+        <p:spPr>
+          <a:xfrm>
+            <a:off x="438922" y="2292096"/>
+            <a:ext cx="2706691" cy="507187"/>
+          </a:xfrm>
+          <a:prstGeom prst="rect">
+            <a:avLst/>
+          </a:prstGeom>
+          <a:noFill/>
+        </p:spPr>
+        <p:txBody>
+          <a:bodyPr wrap="square" lIns="0" tIns="0" rIns="0" bIns="0" anchor="ctr">
+            <a:spAutoFit/>
+          </a:bodyPr>
+          <a:lstStyle/>
+          <a:p>
+            <a:pPr algn="ctr">
               <a:lnSpc>
                 <a:spcPct val="110000"/>
               </a:lnSpc>
@@ -31346,27 +33807,27 @@
               </a:spcAft>
             </a:pPr>
             <a:r>
-              <a:rPr sz="880" b="1" i="0">
-                <a:solidFill>
-                  <a:srgbClr val="314359"/>
-                </a:solidFill>
-                <a:latin typeface="Arial"/>
-              </a:rPr>
-              <a:t>INVESTMENT TEAM</a:t>
-            </a:r>
-          </a:p>
-        </p:txBody>
-      </p:sp>
-      <p:sp>
-        <p:nvSpPr>
-          <p:cNvPr id="10" name="Rectangle 9"/>
+              <a:rPr sz="1080" b="1" i="0">
+                <a:solidFill>
+                  <a:srgbClr val="FFFFFF"/>
+                </a:solidFill>
+                <a:latin typeface="Times New Roman"/>
+              </a:rPr>
+              <a:t>1 · Thin analyst coverage</a:t>
+            </a:r>
+          </a:p>
+        </p:txBody>
+      </p:sp>
+      <p:sp>
+        <p:nvSpPr>
+          <p:cNvPr id="11" name="Rectangle 10"/>
           <p:cNvSpPr/>
           <p:nvPr/>
         </p:nvSpPr>
         <p:spPr>
           <a:xfrm>
-            <a:off x="438922" y="2438400"/>
-            <a:ext cx="1704484" cy="1463040"/>
+            <a:off x="438922" y="2799283"/>
+            <a:ext cx="2706691" cy="2633472"/>
           </a:xfrm>
           <a:prstGeom prst="rect">
             <a:avLst/>
@@ -31404,14 +33865,56 @@
       </p:sp>
       <p:sp>
         <p:nvSpPr>
-          <p:cNvPr id="11" name="Rectangle 10"/>
+          <p:cNvPr id="12" name="TextBox 11"/>
+          <p:cNvSpPr txBox="1"/>
+          <p:nvPr/>
+        </p:nvSpPr>
+        <p:spPr>
+          <a:xfrm>
+            <a:off x="599861" y="2994355"/>
+            <a:ext cx="2384814" cy="2340864"/>
+          </a:xfrm>
+          <a:prstGeom prst="rect">
+            <a:avLst/>
+          </a:prstGeom>
+          <a:noFill/>
+        </p:spPr>
+        <p:txBody>
+          <a:bodyPr wrap="square" lIns="0" tIns="0" rIns="0" bIns="0" anchor="t">
+            <a:spAutoFit/>
+          </a:bodyPr>
+          <a:lstStyle/>
+          <a:p>
+            <a:pPr algn="l">
+              <a:lnSpc>
+                <a:spcPct val="120000"/>
+              </a:lnSpc>
+              <a:spcAft>
+                <a:spcPts val="0"/>
+              </a:spcAft>
+            </a:pPr>
+            <a:r>
+              <a:rPr sz="1040" b="0" i="0">
+                <a:solidFill>
+                  <a:srgbClr val="0E1620"/>
+                </a:solidFill>
+                <a:latin typeface="Arial"/>
+              </a:rPr>
+              <a:t>Far fewer sell-side analysts follow a mid-cap than a mega-cap, and many have little or no coverage at all. Less information reaches the market, so price discovery is slower and the gap between price and intrinsic value persists for longer.</a:t>
+            </a:r>
+          </a:p>
+        </p:txBody>
+      </p:sp>
+      <p:sp>
+        <p:nvSpPr>
+          <p:cNvPr id="13" name="Rectangle 12"/>
           <p:cNvSpPr/>
           <p:nvPr/>
         </p:nvSpPr>
         <p:spPr>
           <a:xfrm>
-            <a:off x="438922" y="2438400"/>
-            <a:ext cx="43892" cy="1463040"/>
+            <a:off x="3474806" y="2292096"/>
+            <a:ext cx="2706691" cy="507187"/>
           </a:xfrm>
           <a:prstGeom prst="rect">
             <a:avLst/>
@@ -31449,27 +33952,27 @@
       </p:sp>
       <p:sp>
         <p:nvSpPr>
-          <p:cNvPr id="12" name="TextBox 11"/>
-          <p:cNvSpPr txBox="1"/>
-          <p:nvPr/>
-        </p:nvSpPr>
-        <p:spPr>
-          <a:xfrm>
-            <a:off x="585230" y="2565196"/>
-            <a:ext cx="1470391" cy="292608"/>
-          </a:xfrm>
-          <a:prstGeom prst="rect">
-            <a:avLst/>
-          </a:prstGeom>
-          <a:noFill/>
-        </p:spPr>
-        <p:txBody>
-          <a:bodyPr wrap="square" lIns="0" tIns="0" rIns="0" bIns="0" anchor="t">
-            <a:spAutoFit/>
-          </a:bodyPr>
-          <a:lstStyle/>
-          <a:p>
-            <a:pPr algn="l">
+          <p:cNvPr id="14" name="TextBox 13"/>
+          <p:cNvSpPr txBox="1"/>
+          <p:nvPr/>
+        </p:nvSpPr>
+        <p:spPr>
+          <a:xfrm>
+            <a:off x="3474806" y="2292096"/>
+            <a:ext cx="2706691" cy="507187"/>
+          </a:xfrm>
+          <a:prstGeom prst="rect">
+            <a:avLst/>
+          </a:prstGeom>
+          <a:noFill/>
+        </p:spPr>
+        <p:txBody>
+          <a:bodyPr wrap="square" lIns="0" tIns="0" rIns="0" bIns="0" anchor="ctr">
+            <a:spAutoFit/>
+          </a:bodyPr>
+          <a:lstStyle/>
+          <a:p>
+            <a:pPr algn="ctr">
               <a:lnSpc>
                 <a:spcPct val="110000"/>
               </a:lnSpc>
@@ -31478,97 +33981,13 @@
               </a:spcAft>
             </a:pPr>
             <a:r>
-              <a:rPr sz="1000" b="1" i="0">
-                <a:solidFill>
-                  <a:srgbClr val="314359"/>
+              <a:rPr sz="1080" b="1" i="0">
+                <a:solidFill>
+                  <a:srgbClr val="FFFFFF"/>
                 </a:solidFill>
                 <a:latin typeface="Times New Roman"/>
               </a:rPr>
-              <a:t>Stefan Charette</a:t>
-            </a:r>
-          </a:p>
-        </p:txBody>
-      </p:sp>
-      <p:sp>
-        <p:nvSpPr>
-          <p:cNvPr id="13" name="TextBox 12"/>
-          <p:cNvSpPr txBox="1"/>
-          <p:nvPr/>
-        </p:nvSpPr>
-        <p:spPr>
-          <a:xfrm>
-            <a:off x="585230" y="2848051"/>
-            <a:ext cx="1470391" cy="234086"/>
-          </a:xfrm>
-          <a:prstGeom prst="rect">
-            <a:avLst/>
-          </a:prstGeom>
-          <a:noFill/>
-        </p:spPr>
-        <p:txBody>
-          <a:bodyPr wrap="square" lIns="0" tIns="0" rIns="0" bIns="0" anchor="t">
-            <a:spAutoFit/>
-          </a:bodyPr>
-          <a:lstStyle/>
-          <a:p>
-            <a:pPr algn="l">
-              <a:lnSpc>
-                <a:spcPct val="110000"/>
-              </a:lnSpc>
-              <a:spcAft>
-                <a:spcPts val="0"/>
-              </a:spcAft>
-            </a:pPr>
-            <a:r>
-              <a:rPr sz="680" b="1" i="0">
-                <a:solidFill>
-                  <a:srgbClr val="314359"/>
-                </a:solidFill>
-                <a:latin typeface="Arial"/>
-              </a:rPr>
-              <a:t>CIO &amp; PARTNER</a:t>
-            </a:r>
-          </a:p>
-        </p:txBody>
-      </p:sp>
-      <p:sp>
-        <p:nvSpPr>
-          <p:cNvPr id="14" name="TextBox 13"/>
-          <p:cNvSpPr txBox="1"/>
-          <p:nvPr/>
-        </p:nvSpPr>
-        <p:spPr>
-          <a:xfrm>
-            <a:off x="585230" y="3101644"/>
-            <a:ext cx="1455761" cy="682752"/>
-          </a:xfrm>
-          <a:prstGeom prst="rect">
-            <a:avLst/>
-          </a:prstGeom>
-          <a:noFill/>
-        </p:spPr>
-        <p:txBody>
-          <a:bodyPr wrap="square" lIns="0" tIns="0" rIns="0" bIns="0" anchor="t">
-            <a:spAutoFit/>
-          </a:bodyPr>
-          <a:lstStyle/>
-          <a:p>
-            <a:pPr algn="l">
-              <a:lnSpc>
-                <a:spcPct val="110000"/>
-              </a:lnSpc>
-              <a:spcAft>
-                <a:spcPts val="0"/>
-              </a:spcAft>
-            </a:pPr>
-            <a:r>
-              <a:rPr sz="720" b="0" i="0">
-                <a:solidFill>
-                  <a:srgbClr val="0E1620"/>
-                </a:solidFill>
-                <a:latin typeface="Arial"/>
-              </a:rPr>
-              <a:t>CEO/CIO of Custos, Investment AB Öresund and Creades; CEO of Brokk; investment banker at Lehman Brothers and Salomon Smith Barney.</a:t>
+              <a:t>2 · Fewer sophisticated investors</a:t>
             </a:r>
           </a:p>
         </p:txBody>
@@ -31581,8 +34000,8 @@
         </p:nvSpPr>
         <p:spPr>
           <a:xfrm>
-            <a:off x="2231191" y="2438400"/>
-            <a:ext cx="1704484" cy="1463040"/>
+            <a:off x="3474806" y="2799283"/>
+            <a:ext cx="2706691" cy="2633472"/>
           </a:xfrm>
           <a:prstGeom prst="rect">
             <a:avLst/>
@@ -31620,14 +34039,56 @@
       </p:sp>
       <p:sp>
         <p:nvSpPr>
-          <p:cNvPr id="16" name="Rectangle 15"/>
+          <p:cNvPr id="16" name="TextBox 15"/>
+          <p:cNvSpPr txBox="1"/>
+          <p:nvPr/>
+        </p:nvSpPr>
+        <p:spPr>
+          <a:xfrm>
+            <a:off x="3635745" y="2994355"/>
+            <a:ext cx="2384814" cy="2340864"/>
+          </a:xfrm>
+          <a:prstGeom prst="rect">
+            <a:avLst/>
+          </a:prstGeom>
+          <a:noFill/>
+        </p:spPr>
+        <p:txBody>
+          <a:bodyPr wrap="square" lIns="0" tIns="0" rIns="0" bIns="0" anchor="t">
+            <a:spAutoFit/>
+          </a:bodyPr>
+          <a:lstStyle/>
+          <a:p>
+            <a:pPr algn="l">
+              <a:lnSpc>
+                <a:spcPct val="120000"/>
+              </a:lnSpc>
+              <a:spcAft>
+                <a:spcPts val="0"/>
+              </a:spcAft>
+            </a:pPr>
+            <a:r>
+              <a:rPr sz="1040" b="0" i="0">
+                <a:solidFill>
+                  <a:srgbClr val="0E1620"/>
+                </a:solidFill>
+                <a:latin typeface="Arial"/>
+              </a:rPr>
+              <a:t>The segment is too small to move the needle for the largest institutions, so it is under-owned by the most resourced investors. Pricing is set at the margin by less-informed holders — leaving more frequent, and larger, mispricings.</a:t>
+            </a:r>
+          </a:p>
+        </p:txBody>
+      </p:sp>
+      <p:sp>
+        <p:nvSpPr>
+          <p:cNvPr id="17" name="Rectangle 16"/>
           <p:cNvSpPr/>
           <p:nvPr/>
         </p:nvSpPr>
         <p:spPr>
           <a:xfrm>
-            <a:off x="2231191" y="2438400"/>
-            <a:ext cx="43892" cy="1463040"/>
+            <a:off x="6510690" y="2292096"/>
+            <a:ext cx="2706691" cy="507187"/>
           </a:xfrm>
           <a:prstGeom prst="rect">
             <a:avLst/>
@@ -31665,27 +34126,27 @@
       </p:sp>
       <p:sp>
         <p:nvSpPr>
-          <p:cNvPr id="17" name="TextBox 16"/>
-          <p:cNvSpPr txBox="1"/>
-          <p:nvPr/>
-        </p:nvSpPr>
-        <p:spPr>
-          <a:xfrm>
-            <a:off x="2377499" y="2565196"/>
-            <a:ext cx="1470391" cy="292608"/>
-          </a:xfrm>
-          <a:prstGeom prst="rect">
-            <a:avLst/>
-          </a:prstGeom>
-          <a:noFill/>
-        </p:spPr>
-        <p:txBody>
-          <a:bodyPr wrap="square" lIns="0" tIns="0" rIns="0" bIns="0" anchor="t">
-            <a:spAutoFit/>
-          </a:bodyPr>
-          <a:lstStyle/>
-          <a:p>
-            <a:pPr algn="l">
+          <p:cNvPr id="18" name="TextBox 17"/>
+          <p:cNvSpPr txBox="1"/>
+          <p:nvPr/>
+        </p:nvSpPr>
+        <p:spPr>
+          <a:xfrm>
+            <a:off x="6510690" y="2292096"/>
+            <a:ext cx="2706691" cy="507187"/>
+          </a:xfrm>
+          <a:prstGeom prst="rect">
+            <a:avLst/>
+          </a:prstGeom>
+          <a:noFill/>
+        </p:spPr>
+        <p:txBody>
+          <a:bodyPr wrap="square" lIns="0" tIns="0" rIns="0" bIns="0" anchor="ctr">
+            <a:spAutoFit/>
+          </a:bodyPr>
+          <a:lstStyle/>
+          <a:p>
+            <a:pPr algn="ctr">
               <a:lnSpc>
                 <a:spcPct val="110000"/>
               </a:lnSpc>
@@ -31694,111 +34155,27 @@
               </a:spcAft>
             </a:pPr>
             <a:r>
-              <a:rPr sz="1000" b="1" i="0">
-                <a:solidFill>
-                  <a:srgbClr val="314359"/>
+              <a:rPr sz="1080" b="1" i="0">
+                <a:solidFill>
+                  <a:srgbClr val="FFFFFF"/>
                 </a:solidFill>
                 <a:latin typeface="Times New Roman"/>
               </a:rPr>
-              <a:t>Kenth Eriksson</a:t>
-            </a:r>
-          </a:p>
-        </p:txBody>
-      </p:sp>
-      <p:sp>
-        <p:nvSpPr>
-          <p:cNvPr id="18" name="TextBox 17"/>
-          <p:cNvSpPr txBox="1"/>
-          <p:nvPr/>
-        </p:nvSpPr>
-        <p:spPr>
-          <a:xfrm>
-            <a:off x="2377499" y="2848051"/>
-            <a:ext cx="1470391" cy="234086"/>
-          </a:xfrm>
-          <a:prstGeom prst="rect">
-            <a:avLst/>
-          </a:prstGeom>
-          <a:noFill/>
-        </p:spPr>
-        <p:txBody>
-          <a:bodyPr wrap="square" lIns="0" tIns="0" rIns="0" bIns="0" anchor="t">
-            <a:spAutoFit/>
-          </a:bodyPr>
-          <a:lstStyle/>
-          <a:p>
-            <a:pPr algn="l">
-              <a:lnSpc>
-                <a:spcPct val="110000"/>
-              </a:lnSpc>
-              <a:spcAft>
-                <a:spcPts val="0"/>
-              </a:spcAft>
-            </a:pPr>
-            <a:r>
-              <a:rPr sz="680" b="1" i="0">
-                <a:solidFill>
-                  <a:srgbClr val="314359"/>
-                </a:solidFill>
-                <a:latin typeface="Arial"/>
-              </a:rPr>
-              <a:t>SENIOR PM &amp; PARTNER</a:t>
-            </a:r>
-          </a:p>
-        </p:txBody>
-      </p:sp>
-      <p:sp>
-        <p:nvSpPr>
-          <p:cNvPr id="19" name="TextBox 18"/>
-          <p:cNvSpPr txBox="1"/>
-          <p:nvPr/>
-        </p:nvSpPr>
-        <p:spPr>
-          <a:xfrm>
-            <a:off x="2377499" y="3101644"/>
-            <a:ext cx="1455761" cy="682752"/>
-          </a:xfrm>
-          <a:prstGeom prst="rect">
-            <a:avLst/>
-          </a:prstGeom>
-          <a:noFill/>
-        </p:spPr>
-        <p:txBody>
-          <a:bodyPr wrap="square" lIns="0" tIns="0" rIns="0" bIns="0" anchor="t">
-            <a:spAutoFit/>
-          </a:bodyPr>
-          <a:lstStyle/>
-          <a:p>
-            <a:pPr algn="l">
-              <a:lnSpc>
-                <a:spcPct val="110000"/>
-              </a:lnSpc>
-              <a:spcAft>
-                <a:spcPts val="0"/>
-              </a:spcAft>
-            </a:pPr>
-            <a:r>
-              <a:rPr sz="720" b="0" i="0">
-                <a:solidFill>
-                  <a:srgbClr val="0E1620"/>
-                </a:solidFill>
-                <a:latin typeface="Arial"/>
-              </a:rPr>
-              <a:t>Ex-CEO of Tradimus; Senior VP, Electrolux; tech owner-operator.</a:t>
-            </a:r>
-          </a:p>
-        </p:txBody>
-      </p:sp>
-      <p:sp>
-        <p:nvSpPr>
-          <p:cNvPr id="20" name="Rectangle 19"/>
+              <a:t>3 · Higher earnings volatility</a:t>
+            </a:r>
+          </a:p>
+        </p:txBody>
+      </p:sp>
+      <p:sp>
+        <p:nvSpPr>
+          <p:cNvPr id="19" name="Rectangle 18"/>
           <p:cNvSpPr/>
           <p:nvPr/>
         </p:nvSpPr>
         <p:spPr>
           <a:xfrm>
-            <a:off x="4023460" y="2438400"/>
-            <a:ext cx="1704484" cy="1463040"/>
+            <a:off x="6510690" y="2799283"/>
+            <a:ext cx="2706691" cy="2633472"/>
           </a:xfrm>
           <a:prstGeom prst="rect">
             <a:avLst/>
@@ -31836,14 +34213,56 @@
       </p:sp>
       <p:sp>
         <p:nvSpPr>
-          <p:cNvPr id="21" name="Rectangle 20"/>
+          <p:cNvPr id="20" name="TextBox 19"/>
+          <p:cNvSpPr txBox="1"/>
+          <p:nvPr/>
+        </p:nvSpPr>
+        <p:spPr>
+          <a:xfrm>
+            <a:off x="6671629" y="2994355"/>
+            <a:ext cx="2384814" cy="2340864"/>
+          </a:xfrm>
+          <a:prstGeom prst="rect">
+            <a:avLst/>
+          </a:prstGeom>
+          <a:noFill/>
+        </p:spPr>
+        <p:txBody>
+          <a:bodyPr wrap="square" lIns="0" tIns="0" rIns="0" bIns="0" anchor="t">
+            <a:spAutoFit/>
+          </a:bodyPr>
+          <a:lstStyle/>
+          <a:p>
+            <a:pPr algn="l">
+              <a:lnSpc>
+                <a:spcPct val="120000"/>
+              </a:lnSpc>
+              <a:spcAft>
+                <a:spcPts val="0"/>
+              </a:spcAft>
+            </a:pPr>
+            <a:r>
+              <a:rPr sz="1040" b="0" i="0">
+                <a:solidFill>
+                  <a:srgbClr val="0E1620"/>
+                </a:solidFill>
+                <a:latin typeface="Arial"/>
+              </a:rPr>
+              <a:t>Mid-caps’ earnings swing more than large caps’ — they are less diversified and earlier in their growth. The market over-extrapolates each swing, over-punishing a soft quarter and widening the discount to an otherwise durable core.</a:t>
+            </a:r>
+          </a:p>
+        </p:txBody>
+      </p:sp>
+      <p:sp>
+        <p:nvSpPr>
+          <p:cNvPr id="23" name="Rectangle 22"/>
           <p:cNvSpPr/>
           <p:nvPr/>
         </p:nvSpPr>
         <p:spPr>
           <a:xfrm>
-            <a:off x="4023460" y="2438400"/>
-            <a:ext cx="43892" cy="1463040"/>
+            <a:off x="438922" y="6164275"/>
+            <a:ext cx="8873559" cy="604723"/>
           </a:xfrm>
           <a:prstGeom prst="rect">
             <a:avLst/>
@@ -31881,1516 +34300,7 @@
       </p:sp>
       <p:sp>
         <p:nvSpPr>
-          <p:cNvPr id="22" name="TextBox 21"/>
-          <p:cNvSpPr txBox="1"/>
-          <p:nvPr/>
-        </p:nvSpPr>
-        <p:spPr>
-          <a:xfrm>
-            <a:off x="4169768" y="2565196"/>
-            <a:ext cx="1470391" cy="292608"/>
-          </a:xfrm>
-          <a:prstGeom prst="rect">
-            <a:avLst/>
-          </a:prstGeom>
-          <a:noFill/>
-        </p:spPr>
-        <p:txBody>
-          <a:bodyPr wrap="square" lIns="0" tIns="0" rIns="0" bIns="0" anchor="t">
-            <a:spAutoFit/>
-          </a:bodyPr>
-          <a:lstStyle/>
-          <a:p>
-            <a:pPr algn="l">
-              <a:lnSpc>
-                <a:spcPct val="110000"/>
-              </a:lnSpc>
-              <a:spcAft>
-                <a:spcPts val="0"/>
-              </a:spcAft>
-            </a:pPr>
-            <a:r>
-              <a:rPr sz="1000" b="1" i="0">
-                <a:solidFill>
-                  <a:srgbClr val="314359"/>
-                </a:solidFill>
-                <a:latin typeface="Times New Roman"/>
-              </a:rPr>
-              <a:t>Sven Thorén</a:t>
-            </a:r>
-          </a:p>
-        </p:txBody>
-      </p:sp>
-      <p:sp>
-        <p:nvSpPr>
-          <p:cNvPr id="23" name="TextBox 22"/>
-          <p:cNvSpPr txBox="1"/>
-          <p:nvPr/>
-        </p:nvSpPr>
-        <p:spPr>
-          <a:xfrm>
-            <a:off x="4169768" y="2848051"/>
-            <a:ext cx="1470391" cy="234086"/>
-          </a:xfrm>
-          <a:prstGeom prst="rect">
-            <a:avLst/>
-          </a:prstGeom>
-          <a:noFill/>
-        </p:spPr>
-        <p:txBody>
-          <a:bodyPr wrap="square" lIns="0" tIns="0" rIns="0" bIns="0" anchor="t">
-            <a:spAutoFit/>
-          </a:bodyPr>
-          <a:lstStyle/>
-          <a:p>
-            <a:pPr algn="l">
-              <a:lnSpc>
-                <a:spcPct val="110000"/>
-              </a:lnSpc>
-              <a:spcAft>
-                <a:spcPts val="0"/>
-              </a:spcAft>
-            </a:pPr>
-            <a:r>
-              <a:rPr sz="680" b="1" i="0">
-                <a:solidFill>
-                  <a:srgbClr val="314359"/>
-                </a:solidFill>
-                <a:latin typeface="Arial"/>
-              </a:rPr>
-              <a:t>PM &amp; PARTNER</a:t>
-            </a:r>
-          </a:p>
-        </p:txBody>
-      </p:sp>
-      <p:sp>
-        <p:nvSpPr>
           <p:cNvPr id="24" name="TextBox 23"/>
-          <p:cNvSpPr txBox="1"/>
-          <p:nvPr/>
-        </p:nvSpPr>
-        <p:spPr>
-          <a:xfrm>
-            <a:off x="4169768" y="3101644"/>
-            <a:ext cx="1455761" cy="682752"/>
-          </a:xfrm>
-          <a:prstGeom prst="rect">
-            <a:avLst/>
-          </a:prstGeom>
-          <a:noFill/>
-        </p:spPr>
-        <p:txBody>
-          <a:bodyPr wrap="square" lIns="0" tIns="0" rIns="0" bIns="0" anchor="t">
-            <a:spAutoFit/>
-          </a:bodyPr>
-          <a:lstStyle/>
-          <a:p>
-            <a:pPr algn="l">
-              <a:lnSpc>
-                <a:spcPct val="110000"/>
-              </a:lnSpc>
-              <a:spcAft>
-                <a:spcPts val="0"/>
-              </a:spcAft>
-            </a:pPr>
-            <a:r>
-              <a:rPr sz="720" b="0" i="0">
-                <a:solidFill>
-                  <a:srgbClr val="0E1620"/>
-                </a:solidFill>
-                <a:latin typeface="Arial"/>
-              </a:rPr>
-              <a:t>Ex-PM at Adrigo, Catella, Pan Capital and Nordea.</a:t>
-            </a:r>
-          </a:p>
-        </p:txBody>
-      </p:sp>
-      <p:sp>
-        <p:nvSpPr>
-          <p:cNvPr id="25" name="Rectangle 24"/>
-          <p:cNvSpPr/>
-          <p:nvPr/>
-        </p:nvSpPr>
-        <p:spPr>
-          <a:xfrm>
-            <a:off x="5815729" y="2438400"/>
-            <a:ext cx="1704484" cy="1463040"/>
-          </a:xfrm>
-          <a:prstGeom prst="rect">
-            <a:avLst/>
-          </a:prstGeom>
-          <a:solidFill>
-            <a:srgbClr val="F6F7F9"/>
-          </a:solidFill>
-          <a:ln>
-            <a:noFill/>
-          </a:ln>
-          <a:effectLst/>
-        </p:spPr>
-        <p:style>
-          <a:lnRef idx="1">
-            <a:schemeClr val="accent1"/>
-          </a:lnRef>
-          <a:fillRef idx="3">
-            <a:schemeClr val="accent1"/>
-          </a:fillRef>
-          <a:effectRef idx="2">
-            <a:schemeClr val="accent1"/>
-          </a:effectRef>
-          <a:fontRef idx="minor">
-            <a:schemeClr val="lt1"/>
-          </a:fontRef>
-        </p:style>
-        <p:txBody>
-          <a:bodyPr rtlCol="0" anchor="ctr"/>
-          <a:lstStyle/>
-          <a:p>
-            <a:pPr algn="ctr"/>
-            <a:endParaRPr/>
-          </a:p>
-        </p:txBody>
-      </p:sp>
-      <p:sp>
-        <p:nvSpPr>
-          <p:cNvPr id="26" name="Rectangle 25"/>
-          <p:cNvSpPr/>
-          <p:nvPr/>
-        </p:nvSpPr>
-        <p:spPr>
-          <a:xfrm>
-            <a:off x="5815729" y="2438400"/>
-            <a:ext cx="43892" cy="1463040"/>
-          </a:xfrm>
-          <a:prstGeom prst="rect">
-            <a:avLst/>
-          </a:prstGeom>
-          <a:solidFill>
-            <a:srgbClr val="152130"/>
-          </a:solidFill>
-          <a:ln>
-            <a:noFill/>
-          </a:ln>
-          <a:effectLst/>
-        </p:spPr>
-        <p:style>
-          <a:lnRef idx="1">
-            <a:schemeClr val="accent1"/>
-          </a:lnRef>
-          <a:fillRef idx="3">
-            <a:schemeClr val="accent1"/>
-          </a:fillRef>
-          <a:effectRef idx="2">
-            <a:schemeClr val="accent1"/>
-          </a:effectRef>
-          <a:fontRef idx="minor">
-            <a:schemeClr val="lt1"/>
-          </a:fontRef>
-        </p:style>
-        <p:txBody>
-          <a:bodyPr rtlCol="0" anchor="ctr"/>
-          <a:lstStyle/>
-          <a:p>
-            <a:pPr algn="ctr"/>
-            <a:endParaRPr/>
-          </a:p>
-        </p:txBody>
-      </p:sp>
-      <p:sp>
-        <p:nvSpPr>
-          <p:cNvPr id="27" name="TextBox 26"/>
-          <p:cNvSpPr txBox="1"/>
-          <p:nvPr/>
-        </p:nvSpPr>
-        <p:spPr>
-          <a:xfrm>
-            <a:off x="5962037" y="2565196"/>
-            <a:ext cx="1470391" cy="292608"/>
-          </a:xfrm>
-          <a:prstGeom prst="rect">
-            <a:avLst/>
-          </a:prstGeom>
-          <a:noFill/>
-        </p:spPr>
-        <p:txBody>
-          <a:bodyPr wrap="square" lIns="0" tIns="0" rIns="0" bIns="0" anchor="t">
-            <a:spAutoFit/>
-          </a:bodyPr>
-          <a:lstStyle/>
-          <a:p>
-            <a:pPr algn="l">
-              <a:lnSpc>
-                <a:spcPct val="110000"/>
-              </a:lnSpc>
-              <a:spcAft>
-                <a:spcPts val="0"/>
-              </a:spcAft>
-            </a:pPr>
-            <a:r>
-              <a:rPr sz="1000" b="1" i="0">
-                <a:solidFill>
-                  <a:srgbClr val="314359"/>
-                </a:solidFill>
-                <a:latin typeface="Times New Roman"/>
-              </a:rPr>
-              <a:t>Anders Elsell</a:t>
-            </a:r>
-          </a:p>
-        </p:txBody>
-      </p:sp>
-      <p:sp>
-        <p:nvSpPr>
-          <p:cNvPr id="28" name="TextBox 27"/>
-          <p:cNvSpPr txBox="1"/>
-          <p:nvPr/>
-        </p:nvSpPr>
-        <p:spPr>
-          <a:xfrm>
-            <a:off x="5962037" y="2848051"/>
-            <a:ext cx="1470391" cy="234086"/>
-          </a:xfrm>
-          <a:prstGeom prst="rect">
-            <a:avLst/>
-          </a:prstGeom>
-          <a:noFill/>
-        </p:spPr>
-        <p:txBody>
-          <a:bodyPr wrap="square" lIns="0" tIns="0" rIns="0" bIns="0" anchor="t">
-            <a:spAutoFit/>
-          </a:bodyPr>
-          <a:lstStyle/>
-          <a:p>
-            <a:pPr algn="l">
-              <a:lnSpc>
-                <a:spcPct val="110000"/>
-              </a:lnSpc>
-              <a:spcAft>
-                <a:spcPts val="0"/>
-              </a:spcAft>
-            </a:pPr>
-            <a:r>
-              <a:rPr sz="680" b="1" i="0">
-                <a:solidFill>
-                  <a:srgbClr val="314359"/>
-                </a:solidFill>
-                <a:latin typeface="Arial"/>
-              </a:rPr>
-              <a:t>SENIOR PM</a:t>
-            </a:r>
-          </a:p>
-        </p:txBody>
-      </p:sp>
-      <p:sp>
-        <p:nvSpPr>
-          <p:cNvPr id="29" name="TextBox 28"/>
-          <p:cNvSpPr txBox="1"/>
-          <p:nvPr/>
-        </p:nvSpPr>
-        <p:spPr>
-          <a:xfrm>
-            <a:off x="5962037" y="3101644"/>
-            <a:ext cx="1455761" cy="682752"/>
-          </a:xfrm>
-          <a:prstGeom prst="rect">
-            <a:avLst/>
-          </a:prstGeom>
-          <a:noFill/>
-        </p:spPr>
-        <p:txBody>
-          <a:bodyPr wrap="square" lIns="0" tIns="0" rIns="0" bIns="0" anchor="t">
-            <a:spAutoFit/>
-          </a:bodyPr>
-          <a:lstStyle/>
-          <a:p>
-            <a:pPr algn="l">
-              <a:lnSpc>
-                <a:spcPct val="110000"/>
-              </a:lnSpc>
-              <a:spcAft>
-                <a:spcPts val="0"/>
-              </a:spcAft>
-            </a:pPr>
-            <a:r>
-              <a:rPr sz="720" b="0" i="0">
-                <a:solidFill>
-                  <a:srgbClr val="0E1620"/>
-                </a:solidFill>
-                <a:latin typeface="Arial"/>
-              </a:rPr>
-              <a:t>On the team since 1996; ex-CEO/CIO of HQ Fonder; Carnegie.</a:t>
-            </a:r>
-          </a:p>
-        </p:txBody>
-      </p:sp>
-      <p:sp>
-        <p:nvSpPr>
-          <p:cNvPr id="30" name="Rectangle 29"/>
-          <p:cNvSpPr/>
-          <p:nvPr/>
-        </p:nvSpPr>
-        <p:spPr>
-          <a:xfrm>
-            <a:off x="7607998" y="2438400"/>
-            <a:ext cx="1704484" cy="1463040"/>
-          </a:xfrm>
-          <a:prstGeom prst="rect">
-            <a:avLst/>
-          </a:prstGeom>
-          <a:solidFill>
-            <a:srgbClr val="F6F7F9"/>
-          </a:solidFill>
-          <a:ln>
-            <a:noFill/>
-          </a:ln>
-          <a:effectLst/>
-        </p:spPr>
-        <p:style>
-          <a:lnRef idx="1">
-            <a:schemeClr val="accent1"/>
-          </a:lnRef>
-          <a:fillRef idx="3">
-            <a:schemeClr val="accent1"/>
-          </a:fillRef>
-          <a:effectRef idx="2">
-            <a:schemeClr val="accent1"/>
-          </a:effectRef>
-          <a:fontRef idx="minor">
-            <a:schemeClr val="lt1"/>
-          </a:fontRef>
-        </p:style>
-        <p:txBody>
-          <a:bodyPr rtlCol="0" anchor="ctr"/>
-          <a:lstStyle/>
-          <a:p>
-            <a:pPr algn="ctr"/>
-            <a:endParaRPr/>
-          </a:p>
-        </p:txBody>
-      </p:sp>
-      <p:sp>
-        <p:nvSpPr>
-          <p:cNvPr id="31" name="Rectangle 30"/>
-          <p:cNvSpPr/>
-          <p:nvPr/>
-        </p:nvSpPr>
-        <p:spPr>
-          <a:xfrm>
-            <a:off x="7607998" y="2438400"/>
-            <a:ext cx="43892" cy="1463040"/>
-          </a:xfrm>
-          <a:prstGeom prst="rect">
-            <a:avLst/>
-          </a:prstGeom>
-          <a:solidFill>
-            <a:srgbClr val="152130"/>
-          </a:solidFill>
-          <a:ln>
-            <a:noFill/>
-          </a:ln>
-          <a:effectLst/>
-        </p:spPr>
-        <p:style>
-          <a:lnRef idx="1">
-            <a:schemeClr val="accent1"/>
-          </a:lnRef>
-          <a:fillRef idx="3">
-            <a:schemeClr val="accent1"/>
-          </a:fillRef>
-          <a:effectRef idx="2">
-            <a:schemeClr val="accent1"/>
-          </a:effectRef>
-          <a:fontRef idx="minor">
-            <a:schemeClr val="lt1"/>
-          </a:fontRef>
-        </p:style>
-        <p:txBody>
-          <a:bodyPr rtlCol="0" anchor="ctr"/>
-          <a:lstStyle/>
-          <a:p>
-            <a:pPr algn="ctr"/>
-            <a:endParaRPr/>
-          </a:p>
-        </p:txBody>
-      </p:sp>
-      <p:sp>
-        <p:nvSpPr>
-          <p:cNvPr id="32" name="TextBox 31"/>
-          <p:cNvSpPr txBox="1"/>
-          <p:nvPr/>
-        </p:nvSpPr>
-        <p:spPr>
-          <a:xfrm>
-            <a:off x="7754305" y="2565196"/>
-            <a:ext cx="1470391" cy="292608"/>
-          </a:xfrm>
-          <a:prstGeom prst="rect">
-            <a:avLst/>
-          </a:prstGeom>
-          <a:noFill/>
-        </p:spPr>
-        <p:txBody>
-          <a:bodyPr wrap="square" lIns="0" tIns="0" rIns="0" bIns="0" anchor="t">
-            <a:spAutoFit/>
-          </a:bodyPr>
-          <a:lstStyle/>
-          <a:p>
-            <a:pPr algn="l">
-              <a:lnSpc>
-                <a:spcPct val="110000"/>
-              </a:lnSpc>
-              <a:spcAft>
-                <a:spcPts val="0"/>
-              </a:spcAft>
-            </a:pPr>
-            <a:r>
-              <a:rPr sz="1000" b="1" i="0">
-                <a:solidFill>
-                  <a:srgbClr val="314359"/>
-                </a:solidFill>
-                <a:latin typeface="Times New Roman"/>
-              </a:rPr>
-              <a:t>Daniel Nyhrén</a:t>
-            </a:r>
-          </a:p>
-        </p:txBody>
-      </p:sp>
-      <p:sp>
-        <p:nvSpPr>
-          <p:cNvPr id="33" name="TextBox 32"/>
-          <p:cNvSpPr txBox="1"/>
-          <p:nvPr/>
-        </p:nvSpPr>
-        <p:spPr>
-          <a:xfrm>
-            <a:off x="7754305" y="2848051"/>
-            <a:ext cx="1470391" cy="234086"/>
-          </a:xfrm>
-          <a:prstGeom prst="rect">
-            <a:avLst/>
-          </a:prstGeom>
-          <a:noFill/>
-        </p:spPr>
-        <p:txBody>
-          <a:bodyPr wrap="square" lIns="0" tIns="0" rIns="0" bIns="0" anchor="t">
-            <a:spAutoFit/>
-          </a:bodyPr>
-          <a:lstStyle/>
-          <a:p>
-            <a:pPr algn="l">
-              <a:lnSpc>
-                <a:spcPct val="110000"/>
-              </a:lnSpc>
-              <a:spcAft>
-                <a:spcPts val="0"/>
-              </a:spcAft>
-            </a:pPr>
-            <a:r>
-              <a:rPr sz="680" b="1" i="0">
-                <a:solidFill>
-                  <a:srgbClr val="314359"/>
-                </a:solidFill>
-                <a:latin typeface="Arial"/>
-              </a:rPr>
-              <a:t>PARTNER</a:t>
-            </a:r>
-          </a:p>
-        </p:txBody>
-      </p:sp>
-      <p:sp>
-        <p:nvSpPr>
-          <p:cNvPr id="34" name="TextBox 33"/>
-          <p:cNvSpPr txBox="1"/>
-          <p:nvPr/>
-        </p:nvSpPr>
-        <p:spPr>
-          <a:xfrm>
-            <a:off x="7754305" y="3101644"/>
-            <a:ext cx="1455761" cy="682752"/>
-          </a:xfrm>
-          <a:prstGeom prst="rect">
-            <a:avLst/>
-          </a:prstGeom>
-          <a:noFill/>
-        </p:spPr>
-        <p:txBody>
-          <a:bodyPr wrap="square" lIns="0" tIns="0" rIns="0" bIns="0" anchor="t">
-            <a:spAutoFit/>
-          </a:bodyPr>
-          <a:lstStyle/>
-          <a:p>
-            <a:pPr algn="l">
-              <a:lnSpc>
-                <a:spcPct val="110000"/>
-              </a:lnSpc>
-              <a:spcAft>
-                <a:spcPts val="0"/>
-              </a:spcAft>
-            </a:pPr>
-            <a:r>
-              <a:rPr sz="720" b="0" i="0">
-                <a:solidFill>
-                  <a:srgbClr val="0E1620"/>
-                </a:solidFill>
-                <a:latin typeface="Arial"/>
-              </a:rPr>
-              <a:t>On the team since 2006; ex-CFO of Global Batterier.</a:t>
-            </a:r>
-          </a:p>
-        </p:txBody>
-      </p:sp>
-      <p:sp>
-        <p:nvSpPr>
-          <p:cNvPr id="35" name="TextBox 34"/>
-          <p:cNvSpPr txBox="1"/>
-          <p:nvPr/>
-        </p:nvSpPr>
-        <p:spPr>
-          <a:xfrm>
-            <a:off x="438922" y="4096512"/>
-            <a:ext cx="6583844" cy="292608"/>
-          </a:xfrm>
-          <a:prstGeom prst="rect">
-            <a:avLst/>
-          </a:prstGeom>
-          <a:noFill/>
-        </p:spPr>
-        <p:txBody>
-          <a:bodyPr wrap="square" lIns="0" tIns="0" rIns="0" bIns="0" anchor="t">
-            <a:spAutoFit/>
-          </a:bodyPr>
-          <a:lstStyle/>
-          <a:p>
-            <a:pPr algn="l">
-              <a:lnSpc>
-                <a:spcPct val="110000"/>
-              </a:lnSpc>
-              <a:spcAft>
-                <a:spcPts val="0"/>
-              </a:spcAft>
-            </a:pPr>
-            <a:r>
-              <a:rPr sz="880" b="1" i="0">
-                <a:solidFill>
-                  <a:srgbClr val="314359"/>
-                </a:solidFill>
-                <a:latin typeface="Arial"/>
-              </a:rPr>
-              <a:t>OPERATIONS, FINANCE &amp; CONTROL — INDEPENDENT OF THE INVESTMENT TEAM</a:t>
-            </a:r>
-          </a:p>
-        </p:txBody>
-      </p:sp>
-      <p:sp>
-        <p:nvSpPr>
-          <p:cNvPr id="36" name="Rectangle 35"/>
-          <p:cNvSpPr/>
-          <p:nvPr/>
-        </p:nvSpPr>
-        <p:spPr>
-          <a:xfrm>
-            <a:off x="438922" y="4408626"/>
-            <a:ext cx="2165353" cy="1414272"/>
-          </a:xfrm>
-          <a:prstGeom prst="rect">
-            <a:avLst/>
-          </a:prstGeom>
-          <a:solidFill>
-            <a:srgbClr val="F6F7F9"/>
-          </a:solidFill>
-          <a:ln>
-            <a:noFill/>
-          </a:ln>
-          <a:effectLst/>
-        </p:spPr>
-        <p:style>
-          <a:lnRef idx="1">
-            <a:schemeClr val="accent1"/>
-          </a:lnRef>
-          <a:fillRef idx="3">
-            <a:schemeClr val="accent1"/>
-          </a:fillRef>
-          <a:effectRef idx="2">
-            <a:schemeClr val="accent1"/>
-          </a:effectRef>
-          <a:fontRef idx="minor">
-            <a:schemeClr val="lt1"/>
-          </a:fontRef>
-        </p:style>
-        <p:txBody>
-          <a:bodyPr rtlCol="0" anchor="ctr"/>
-          <a:lstStyle/>
-          <a:p>
-            <a:pPr algn="ctr"/>
-            <a:endParaRPr/>
-          </a:p>
-        </p:txBody>
-      </p:sp>
-      <p:sp>
-        <p:nvSpPr>
-          <p:cNvPr id="37" name="Rectangle 36"/>
-          <p:cNvSpPr/>
-          <p:nvPr/>
-        </p:nvSpPr>
-        <p:spPr>
-          <a:xfrm>
-            <a:off x="438922" y="4408626"/>
-            <a:ext cx="43892" cy="1414272"/>
-          </a:xfrm>
-          <a:prstGeom prst="rect">
-            <a:avLst/>
-          </a:prstGeom>
-          <a:solidFill>
-            <a:srgbClr val="152130"/>
-          </a:solidFill>
-          <a:ln>
-            <a:noFill/>
-          </a:ln>
-          <a:effectLst/>
-        </p:spPr>
-        <p:style>
-          <a:lnRef idx="1">
-            <a:schemeClr val="accent1"/>
-          </a:lnRef>
-          <a:fillRef idx="3">
-            <a:schemeClr val="accent1"/>
-          </a:fillRef>
-          <a:effectRef idx="2">
-            <a:schemeClr val="accent1"/>
-          </a:effectRef>
-          <a:fontRef idx="minor">
-            <a:schemeClr val="lt1"/>
-          </a:fontRef>
-        </p:style>
-        <p:txBody>
-          <a:bodyPr rtlCol="0" anchor="ctr"/>
-          <a:lstStyle/>
-          <a:p>
-            <a:pPr algn="ctr"/>
-            <a:endParaRPr/>
-          </a:p>
-        </p:txBody>
-      </p:sp>
-      <p:sp>
-        <p:nvSpPr>
-          <p:cNvPr id="38" name="TextBox 37"/>
-          <p:cNvSpPr txBox="1"/>
-          <p:nvPr/>
-        </p:nvSpPr>
-        <p:spPr>
-          <a:xfrm>
-            <a:off x="585230" y="4535422"/>
-            <a:ext cx="1931261" cy="292608"/>
-          </a:xfrm>
-          <a:prstGeom prst="rect">
-            <a:avLst/>
-          </a:prstGeom>
-          <a:noFill/>
-        </p:spPr>
-        <p:txBody>
-          <a:bodyPr wrap="square" lIns="0" tIns="0" rIns="0" bIns="0" anchor="t">
-            <a:spAutoFit/>
-          </a:bodyPr>
-          <a:lstStyle/>
-          <a:p>
-            <a:pPr algn="l">
-              <a:lnSpc>
-                <a:spcPct val="110000"/>
-              </a:lnSpc>
-              <a:spcAft>
-                <a:spcPts val="0"/>
-              </a:spcAft>
-            </a:pPr>
-            <a:r>
-              <a:rPr sz="1000" b="1" i="0">
-                <a:solidFill>
-                  <a:srgbClr val="314359"/>
-                </a:solidFill>
-                <a:latin typeface="Times New Roman"/>
-              </a:rPr>
-              <a:t>Malin Norrman</a:t>
-            </a:r>
-          </a:p>
-        </p:txBody>
-      </p:sp>
-      <p:sp>
-        <p:nvSpPr>
-          <p:cNvPr id="39" name="TextBox 38"/>
-          <p:cNvSpPr txBox="1"/>
-          <p:nvPr/>
-        </p:nvSpPr>
-        <p:spPr>
-          <a:xfrm>
-            <a:off x="585230" y="4818277"/>
-            <a:ext cx="1931261" cy="234086"/>
-          </a:xfrm>
-          <a:prstGeom prst="rect">
-            <a:avLst/>
-          </a:prstGeom>
-          <a:noFill/>
-        </p:spPr>
-        <p:txBody>
-          <a:bodyPr wrap="square" lIns="0" tIns="0" rIns="0" bIns="0" anchor="t">
-            <a:spAutoFit/>
-          </a:bodyPr>
-          <a:lstStyle/>
-          <a:p>
-            <a:pPr algn="l">
-              <a:lnSpc>
-                <a:spcPct val="110000"/>
-              </a:lnSpc>
-              <a:spcAft>
-                <a:spcPts val="0"/>
-              </a:spcAft>
-            </a:pPr>
-            <a:r>
-              <a:rPr sz="680" b="1" i="0">
-                <a:solidFill>
-                  <a:srgbClr val="314359"/>
-                </a:solidFill>
-                <a:latin typeface="Arial"/>
-              </a:rPr>
-              <a:t>CFO</a:t>
-            </a:r>
-          </a:p>
-        </p:txBody>
-      </p:sp>
-      <p:sp>
-        <p:nvSpPr>
-          <p:cNvPr id="40" name="TextBox 39"/>
-          <p:cNvSpPr txBox="1"/>
-          <p:nvPr/>
-        </p:nvSpPr>
-        <p:spPr>
-          <a:xfrm>
-            <a:off x="585230" y="5071870"/>
-            <a:ext cx="1916630" cy="682752"/>
-          </a:xfrm>
-          <a:prstGeom prst="rect">
-            <a:avLst/>
-          </a:prstGeom>
-          <a:noFill/>
-        </p:spPr>
-        <p:txBody>
-          <a:bodyPr wrap="square" lIns="0" tIns="0" rIns="0" bIns="0" anchor="t">
-            <a:spAutoFit/>
-          </a:bodyPr>
-          <a:lstStyle/>
-          <a:p>
-            <a:pPr algn="l">
-              <a:lnSpc>
-                <a:spcPct val="110000"/>
-              </a:lnSpc>
-              <a:spcAft>
-                <a:spcPts val="0"/>
-              </a:spcAft>
-            </a:pPr>
-            <a:r>
-              <a:rPr sz="720" b="0" i="0">
-                <a:solidFill>
-                  <a:srgbClr val="0E1620"/>
-                </a:solidFill>
-                <a:latin typeface="Arial"/>
-              </a:rPr>
-              <a:t>Ex-COO/CFO of Captor Fund Mgmt; risk manager at Carnegie and AB Industrivärden.</a:t>
-            </a:r>
-          </a:p>
-        </p:txBody>
-      </p:sp>
-      <p:sp>
-        <p:nvSpPr>
-          <p:cNvPr id="41" name="Rectangle 40"/>
-          <p:cNvSpPr/>
-          <p:nvPr/>
-        </p:nvSpPr>
-        <p:spPr>
-          <a:xfrm>
-            <a:off x="2699376" y="4408626"/>
-            <a:ext cx="2165353" cy="1414272"/>
-          </a:xfrm>
-          <a:prstGeom prst="rect">
-            <a:avLst/>
-          </a:prstGeom>
-          <a:solidFill>
-            <a:srgbClr val="F6F7F9"/>
-          </a:solidFill>
-          <a:ln>
-            <a:noFill/>
-          </a:ln>
-          <a:effectLst/>
-        </p:spPr>
-        <p:style>
-          <a:lnRef idx="1">
-            <a:schemeClr val="accent1"/>
-          </a:lnRef>
-          <a:fillRef idx="3">
-            <a:schemeClr val="accent1"/>
-          </a:fillRef>
-          <a:effectRef idx="2">
-            <a:schemeClr val="accent1"/>
-          </a:effectRef>
-          <a:fontRef idx="minor">
-            <a:schemeClr val="lt1"/>
-          </a:fontRef>
-        </p:style>
-        <p:txBody>
-          <a:bodyPr rtlCol="0" anchor="ctr"/>
-          <a:lstStyle/>
-          <a:p>
-            <a:pPr algn="ctr"/>
-            <a:endParaRPr/>
-          </a:p>
-        </p:txBody>
-      </p:sp>
-      <p:sp>
-        <p:nvSpPr>
-          <p:cNvPr id="42" name="Rectangle 41"/>
-          <p:cNvSpPr/>
-          <p:nvPr/>
-        </p:nvSpPr>
-        <p:spPr>
-          <a:xfrm>
-            <a:off x="2699376" y="4408626"/>
-            <a:ext cx="43892" cy="1414272"/>
-          </a:xfrm>
-          <a:prstGeom prst="rect">
-            <a:avLst/>
-          </a:prstGeom>
-          <a:solidFill>
-            <a:srgbClr val="152130"/>
-          </a:solidFill>
-          <a:ln>
-            <a:noFill/>
-          </a:ln>
-          <a:effectLst/>
-        </p:spPr>
-        <p:style>
-          <a:lnRef idx="1">
-            <a:schemeClr val="accent1"/>
-          </a:lnRef>
-          <a:fillRef idx="3">
-            <a:schemeClr val="accent1"/>
-          </a:fillRef>
-          <a:effectRef idx="2">
-            <a:schemeClr val="accent1"/>
-          </a:effectRef>
-          <a:fontRef idx="minor">
-            <a:schemeClr val="lt1"/>
-          </a:fontRef>
-        </p:style>
-        <p:txBody>
-          <a:bodyPr rtlCol="0" anchor="ctr"/>
-          <a:lstStyle/>
-          <a:p>
-            <a:pPr algn="ctr"/>
-            <a:endParaRPr/>
-          </a:p>
-        </p:txBody>
-      </p:sp>
-      <p:sp>
-        <p:nvSpPr>
-          <p:cNvPr id="43" name="TextBox 42"/>
-          <p:cNvSpPr txBox="1"/>
-          <p:nvPr/>
-        </p:nvSpPr>
-        <p:spPr>
-          <a:xfrm>
-            <a:off x="2845683" y="4535422"/>
-            <a:ext cx="1931261" cy="292608"/>
-          </a:xfrm>
-          <a:prstGeom prst="rect">
-            <a:avLst/>
-          </a:prstGeom>
-          <a:noFill/>
-        </p:spPr>
-        <p:txBody>
-          <a:bodyPr wrap="square" lIns="0" tIns="0" rIns="0" bIns="0" anchor="t">
-            <a:spAutoFit/>
-          </a:bodyPr>
-          <a:lstStyle/>
-          <a:p>
-            <a:pPr algn="l">
-              <a:lnSpc>
-                <a:spcPct val="110000"/>
-              </a:lnSpc>
-              <a:spcAft>
-                <a:spcPts val="0"/>
-              </a:spcAft>
-            </a:pPr>
-            <a:r>
-              <a:rPr sz="1000" b="1" i="0">
-                <a:solidFill>
-                  <a:srgbClr val="314359"/>
-                </a:solidFill>
-                <a:latin typeface="Times New Roman"/>
-              </a:rPr>
-              <a:t>Grant Loon</a:t>
-            </a:r>
-          </a:p>
-        </p:txBody>
-      </p:sp>
-      <p:sp>
-        <p:nvSpPr>
-          <p:cNvPr id="44" name="TextBox 43"/>
-          <p:cNvSpPr txBox="1"/>
-          <p:nvPr/>
-        </p:nvSpPr>
-        <p:spPr>
-          <a:xfrm>
-            <a:off x="2845683" y="4818277"/>
-            <a:ext cx="1931261" cy="234086"/>
-          </a:xfrm>
-          <a:prstGeom prst="rect">
-            <a:avLst/>
-          </a:prstGeom>
-          <a:noFill/>
-        </p:spPr>
-        <p:txBody>
-          <a:bodyPr wrap="square" lIns="0" tIns="0" rIns="0" bIns="0" anchor="t">
-            <a:spAutoFit/>
-          </a:bodyPr>
-          <a:lstStyle/>
-          <a:p>
-            <a:pPr algn="l">
-              <a:lnSpc>
-                <a:spcPct val="110000"/>
-              </a:lnSpc>
-              <a:spcAft>
-                <a:spcPts val="0"/>
-              </a:spcAft>
-            </a:pPr>
-            <a:r>
-              <a:rPr sz="680" b="1" i="0">
-                <a:solidFill>
-                  <a:srgbClr val="314359"/>
-                </a:solidFill>
-                <a:latin typeface="Arial"/>
-              </a:rPr>
-              <a:t>HEAD OF FUND OPERATIONS</a:t>
-            </a:r>
-          </a:p>
-        </p:txBody>
-      </p:sp>
-      <p:sp>
-        <p:nvSpPr>
-          <p:cNvPr id="45" name="TextBox 44"/>
-          <p:cNvSpPr txBox="1"/>
-          <p:nvPr/>
-        </p:nvSpPr>
-        <p:spPr>
-          <a:xfrm>
-            <a:off x="2845683" y="5071870"/>
-            <a:ext cx="1916630" cy="682752"/>
-          </a:xfrm>
-          <a:prstGeom prst="rect">
-            <a:avLst/>
-          </a:prstGeom>
-          <a:noFill/>
-        </p:spPr>
-        <p:txBody>
-          <a:bodyPr wrap="square" lIns="0" tIns="0" rIns="0" bIns="0" anchor="t">
-            <a:spAutoFit/>
-          </a:bodyPr>
-          <a:lstStyle/>
-          <a:p>
-            <a:pPr algn="l">
-              <a:lnSpc>
-                <a:spcPct val="110000"/>
-              </a:lnSpc>
-              <a:spcAft>
-                <a:spcPts val="0"/>
-              </a:spcAft>
-            </a:pPr>
-            <a:r>
-              <a:rPr sz="720" b="0" i="0">
-                <a:solidFill>
-                  <a:srgbClr val="0E1620"/>
-                </a:solidFill>
-                <a:latin typeface="Arial"/>
-              </a:rPr>
-              <a:t>Ex-COO of Madrague Capital and Port Capital; Soros, Commerzbank, Morgan Stanley.</a:t>
-            </a:r>
-          </a:p>
-        </p:txBody>
-      </p:sp>
-      <p:sp>
-        <p:nvSpPr>
-          <p:cNvPr id="46" name="Rectangle 45"/>
-          <p:cNvSpPr/>
-          <p:nvPr/>
-        </p:nvSpPr>
-        <p:spPr>
-          <a:xfrm>
-            <a:off x="4959829" y="4408626"/>
-            <a:ext cx="2165353" cy="1414272"/>
-          </a:xfrm>
-          <a:prstGeom prst="rect">
-            <a:avLst/>
-          </a:prstGeom>
-          <a:solidFill>
-            <a:srgbClr val="F6F7F9"/>
-          </a:solidFill>
-          <a:ln>
-            <a:noFill/>
-          </a:ln>
-          <a:effectLst/>
-        </p:spPr>
-        <p:style>
-          <a:lnRef idx="1">
-            <a:schemeClr val="accent1"/>
-          </a:lnRef>
-          <a:fillRef idx="3">
-            <a:schemeClr val="accent1"/>
-          </a:fillRef>
-          <a:effectRef idx="2">
-            <a:schemeClr val="accent1"/>
-          </a:effectRef>
-          <a:fontRef idx="minor">
-            <a:schemeClr val="lt1"/>
-          </a:fontRef>
-        </p:style>
-        <p:txBody>
-          <a:bodyPr rtlCol="0" anchor="ctr"/>
-          <a:lstStyle/>
-          <a:p>
-            <a:pPr algn="ctr"/>
-            <a:endParaRPr/>
-          </a:p>
-        </p:txBody>
-      </p:sp>
-      <p:sp>
-        <p:nvSpPr>
-          <p:cNvPr id="47" name="Rectangle 46"/>
-          <p:cNvSpPr/>
-          <p:nvPr/>
-        </p:nvSpPr>
-        <p:spPr>
-          <a:xfrm>
-            <a:off x="4959829" y="4408626"/>
-            <a:ext cx="43892" cy="1414272"/>
-          </a:xfrm>
-          <a:prstGeom prst="rect">
-            <a:avLst/>
-          </a:prstGeom>
-          <a:solidFill>
-            <a:srgbClr val="152130"/>
-          </a:solidFill>
-          <a:ln>
-            <a:noFill/>
-          </a:ln>
-          <a:effectLst/>
-        </p:spPr>
-        <p:style>
-          <a:lnRef idx="1">
-            <a:schemeClr val="accent1"/>
-          </a:lnRef>
-          <a:fillRef idx="3">
-            <a:schemeClr val="accent1"/>
-          </a:fillRef>
-          <a:effectRef idx="2">
-            <a:schemeClr val="accent1"/>
-          </a:effectRef>
-          <a:fontRef idx="minor">
-            <a:schemeClr val="lt1"/>
-          </a:fontRef>
-        </p:style>
-        <p:txBody>
-          <a:bodyPr rtlCol="0" anchor="ctr"/>
-          <a:lstStyle/>
-          <a:p>
-            <a:pPr algn="ctr"/>
-            <a:endParaRPr/>
-          </a:p>
-        </p:txBody>
-      </p:sp>
-      <p:sp>
-        <p:nvSpPr>
-          <p:cNvPr id="48" name="TextBox 47"/>
-          <p:cNvSpPr txBox="1"/>
-          <p:nvPr/>
-        </p:nvSpPr>
-        <p:spPr>
-          <a:xfrm>
-            <a:off x="5106137" y="4535422"/>
-            <a:ext cx="1931261" cy="292608"/>
-          </a:xfrm>
-          <a:prstGeom prst="rect">
-            <a:avLst/>
-          </a:prstGeom>
-          <a:noFill/>
-        </p:spPr>
-        <p:txBody>
-          <a:bodyPr wrap="square" lIns="0" tIns="0" rIns="0" bIns="0" anchor="t">
-            <a:spAutoFit/>
-          </a:bodyPr>
-          <a:lstStyle/>
-          <a:p>
-            <a:pPr algn="l">
-              <a:lnSpc>
-                <a:spcPct val="110000"/>
-              </a:lnSpc>
-              <a:spcAft>
-                <a:spcPts val="0"/>
-              </a:spcAft>
-            </a:pPr>
-            <a:r>
-              <a:rPr sz="1000" b="1" i="0">
-                <a:solidFill>
-                  <a:srgbClr val="314359"/>
-                </a:solidFill>
-                <a:latin typeface="Times New Roman"/>
-              </a:rPr>
-              <a:t>Eva Andersson</a:t>
-            </a:r>
-          </a:p>
-        </p:txBody>
-      </p:sp>
-      <p:sp>
-        <p:nvSpPr>
-          <p:cNvPr id="49" name="TextBox 48"/>
-          <p:cNvSpPr txBox="1"/>
-          <p:nvPr/>
-        </p:nvSpPr>
-        <p:spPr>
-          <a:xfrm>
-            <a:off x="5106137" y="4818277"/>
-            <a:ext cx="1931261" cy="234086"/>
-          </a:xfrm>
-          <a:prstGeom prst="rect">
-            <a:avLst/>
-          </a:prstGeom>
-          <a:noFill/>
-        </p:spPr>
-        <p:txBody>
-          <a:bodyPr wrap="square" lIns="0" tIns="0" rIns="0" bIns="0" anchor="t">
-            <a:spAutoFit/>
-          </a:bodyPr>
-          <a:lstStyle/>
-          <a:p>
-            <a:pPr algn="l">
-              <a:lnSpc>
-                <a:spcPct val="110000"/>
-              </a:lnSpc>
-              <a:spcAft>
-                <a:spcPts val="0"/>
-              </a:spcAft>
-            </a:pPr>
-            <a:r>
-              <a:rPr sz="680" b="1" i="0">
-                <a:solidFill>
-                  <a:srgbClr val="314359"/>
-                </a:solidFill>
-                <a:latin typeface="Arial"/>
-              </a:rPr>
-              <a:t>FUND OPERATIONS</a:t>
-            </a:r>
-          </a:p>
-        </p:txBody>
-      </p:sp>
-      <p:sp>
-        <p:nvSpPr>
-          <p:cNvPr id="50" name="TextBox 49"/>
-          <p:cNvSpPr txBox="1"/>
-          <p:nvPr/>
-        </p:nvSpPr>
-        <p:spPr>
-          <a:xfrm>
-            <a:off x="5106137" y="5071870"/>
-            <a:ext cx="1916630" cy="682752"/>
-          </a:xfrm>
-          <a:prstGeom prst="rect">
-            <a:avLst/>
-          </a:prstGeom>
-          <a:noFill/>
-        </p:spPr>
-        <p:txBody>
-          <a:bodyPr wrap="square" lIns="0" tIns="0" rIns="0" bIns="0" anchor="t">
-            <a:spAutoFit/>
-          </a:bodyPr>
-          <a:lstStyle/>
-          <a:p>
-            <a:pPr algn="l">
-              <a:lnSpc>
-                <a:spcPct val="110000"/>
-              </a:lnSpc>
-              <a:spcAft>
-                <a:spcPts val="0"/>
-              </a:spcAft>
-            </a:pPr>
-            <a:r>
-              <a:rPr sz="720" b="0" i="0">
-                <a:solidFill>
-                  <a:srgbClr val="0E1620"/>
-                </a:solidFill>
-                <a:latin typeface="Arial"/>
-              </a:rPr>
-              <a:t>MBA, Business School London; sales-executive background.</a:t>
-            </a:r>
-          </a:p>
-        </p:txBody>
-      </p:sp>
-      <p:sp>
-        <p:nvSpPr>
-          <p:cNvPr id="51" name="Rectangle 50"/>
-          <p:cNvSpPr/>
-          <p:nvPr/>
-        </p:nvSpPr>
-        <p:spPr>
-          <a:xfrm>
-            <a:off x="7220283" y="4408626"/>
-            <a:ext cx="2165353" cy="1414272"/>
-          </a:xfrm>
-          <a:prstGeom prst="rect">
-            <a:avLst/>
-          </a:prstGeom>
-          <a:solidFill>
-            <a:srgbClr val="F6F7F9"/>
-          </a:solidFill>
-          <a:ln>
-            <a:noFill/>
-          </a:ln>
-          <a:effectLst/>
-        </p:spPr>
-        <p:style>
-          <a:lnRef idx="1">
-            <a:schemeClr val="accent1"/>
-          </a:lnRef>
-          <a:fillRef idx="3">
-            <a:schemeClr val="accent1"/>
-          </a:fillRef>
-          <a:effectRef idx="2">
-            <a:schemeClr val="accent1"/>
-          </a:effectRef>
-          <a:fontRef idx="minor">
-            <a:schemeClr val="lt1"/>
-          </a:fontRef>
-        </p:style>
-        <p:txBody>
-          <a:bodyPr rtlCol="0" anchor="ctr"/>
-          <a:lstStyle/>
-          <a:p>
-            <a:pPr algn="ctr"/>
-            <a:endParaRPr/>
-          </a:p>
-        </p:txBody>
-      </p:sp>
-      <p:sp>
-        <p:nvSpPr>
-          <p:cNvPr id="52" name="Rectangle 51"/>
-          <p:cNvSpPr/>
-          <p:nvPr/>
-        </p:nvSpPr>
-        <p:spPr>
-          <a:xfrm>
-            <a:off x="7220283" y="4408626"/>
-            <a:ext cx="43892" cy="1414272"/>
-          </a:xfrm>
-          <a:prstGeom prst="rect">
-            <a:avLst/>
-          </a:prstGeom>
-          <a:solidFill>
-            <a:srgbClr val="152130"/>
-          </a:solidFill>
-          <a:ln>
-            <a:noFill/>
-          </a:ln>
-          <a:effectLst/>
-        </p:spPr>
-        <p:style>
-          <a:lnRef idx="1">
-            <a:schemeClr val="accent1"/>
-          </a:lnRef>
-          <a:fillRef idx="3">
-            <a:schemeClr val="accent1"/>
-          </a:fillRef>
-          <a:effectRef idx="2">
-            <a:schemeClr val="accent1"/>
-          </a:effectRef>
-          <a:fontRef idx="minor">
-            <a:schemeClr val="lt1"/>
-          </a:fontRef>
-        </p:style>
-        <p:txBody>
-          <a:bodyPr rtlCol="0" anchor="ctr"/>
-          <a:lstStyle/>
-          <a:p>
-            <a:pPr algn="ctr"/>
-            <a:endParaRPr/>
-          </a:p>
-        </p:txBody>
-      </p:sp>
-      <p:sp>
-        <p:nvSpPr>
-          <p:cNvPr id="53" name="TextBox 52"/>
-          <p:cNvSpPr txBox="1"/>
-          <p:nvPr/>
-        </p:nvSpPr>
-        <p:spPr>
-          <a:xfrm>
-            <a:off x="7366590" y="4535422"/>
-            <a:ext cx="1931261" cy="292608"/>
-          </a:xfrm>
-          <a:prstGeom prst="rect">
-            <a:avLst/>
-          </a:prstGeom>
-          <a:noFill/>
-        </p:spPr>
-        <p:txBody>
-          <a:bodyPr wrap="square" lIns="0" tIns="0" rIns="0" bIns="0" anchor="t">
-            <a:spAutoFit/>
-          </a:bodyPr>
-          <a:lstStyle/>
-          <a:p>
-            <a:pPr algn="l">
-              <a:lnSpc>
-                <a:spcPct val="110000"/>
-              </a:lnSpc>
-              <a:spcAft>
-                <a:spcPts val="0"/>
-              </a:spcAft>
-            </a:pPr>
-            <a:r>
-              <a:rPr sz="1000" b="1" i="0">
-                <a:solidFill>
-                  <a:srgbClr val="314359"/>
-                </a:solidFill>
-                <a:latin typeface="Times New Roman"/>
-              </a:rPr>
-              <a:t>Zetong Liu</a:t>
-            </a:r>
-          </a:p>
-        </p:txBody>
-      </p:sp>
-      <p:sp>
-        <p:nvSpPr>
-          <p:cNvPr id="54" name="TextBox 53"/>
-          <p:cNvSpPr txBox="1"/>
-          <p:nvPr/>
-        </p:nvSpPr>
-        <p:spPr>
-          <a:xfrm>
-            <a:off x="7366590" y="4818277"/>
-            <a:ext cx="1931261" cy="234086"/>
-          </a:xfrm>
-          <a:prstGeom prst="rect">
-            <a:avLst/>
-          </a:prstGeom>
-          <a:noFill/>
-        </p:spPr>
-        <p:txBody>
-          <a:bodyPr wrap="square" lIns="0" tIns="0" rIns="0" bIns="0" anchor="t">
-            <a:spAutoFit/>
-          </a:bodyPr>
-          <a:lstStyle/>
-          <a:p>
-            <a:pPr algn="l">
-              <a:lnSpc>
-                <a:spcPct val="110000"/>
-              </a:lnSpc>
-              <a:spcAft>
-                <a:spcPts val="0"/>
-              </a:spcAft>
-            </a:pPr>
-            <a:r>
-              <a:rPr sz="680" b="1" i="0">
-                <a:solidFill>
-                  <a:srgbClr val="314359"/>
-                </a:solidFill>
-                <a:latin typeface="Arial"/>
-              </a:rPr>
-              <a:t>TECHNOLOGY</a:t>
-            </a:r>
-          </a:p>
-        </p:txBody>
-      </p:sp>
-      <p:sp>
-        <p:nvSpPr>
-          <p:cNvPr id="55" name="TextBox 54"/>
-          <p:cNvSpPr txBox="1"/>
-          <p:nvPr/>
-        </p:nvSpPr>
-        <p:spPr>
-          <a:xfrm>
-            <a:off x="7366590" y="5071870"/>
-            <a:ext cx="1916630" cy="682752"/>
-          </a:xfrm>
-          <a:prstGeom prst="rect">
-            <a:avLst/>
-          </a:prstGeom>
-          <a:noFill/>
-        </p:spPr>
-        <p:txBody>
-          <a:bodyPr wrap="square" lIns="0" tIns="0" rIns="0" bIns="0" anchor="t">
-            <a:spAutoFit/>
-          </a:bodyPr>
-          <a:lstStyle/>
-          <a:p>
-            <a:pPr algn="l">
-              <a:lnSpc>
-                <a:spcPct val="110000"/>
-              </a:lnSpc>
-              <a:spcAft>
-                <a:spcPts val="0"/>
-              </a:spcAft>
-            </a:pPr>
-            <a:r>
-              <a:rPr sz="720" b="0" i="0">
-                <a:solidFill>
-                  <a:srgbClr val="0E1620"/>
-                </a:solidFill>
-                <a:latin typeface="Arial"/>
-              </a:rPr>
-              <a:t>MSc applied &amp; computational mathematics, KTH; projects for the Swiss Finance Institute / EPFL.</a:t>
-            </a:r>
-          </a:p>
-        </p:txBody>
-      </p:sp>
-      <p:sp>
-        <p:nvSpPr>
-          <p:cNvPr id="56" name="Rectangle 55"/>
-          <p:cNvSpPr/>
-          <p:nvPr/>
-        </p:nvSpPr>
-        <p:spPr>
-          <a:xfrm>
-            <a:off x="438922" y="6164275"/>
-            <a:ext cx="8873559" cy="604723"/>
-          </a:xfrm>
-          <a:prstGeom prst="rect">
-            <a:avLst/>
-          </a:prstGeom>
-          <a:solidFill>
-            <a:srgbClr val="152130"/>
-          </a:solidFill>
-          <a:ln>
-            <a:noFill/>
-          </a:ln>
-          <a:effectLst/>
-        </p:spPr>
-        <p:style>
-          <a:lnRef idx="1">
-            <a:schemeClr val="accent1"/>
-          </a:lnRef>
-          <a:fillRef idx="3">
-            <a:schemeClr val="accent1"/>
-          </a:fillRef>
-          <a:effectRef idx="2">
-            <a:schemeClr val="accent1"/>
-          </a:effectRef>
-          <a:fontRef idx="minor">
-            <a:schemeClr val="lt1"/>
-          </a:fontRef>
-        </p:style>
-        <p:txBody>
-          <a:bodyPr rtlCol="0" anchor="ctr"/>
-          <a:lstStyle/>
-          <a:p>
-            <a:pPr algn="ctr"/>
-            <a:endParaRPr/>
-          </a:p>
-        </p:txBody>
-      </p:sp>
-      <p:sp>
-        <p:nvSpPr>
-          <p:cNvPr id="57" name="TextBox 56"/>
           <p:cNvSpPr txBox="1"/>
           <p:nvPr/>
         </p:nvSpPr>
@@ -33419,13 +34329,13 @@
               </a:spcAft>
             </a:pPr>
             <a:r>
-              <a:rPr sz="960" b="0" i="1">
+              <a:rPr sz="1040" b="0" i="1">
                 <a:solidFill>
                   <a:srgbClr val="FFFFFF"/>
                 </a:solidFill>
                 <a:latin typeface="Arial"/>
               </a:rPr>
-              <a:t>Segregation of duties protects investors: operations, valuation and risk sit apart from investment decisions — with SEB (custody), MUFG (administration) and KPMG (audit) independently verifying every NAV and fee.</a:t>
+              <a:t>Less coverage, fewer expert owners and lumpier earnings mean mid-caps are mispriced more often and by more — a deeper opportunity set of low-risk entry points for a disciplined engaged owner.</a:t>
             </a:r>
           </a:p>
         </p:txBody>

--- a/Athanase_Endowment_Pitch_22pp.pptx
+++ b/Athanase_Endowment_Pitch_22pp.pptx
@@ -957,12 +957,7 @@
           <a:lstStyle/>
           <a:p>
             <a:r>
-              <a:rPr sz="960">
-                <a:solidFill>
-                  <a:srgbClr val="556A83"/>
-                </a:solidFill>
-              </a:rPr>
-              <a:t>Figure 5.  Average monthly return (%)</a:t>
+              <a:t>Figure 5.  Growth of capital since 2006 (×)</a:t>
             </a:r>
           </a:p>
         </c:rich>
@@ -1035,35 +1030,23 @@
           </c:dLbls>
           <c:cat>
             <c:strRef>
-              <c:f>Sheet1!$A$2:$A$4</c:f>
+              <c:f>Sheet1!$A$2:$A$2</c:f>
               <c:strCache>
-                <c:ptCount val="3"/>
+                <c:ptCount val="1"/>
                 <c:pt idx="0">
-                  <c:v>All markets</c:v>
-                </c:pt>
-                <c:pt idx="1">
-                  <c:v>Up markets</c:v>
-                </c:pt>
-                <c:pt idx="2">
-                  <c:v>Down markets</c:v>
+                  <c:v>Since 2006</c:v>
                 </c:pt>
               </c:strCache>
             </c:strRef>
           </c:cat>
           <c:val>
             <c:numRef>
-              <c:f>Sheet1!$B$2:$B$4</c:f>
+              <c:f>Sheet1!$B$2:$B$2</c:f>
               <c:numCache>
                 <c:formatCode>General</c:formatCode>
-                <c:ptCount val="3"/>
+                <c:ptCount val="1"/>
                 <c:pt idx="0">
-                  <c:v>1.5</c:v>
-                </c:pt>
-                <c:pt idx="1">
-                  <c:v>1.2</c:v>
-                </c:pt>
-                <c:pt idx="2">
-                  <c:v>0.2</c:v>
+                  <c:v>18.0</c:v>
                 </c:pt>
               </c:numCache>
             </c:numRef>
@@ -1142,35 +1125,23 @@
           </c:dLbls>
           <c:cat>
             <c:strRef>
-              <c:f>Sheet1!$A$2:$A$4</c:f>
+              <c:f>Sheet1!$A$2:$A$2</c:f>
               <c:strCache>
-                <c:ptCount val="3"/>
+                <c:ptCount val="1"/>
                 <c:pt idx="0">
-                  <c:v>All markets</c:v>
-                </c:pt>
-                <c:pt idx="1">
-                  <c:v>Up markets</c:v>
-                </c:pt>
-                <c:pt idx="2">
-                  <c:v>Down markets</c:v>
+                  <c:v>Since 2006</c:v>
                 </c:pt>
               </c:strCache>
             </c:strRef>
           </c:cat>
           <c:val>
             <c:numRef>
-              <c:f>Sheet1!$C$2:$C$4</c:f>
+              <c:f>Sheet1!$C$2:$C$2</c:f>
               <c:numCache>
                 <c:formatCode>General</c:formatCode>
-                <c:ptCount val="3"/>
+                <c:ptCount val="1"/>
                 <c:pt idx="0">
-                  <c:v>0.6</c:v>
-                </c:pt>
-                <c:pt idx="1">
-                  <c:v>1.3</c:v>
-                </c:pt>
-                <c:pt idx="2">
-                  <c:v>-1.7</c:v>
+                  <c:v>3.2</c:v>
                 </c:pt>
               </c:numCache>
             </c:numRef>
@@ -1191,6 +1162,7 @@
           </c:extLst>
         </c:ser>
         <c:dLbls>
+          <c:numFmt formatCode="0.0&quot;×&quot;" sourceLinked="0"/>
           <c:dLblPos val="outEnd"/>
           <c:showLegendKey val="0"/>
           <c:showVal val="1"/>
@@ -23978,7 +23950,7 @@
                 </a:solidFill>
                 <a:latin typeface="Times New Roman"/>
               </a:rPr>
-              <a:t>What downside protection means</a:t>
+              <a:t>Win by losing less</a:t>
             </a:r>
           </a:p>
           <a:p>
@@ -23997,7 +23969,7 @@
                 </a:solidFill>
                 <a:latin typeface="Arial"/>
               </a:rPr>
-              <a:t>In the market’s down months — any month the market fell — Athanase fell ~1.5% on average versus the market’s ~3.8%, losing less than half as much when it matters.</a:t>
+              <a:t>Athanase keeps pace in up markets but takes less than half the downside — 93% up-capture, 43% down-capture. The asymmetry, not outsized rallies, is the edge.</a:t>
             </a:r>
           </a:p>
           <a:p>
@@ -24016,7 +23988,7 @@
                 </a:solidFill>
                 <a:latin typeface="Times New Roman"/>
               </a:rPr>
-              <a:t>Positive when the market wasn’t</a:t>
+              <a:t>And it compounds</a:t>
             </a:r>
           </a:p>
           <a:p>
@@ -24035,7 +24007,7 @@
                 </a:solidFill>
                 <a:latin typeface="Arial"/>
               </a:rPr>
-              <a:t>Across the six worst years for global equities, Athanase outperformed in five — and stayed positive in two: +9% in 2015 and +0.3% in 2022, while the market fell −6% and −20%.</a:t>
+              <a:t>Losing less in every drawdown leaves more capital working in the recovery. Since 2006 that turned each €1 into ~€18 of capital — 18× growth, versus ~3.2× for the market.</a:t>
             </a:r>
           </a:p>
           <a:p>
@@ -24054,7 +24026,7 @@
                 </a:solidFill>
                 <a:latin typeface="Times New Roman"/>
               </a:rPr>
-              <a:t>Why it compounds</a:t>
+              <a:t>Net of every fee</a:t>
             </a:r>
           </a:p>
           <a:p>
@@ -24073,7 +24045,7 @@
                 </a:solidFill>
                 <a:latin typeface="Arial"/>
               </a:rPr>
-              <a:t>Losing less in drawdowns leaves more capital working in the recovery — the engine behind 18× growth of capital vs 3.2× for the market since 2006.</a:t>
+              <a:t>16.3% net per year versus the market’s 6.2% — about +10 points a year, after all fees and across two full market cycles.</a:t>
             </a:r>
           </a:p>
         </p:txBody>
